--- a/Aspire.pptx
+++ b/Aspire.pptx
@@ -2,10 +2,22 @@
 <file path=ppt/presentation.xml><?xml version="1.0" encoding="utf-8"?>
 <p:presentation xmlns:a="http://schemas.openxmlformats.org/drawingml/2006/main" xmlns:r="http://schemas.openxmlformats.org/officeDocument/2006/relationships" xmlns:p="http://schemas.openxmlformats.org/presentationml/2006/main" saveSubsetFonts="1">
   <p:sldMasterIdLst>
-    <p:sldMasterId id="2147483648" r:id="rId1"/>
+    <p:sldMasterId id="2147483696" r:id="rId1"/>
   </p:sldMasterIdLst>
+  <p:notesMasterIdLst>
+    <p:notesMasterId r:id="rId12"/>
+  </p:notesMasterIdLst>
   <p:sldIdLst>
     <p:sldId id="256" r:id="rId2"/>
+    <p:sldId id="257" r:id="rId3"/>
+    <p:sldId id="258" r:id="rId4"/>
+    <p:sldId id="264" r:id="rId5"/>
+    <p:sldId id="259" r:id="rId6"/>
+    <p:sldId id="260" r:id="rId7"/>
+    <p:sldId id="265" r:id="rId8"/>
+    <p:sldId id="263" r:id="rId9"/>
+    <p:sldId id="261" r:id="rId10"/>
+    <p:sldId id="262" r:id="rId11"/>
   </p:sldIdLst>
   <p:sldSz cx="12192000" cy="6858000"/>
   <p:notesSz cx="6858000" cy="9144000"/>
@@ -104,7 +116,533 @@
       </a:defRPr>
     </a:lvl9pPr>
   </p:defaultTextStyle>
+  <p:extLst>
+    <p:ext uri="{EFAFB233-063F-42B5-8137-9DF3F51BA10A}">
+      <p15:sldGuideLst xmlns:p15="http://schemas.microsoft.com/office/powerpoint/2012/main"/>
+    </p:ext>
+  </p:extLst>
 </p:presentation>
+</file>
+
+<file path=ppt/notesMasters/notesMaster1.xml><?xml version="1.0" encoding="utf-8"?>
+<p:notesMaster xmlns:a="http://schemas.openxmlformats.org/drawingml/2006/main" xmlns:r="http://schemas.openxmlformats.org/officeDocument/2006/relationships" xmlns:p="http://schemas.openxmlformats.org/presentationml/2006/main">
+  <p:cSld>
+    <p:bg>
+      <p:bgRef idx="1001">
+        <a:schemeClr val="bg1"/>
+      </p:bgRef>
+    </p:bg>
+    <p:spTree>
+      <p:nvGrpSpPr>
+        <p:cNvPr id="1" name=""/>
+        <p:cNvGrpSpPr/>
+        <p:nvPr/>
+      </p:nvGrpSpPr>
+      <p:grpSpPr>
+        <a:xfrm>
+          <a:off x="0" y="0"/>
+          <a:ext cx="0" cy="0"/>
+          <a:chOff x="0" y="0"/>
+          <a:chExt cx="0" cy="0"/>
+        </a:xfrm>
+      </p:grpSpPr>
+      <p:sp>
+        <p:nvSpPr>
+          <p:cNvPr id="2" name="Header Placeholder 1"/>
+          <p:cNvSpPr>
+            <a:spLocks noGrp="1"/>
+          </p:cNvSpPr>
+          <p:nvPr>
+            <p:ph type="hdr" sz="quarter"/>
+          </p:nvPr>
+        </p:nvSpPr>
+        <p:spPr>
+          <a:xfrm>
+            <a:off x="0" y="0"/>
+            <a:ext cx="2971800" cy="458788"/>
+          </a:xfrm>
+          <a:prstGeom prst="rect">
+            <a:avLst/>
+          </a:prstGeom>
+        </p:spPr>
+        <p:txBody>
+          <a:bodyPr vert="horz" lIns="91440" tIns="45720" rIns="91440" bIns="45720" rtlCol="0"/>
+          <a:lstStyle>
+            <a:lvl1pPr algn="l">
+              <a:defRPr sz="1200"/>
+            </a:lvl1pPr>
+          </a:lstStyle>
+          <a:p>
+            <a:endParaRPr lang="en-AU"/>
+          </a:p>
+        </p:txBody>
+      </p:sp>
+      <p:sp>
+        <p:nvSpPr>
+          <p:cNvPr id="3" name="Date Placeholder 2"/>
+          <p:cNvSpPr>
+            <a:spLocks noGrp="1"/>
+          </p:cNvSpPr>
+          <p:nvPr>
+            <p:ph type="dt" idx="1"/>
+          </p:nvPr>
+        </p:nvSpPr>
+        <p:spPr>
+          <a:xfrm>
+            <a:off x="3884613" y="0"/>
+            <a:ext cx="2971800" cy="458788"/>
+          </a:xfrm>
+          <a:prstGeom prst="rect">
+            <a:avLst/>
+          </a:prstGeom>
+        </p:spPr>
+        <p:txBody>
+          <a:bodyPr vert="horz" lIns="91440" tIns="45720" rIns="91440" bIns="45720" rtlCol="0"/>
+          <a:lstStyle>
+            <a:lvl1pPr algn="r">
+              <a:defRPr sz="1200"/>
+            </a:lvl1pPr>
+          </a:lstStyle>
+          <a:p>
+            <a:fld id="{0E8ABD95-CF89-4997-A5D9-D8BD864FD8A3}" type="datetimeFigureOut">
+              <a:rPr lang="en-AU" smtClean="0"/>
+              <a:t>Wed 1/04/2026</a:t>
+            </a:fld>
+            <a:endParaRPr lang="en-AU"/>
+          </a:p>
+        </p:txBody>
+      </p:sp>
+      <p:sp>
+        <p:nvSpPr>
+          <p:cNvPr id="4" name="Slide Image Placeholder 3"/>
+          <p:cNvSpPr>
+            <a:spLocks noGrp="1" noRot="1" noChangeAspect="1"/>
+          </p:cNvSpPr>
+          <p:nvPr>
+            <p:ph type="sldImg" idx="2"/>
+          </p:nvPr>
+        </p:nvSpPr>
+        <p:spPr>
+          <a:xfrm>
+            <a:off x="685800" y="1143000"/>
+            <a:ext cx="5486400" cy="3086100"/>
+          </a:xfrm>
+          <a:prstGeom prst="rect">
+            <a:avLst/>
+          </a:prstGeom>
+          <a:noFill/>
+          <a:ln w="12700">
+            <a:solidFill>
+              <a:prstClr val="black"/>
+            </a:solidFill>
+          </a:ln>
+        </p:spPr>
+        <p:txBody>
+          <a:bodyPr vert="horz" lIns="91440" tIns="45720" rIns="91440" bIns="45720" rtlCol="0" anchor="ctr"/>
+          <a:lstStyle/>
+          <a:p>
+            <a:endParaRPr lang="en-AU"/>
+          </a:p>
+        </p:txBody>
+      </p:sp>
+      <p:sp>
+        <p:nvSpPr>
+          <p:cNvPr id="5" name="Notes Placeholder 4"/>
+          <p:cNvSpPr>
+            <a:spLocks noGrp="1"/>
+          </p:cNvSpPr>
+          <p:nvPr>
+            <p:ph type="body" sz="quarter" idx="3"/>
+          </p:nvPr>
+        </p:nvSpPr>
+        <p:spPr>
+          <a:xfrm>
+            <a:off x="685800" y="4400550"/>
+            <a:ext cx="5486400" cy="3600450"/>
+          </a:xfrm>
+          <a:prstGeom prst="rect">
+            <a:avLst/>
+          </a:prstGeom>
+        </p:spPr>
+        <p:txBody>
+          <a:bodyPr vert="horz" lIns="91440" tIns="45720" rIns="91440" bIns="45720" rtlCol="0"/>
+          <a:lstStyle/>
+          <a:p>
+            <a:pPr lvl="0"/>
+            <a:r>
+              <a:rPr lang="en-US"/>
+              <a:t>Click to edit Master text styles</a:t>
+            </a:r>
+          </a:p>
+          <a:p>
+            <a:pPr lvl="1"/>
+            <a:r>
+              <a:rPr lang="en-US"/>
+              <a:t>Second level</a:t>
+            </a:r>
+          </a:p>
+          <a:p>
+            <a:pPr lvl="2"/>
+            <a:r>
+              <a:rPr lang="en-US"/>
+              <a:t>Third level</a:t>
+            </a:r>
+          </a:p>
+          <a:p>
+            <a:pPr lvl="3"/>
+            <a:r>
+              <a:rPr lang="en-US"/>
+              <a:t>Fourth level</a:t>
+            </a:r>
+          </a:p>
+          <a:p>
+            <a:pPr lvl="4"/>
+            <a:r>
+              <a:rPr lang="en-US"/>
+              <a:t>Fifth level</a:t>
+            </a:r>
+            <a:endParaRPr lang="en-AU"/>
+          </a:p>
+        </p:txBody>
+      </p:sp>
+      <p:sp>
+        <p:nvSpPr>
+          <p:cNvPr id="6" name="Footer Placeholder 5"/>
+          <p:cNvSpPr>
+            <a:spLocks noGrp="1"/>
+          </p:cNvSpPr>
+          <p:nvPr>
+            <p:ph type="ftr" sz="quarter" idx="4"/>
+          </p:nvPr>
+        </p:nvSpPr>
+        <p:spPr>
+          <a:xfrm>
+            <a:off x="0" y="8685213"/>
+            <a:ext cx="2971800" cy="458787"/>
+          </a:xfrm>
+          <a:prstGeom prst="rect">
+            <a:avLst/>
+          </a:prstGeom>
+        </p:spPr>
+        <p:txBody>
+          <a:bodyPr vert="horz" lIns="91440" tIns="45720" rIns="91440" bIns="45720" rtlCol="0" anchor="b"/>
+          <a:lstStyle>
+            <a:lvl1pPr algn="l">
+              <a:defRPr sz="1200"/>
+            </a:lvl1pPr>
+          </a:lstStyle>
+          <a:p>
+            <a:endParaRPr lang="en-AU"/>
+          </a:p>
+        </p:txBody>
+      </p:sp>
+      <p:sp>
+        <p:nvSpPr>
+          <p:cNvPr id="7" name="Slide Number Placeholder 6"/>
+          <p:cNvSpPr>
+            <a:spLocks noGrp="1"/>
+          </p:cNvSpPr>
+          <p:nvPr>
+            <p:ph type="sldNum" sz="quarter" idx="5"/>
+          </p:nvPr>
+        </p:nvSpPr>
+        <p:spPr>
+          <a:xfrm>
+            <a:off x="3884613" y="8685213"/>
+            <a:ext cx="2971800" cy="458787"/>
+          </a:xfrm>
+          <a:prstGeom prst="rect">
+            <a:avLst/>
+          </a:prstGeom>
+        </p:spPr>
+        <p:txBody>
+          <a:bodyPr vert="horz" lIns="91440" tIns="45720" rIns="91440" bIns="45720" rtlCol="0" anchor="b"/>
+          <a:lstStyle>
+            <a:lvl1pPr algn="r">
+              <a:defRPr sz="1200"/>
+            </a:lvl1pPr>
+          </a:lstStyle>
+          <a:p>
+            <a:fld id="{69F1E228-2BE6-48C1-A010-E4FD7019896E}" type="slidenum">
+              <a:rPr lang="en-AU" smtClean="0"/>
+              <a:t>‹#›</a:t>
+            </a:fld>
+            <a:endParaRPr lang="en-AU"/>
+          </a:p>
+        </p:txBody>
+      </p:sp>
+    </p:spTree>
+    <p:extLst>
+      <p:ext uri="{BB962C8B-B14F-4D97-AF65-F5344CB8AC3E}">
+        <p14:creationId xmlns:p14="http://schemas.microsoft.com/office/powerpoint/2010/main" val="3064507226"/>
+      </p:ext>
+    </p:extLst>
+  </p:cSld>
+  <p:clrMap bg1="lt1" tx1="dk1" bg2="lt2" tx2="dk2" accent1="accent1" accent2="accent2" accent3="accent3" accent4="accent4" accent5="accent5" accent6="accent6" hlink="hlink" folHlink="folHlink"/>
+  <p:notesStyle>
+    <a:lvl1pPr marL="0" algn="l" defTabSz="914400" rtl="0" eaLnBrk="1" latinLnBrk="0" hangingPunct="1">
+      <a:defRPr sz="1200" kern="1200">
+        <a:solidFill>
+          <a:schemeClr val="tx1"/>
+        </a:solidFill>
+        <a:latin typeface="+mn-lt"/>
+        <a:ea typeface="+mn-ea"/>
+        <a:cs typeface="+mn-cs"/>
+      </a:defRPr>
+    </a:lvl1pPr>
+    <a:lvl2pPr marL="457200" algn="l" defTabSz="914400" rtl="0" eaLnBrk="1" latinLnBrk="0" hangingPunct="1">
+      <a:defRPr sz="1200" kern="1200">
+        <a:solidFill>
+          <a:schemeClr val="tx1"/>
+        </a:solidFill>
+        <a:latin typeface="+mn-lt"/>
+        <a:ea typeface="+mn-ea"/>
+        <a:cs typeface="+mn-cs"/>
+      </a:defRPr>
+    </a:lvl2pPr>
+    <a:lvl3pPr marL="914400" algn="l" defTabSz="914400" rtl="0" eaLnBrk="1" latinLnBrk="0" hangingPunct="1">
+      <a:defRPr sz="1200" kern="1200">
+        <a:solidFill>
+          <a:schemeClr val="tx1"/>
+        </a:solidFill>
+        <a:latin typeface="+mn-lt"/>
+        <a:ea typeface="+mn-ea"/>
+        <a:cs typeface="+mn-cs"/>
+      </a:defRPr>
+    </a:lvl3pPr>
+    <a:lvl4pPr marL="1371600" algn="l" defTabSz="914400" rtl="0" eaLnBrk="1" latinLnBrk="0" hangingPunct="1">
+      <a:defRPr sz="1200" kern="1200">
+        <a:solidFill>
+          <a:schemeClr val="tx1"/>
+        </a:solidFill>
+        <a:latin typeface="+mn-lt"/>
+        <a:ea typeface="+mn-ea"/>
+        <a:cs typeface="+mn-cs"/>
+      </a:defRPr>
+    </a:lvl4pPr>
+    <a:lvl5pPr marL="1828800" algn="l" defTabSz="914400" rtl="0" eaLnBrk="1" latinLnBrk="0" hangingPunct="1">
+      <a:defRPr sz="1200" kern="1200">
+        <a:solidFill>
+          <a:schemeClr val="tx1"/>
+        </a:solidFill>
+        <a:latin typeface="+mn-lt"/>
+        <a:ea typeface="+mn-ea"/>
+        <a:cs typeface="+mn-cs"/>
+      </a:defRPr>
+    </a:lvl5pPr>
+    <a:lvl6pPr marL="2286000" algn="l" defTabSz="914400" rtl="0" eaLnBrk="1" latinLnBrk="0" hangingPunct="1">
+      <a:defRPr sz="1200" kern="1200">
+        <a:solidFill>
+          <a:schemeClr val="tx1"/>
+        </a:solidFill>
+        <a:latin typeface="+mn-lt"/>
+        <a:ea typeface="+mn-ea"/>
+        <a:cs typeface="+mn-cs"/>
+      </a:defRPr>
+    </a:lvl6pPr>
+    <a:lvl7pPr marL="2743200" algn="l" defTabSz="914400" rtl="0" eaLnBrk="1" latinLnBrk="0" hangingPunct="1">
+      <a:defRPr sz="1200" kern="1200">
+        <a:solidFill>
+          <a:schemeClr val="tx1"/>
+        </a:solidFill>
+        <a:latin typeface="+mn-lt"/>
+        <a:ea typeface="+mn-ea"/>
+        <a:cs typeface="+mn-cs"/>
+      </a:defRPr>
+    </a:lvl7pPr>
+    <a:lvl8pPr marL="3200400" algn="l" defTabSz="914400" rtl="0" eaLnBrk="1" latinLnBrk="0" hangingPunct="1">
+      <a:defRPr sz="1200" kern="1200">
+        <a:solidFill>
+          <a:schemeClr val="tx1"/>
+        </a:solidFill>
+        <a:latin typeface="+mn-lt"/>
+        <a:ea typeface="+mn-ea"/>
+        <a:cs typeface="+mn-cs"/>
+      </a:defRPr>
+    </a:lvl8pPr>
+    <a:lvl9pPr marL="3657600" algn="l" defTabSz="914400" rtl="0" eaLnBrk="1" latinLnBrk="0" hangingPunct="1">
+      <a:defRPr sz="1200" kern="1200">
+        <a:solidFill>
+          <a:schemeClr val="tx1"/>
+        </a:solidFill>
+        <a:latin typeface="+mn-lt"/>
+        <a:ea typeface="+mn-ea"/>
+        <a:cs typeface="+mn-cs"/>
+      </a:defRPr>
+    </a:lvl9pPr>
+  </p:notesStyle>
+</p:notesMaster>
+</file>
+
+<file path=ppt/notesSlides/notesSlide1.xml><?xml version="1.0" encoding="utf-8"?>
+<p:notes xmlns:a="http://schemas.openxmlformats.org/drawingml/2006/main" xmlns:r="http://schemas.openxmlformats.org/officeDocument/2006/relationships" xmlns:p="http://schemas.openxmlformats.org/presentationml/2006/main">
+  <p:cSld>
+    <p:spTree>
+      <p:nvGrpSpPr>
+        <p:cNvPr id="1" name=""/>
+        <p:cNvGrpSpPr/>
+        <p:nvPr/>
+      </p:nvGrpSpPr>
+      <p:grpSpPr>
+        <a:xfrm>
+          <a:off x="0" y="0"/>
+          <a:ext cx="0" cy="0"/>
+          <a:chOff x="0" y="0"/>
+          <a:chExt cx="0" cy="0"/>
+        </a:xfrm>
+      </p:grpSpPr>
+      <p:sp>
+        <p:nvSpPr>
+          <p:cNvPr id="2" name="Slide Image Placeholder 1"/>
+          <p:cNvSpPr>
+            <a:spLocks noGrp="1" noRot="1" noChangeAspect="1"/>
+          </p:cNvSpPr>
+          <p:nvPr>
+            <p:ph type="sldImg"/>
+          </p:nvPr>
+        </p:nvSpPr>
+        <p:spPr/>
+      </p:sp>
+      <p:sp>
+        <p:nvSpPr>
+          <p:cNvPr id="3" name="Notes Placeholder 2"/>
+          <p:cNvSpPr>
+            <a:spLocks noGrp="1"/>
+          </p:cNvSpPr>
+          <p:nvPr>
+            <p:ph type="body" idx="1"/>
+          </p:nvPr>
+        </p:nvSpPr>
+        <p:spPr/>
+        <p:txBody>
+          <a:bodyPr/>
+          <a:lstStyle/>
+          <a:p>
+            <a:r>
+              <a:rPr lang="en-AU" dirty="0"/>
+              <a:t>Running together vs running separate</a:t>
+            </a:r>
+          </a:p>
+        </p:txBody>
+      </p:sp>
+      <p:sp>
+        <p:nvSpPr>
+          <p:cNvPr id="4" name="Slide Number Placeholder 3"/>
+          <p:cNvSpPr>
+            <a:spLocks noGrp="1"/>
+          </p:cNvSpPr>
+          <p:nvPr>
+            <p:ph type="sldNum" sz="quarter" idx="5"/>
+          </p:nvPr>
+        </p:nvSpPr>
+        <p:spPr/>
+        <p:txBody>
+          <a:bodyPr/>
+          <a:lstStyle/>
+          <a:p>
+            <a:fld id="{69F1E228-2BE6-48C1-A010-E4FD7019896E}" type="slidenum">
+              <a:rPr lang="en-AU" smtClean="0"/>
+              <a:t>4</a:t>
+            </a:fld>
+            <a:endParaRPr lang="en-AU"/>
+          </a:p>
+        </p:txBody>
+      </p:sp>
+    </p:spTree>
+    <p:extLst>
+      <p:ext uri="{BB962C8B-B14F-4D97-AF65-F5344CB8AC3E}">
+        <p14:creationId xmlns:p14="http://schemas.microsoft.com/office/powerpoint/2010/main" val="2285804961"/>
+      </p:ext>
+    </p:extLst>
+  </p:cSld>
+  <p:clrMapOvr>
+    <a:masterClrMapping/>
+  </p:clrMapOvr>
+</p:notes>
+</file>
+
+<file path=ppt/notesSlides/notesSlide2.xml><?xml version="1.0" encoding="utf-8"?>
+<p:notes xmlns:a="http://schemas.openxmlformats.org/drawingml/2006/main" xmlns:r="http://schemas.openxmlformats.org/officeDocument/2006/relationships" xmlns:p="http://schemas.openxmlformats.org/presentationml/2006/main">
+  <p:cSld>
+    <p:spTree>
+      <p:nvGrpSpPr>
+        <p:cNvPr id="1" name=""/>
+        <p:cNvGrpSpPr/>
+        <p:nvPr/>
+      </p:nvGrpSpPr>
+      <p:grpSpPr>
+        <a:xfrm>
+          <a:off x="0" y="0"/>
+          <a:ext cx="0" cy="0"/>
+          <a:chOff x="0" y="0"/>
+          <a:chExt cx="0" cy="0"/>
+        </a:xfrm>
+      </p:grpSpPr>
+      <p:sp>
+        <p:nvSpPr>
+          <p:cNvPr id="2" name="Slide Image Placeholder 1"/>
+          <p:cNvSpPr>
+            <a:spLocks noGrp="1" noRot="1" noChangeAspect="1"/>
+          </p:cNvSpPr>
+          <p:nvPr>
+            <p:ph type="sldImg"/>
+          </p:nvPr>
+        </p:nvSpPr>
+        <p:spPr/>
+      </p:sp>
+      <p:sp>
+        <p:nvSpPr>
+          <p:cNvPr id="3" name="Notes Placeholder 2"/>
+          <p:cNvSpPr>
+            <a:spLocks noGrp="1"/>
+          </p:cNvSpPr>
+          <p:nvPr>
+            <p:ph type="body" idx="1"/>
+          </p:nvPr>
+        </p:nvSpPr>
+        <p:spPr/>
+        <p:txBody>
+          <a:bodyPr/>
+          <a:lstStyle/>
+          <a:p>
+            <a:endParaRPr lang="en-AU" dirty="0"/>
+          </a:p>
+        </p:txBody>
+      </p:sp>
+      <p:sp>
+        <p:nvSpPr>
+          <p:cNvPr id="4" name="Slide Number Placeholder 3"/>
+          <p:cNvSpPr>
+            <a:spLocks noGrp="1"/>
+          </p:cNvSpPr>
+          <p:nvPr>
+            <p:ph type="sldNum" sz="quarter" idx="5"/>
+          </p:nvPr>
+        </p:nvSpPr>
+        <p:spPr/>
+        <p:txBody>
+          <a:bodyPr/>
+          <a:lstStyle/>
+          <a:p>
+            <a:fld id="{69F1E228-2BE6-48C1-A010-E4FD7019896E}" type="slidenum">
+              <a:rPr lang="en-AU" smtClean="0"/>
+              <a:t>9</a:t>
+            </a:fld>
+            <a:endParaRPr lang="en-AU"/>
+          </a:p>
+        </p:txBody>
+      </p:sp>
+    </p:spTree>
+    <p:extLst>
+      <p:ext uri="{BB962C8B-B14F-4D97-AF65-F5344CB8AC3E}">
+        <p14:creationId xmlns:p14="http://schemas.microsoft.com/office/powerpoint/2010/main" val="2571222990"/>
+      </p:ext>
+    </p:extLst>
+  </p:cSld>
+  <p:clrMapOvr>
+    <a:masterClrMapping/>
+  </p:clrMapOvr>
+</p:notes>
 </file>
 
 <file path=ppt/slideLayouts/slideLayout1.xml><?xml version="1.0" encoding="utf-8"?>
@@ -129,7 +667,7 @@
           <p:cNvPr id="2" name="Title 1">
             <a:extLst>
               <a:ext uri="{FF2B5EF4-FFF2-40B4-BE49-F238E27FC236}">
-                <a16:creationId xmlns:a16="http://schemas.microsoft.com/office/drawing/2014/main" id="{10DA356B-5A9F-2B87-0717-85533178622C}"/>
+                <a16:creationId xmlns:a16="http://schemas.microsoft.com/office/drawing/2014/main" id="{591C0026-889D-582B-777E-36351DE02389}"/>
               </a:ext>
             </a:extLst>
           </p:cNvPr>
@@ -155,10 +693,10 @@
           </a:lstStyle>
           <a:p>
             <a:r>
-              <a:rPr lang="en-US"/>
+              <a:rPr lang="en-US" dirty="0"/>
               <a:t>Click to edit Master title style</a:t>
             </a:r>
-            <a:endParaRPr lang="en-AU"/>
+            <a:endParaRPr lang="en-AU" dirty="0"/>
           </a:p>
         </p:txBody>
       </p:sp>
@@ -167,7 +705,7 @@
           <p:cNvPr id="3" name="Subtitle 2">
             <a:extLst>
               <a:ext uri="{FF2B5EF4-FFF2-40B4-BE49-F238E27FC236}">
-                <a16:creationId xmlns:a16="http://schemas.microsoft.com/office/drawing/2014/main" id="{30DF2963-AB5D-62C2-9366-5A728E590B5D}"/>
+                <a16:creationId xmlns:a16="http://schemas.microsoft.com/office/drawing/2014/main" id="{5B411A9B-27A4-AD4D-AF00-9F1C836A8479}"/>
               </a:ext>
             </a:extLst>
           </p:cNvPr>
@@ -238,7 +776,7 @@
           <p:cNvPr id="4" name="Date Placeholder 3">
             <a:extLst>
               <a:ext uri="{FF2B5EF4-FFF2-40B4-BE49-F238E27FC236}">
-                <a16:creationId xmlns:a16="http://schemas.microsoft.com/office/drawing/2014/main" id="{41556E22-E687-403F-BA7D-614C18273569}"/>
+                <a16:creationId xmlns:a16="http://schemas.microsoft.com/office/drawing/2014/main" id="{C412E330-6DDF-4129-A555-5651CB460D35}"/>
               </a:ext>
             </a:extLst>
           </p:cNvPr>
@@ -267,7 +805,7 @@
           <p:cNvPr id="5" name="Footer Placeholder 4">
             <a:extLst>
               <a:ext uri="{FF2B5EF4-FFF2-40B4-BE49-F238E27FC236}">
-                <a16:creationId xmlns:a16="http://schemas.microsoft.com/office/drawing/2014/main" id="{2175B4EF-AC13-DF2D-85D8-6B317695D90B}"/>
+                <a16:creationId xmlns:a16="http://schemas.microsoft.com/office/drawing/2014/main" id="{4202F3D5-A30F-7028-81D0-5ECA6B483827}"/>
               </a:ext>
             </a:extLst>
           </p:cNvPr>
@@ -292,7 +830,7 @@
           <p:cNvPr id="6" name="Slide Number Placeholder 5">
             <a:extLst>
               <a:ext uri="{FF2B5EF4-FFF2-40B4-BE49-F238E27FC236}">
-                <a16:creationId xmlns:a16="http://schemas.microsoft.com/office/drawing/2014/main" id="{2DEAB21C-56A6-BE74-0506-A5593B32BDDE}"/>
+                <a16:creationId xmlns:a16="http://schemas.microsoft.com/office/drawing/2014/main" id="{1B06C7C9-6733-E6DA-C4A1-E2FD869587A7}"/>
               </a:ext>
             </a:extLst>
           </p:cNvPr>
@@ -319,7 +857,7 @@
     </p:spTree>
     <p:extLst>
       <p:ext uri="{BB962C8B-B14F-4D97-AF65-F5344CB8AC3E}">
-        <p14:creationId xmlns:p14="http://schemas.microsoft.com/office/powerpoint/2010/main" val="1336432254"/>
+        <p14:creationId xmlns:p14="http://schemas.microsoft.com/office/powerpoint/2010/main" val="1901148274"/>
       </p:ext>
     </p:extLst>
   </p:cSld>
@@ -351,7 +889,7 @@
           <p:cNvPr id="2" name="Title 1">
             <a:extLst>
               <a:ext uri="{FF2B5EF4-FFF2-40B4-BE49-F238E27FC236}">
-                <a16:creationId xmlns:a16="http://schemas.microsoft.com/office/drawing/2014/main" id="{6896B6FC-0E00-6DD9-1A4F-11C6F2E625C9}"/>
+                <a16:creationId xmlns:a16="http://schemas.microsoft.com/office/drawing/2014/main" id="{DCD46592-F4CC-7F9A-53BE-64A1978A7BFB}"/>
               </a:ext>
             </a:extLst>
           </p:cNvPr>
@@ -380,7 +918,7 @@
           <p:cNvPr id="3" name="Vertical Text Placeholder 2">
             <a:extLst>
               <a:ext uri="{FF2B5EF4-FFF2-40B4-BE49-F238E27FC236}">
-                <a16:creationId xmlns:a16="http://schemas.microsoft.com/office/drawing/2014/main" id="{8B9B57DF-3BBD-2746-54C4-1EF13C5984CF}"/>
+                <a16:creationId xmlns:a16="http://schemas.microsoft.com/office/drawing/2014/main" id="{701BA32A-8FEC-3227-BE9C-CD23EAFFF2B3}"/>
               </a:ext>
             </a:extLst>
           </p:cNvPr>
@@ -438,7 +976,7 @@
           <p:cNvPr id="4" name="Date Placeholder 3">
             <a:extLst>
               <a:ext uri="{FF2B5EF4-FFF2-40B4-BE49-F238E27FC236}">
-                <a16:creationId xmlns:a16="http://schemas.microsoft.com/office/drawing/2014/main" id="{4BA034FA-096F-8BF2-E15E-15475DEEFC07}"/>
+                <a16:creationId xmlns:a16="http://schemas.microsoft.com/office/drawing/2014/main" id="{044B570A-8147-7119-AB21-EF5CD4C14DB2}"/>
               </a:ext>
             </a:extLst>
           </p:cNvPr>
@@ -467,7 +1005,7 @@
           <p:cNvPr id="5" name="Footer Placeholder 4">
             <a:extLst>
               <a:ext uri="{FF2B5EF4-FFF2-40B4-BE49-F238E27FC236}">
-                <a16:creationId xmlns:a16="http://schemas.microsoft.com/office/drawing/2014/main" id="{77CE4269-A87D-F203-3BB3-57383EDF4066}"/>
+                <a16:creationId xmlns:a16="http://schemas.microsoft.com/office/drawing/2014/main" id="{A707929F-E40A-032B-7E7B-4AD536D27AD5}"/>
               </a:ext>
             </a:extLst>
           </p:cNvPr>
@@ -492,7 +1030,7 @@
           <p:cNvPr id="6" name="Slide Number Placeholder 5">
             <a:extLst>
               <a:ext uri="{FF2B5EF4-FFF2-40B4-BE49-F238E27FC236}">
-                <a16:creationId xmlns:a16="http://schemas.microsoft.com/office/drawing/2014/main" id="{2DC0887C-F630-C538-C4F1-FC237EE87363}"/>
+                <a16:creationId xmlns:a16="http://schemas.microsoft.com/office/drawing/2014/main" id="{6C00F3D1-12C6-8D36-7E08-8072FF1A4D8C}"/>
               </a:ext>
             </a:extLst>
           </p:cNvPr>
@@ -519,7 +1057,7 @@
     </p:spTree>
     <p:extLst>
       <p:ext uri="{BB962C8B-B14F-4D97-AF65-F5344CB8AC3E}">
-        <p14:creationId xmlns:p14="http://schemas.microsoft.com/office/powerpoint/2010/main" val="2705994165"/>
+        <p14:creationId xmlns:p14="http://schemas.microsoft.com/office/powerpoint/2010/main" val="3685671757"/>
       </p:ext>
     </p:extLst>
   </p:cSld>
@@ -551,7 +1089,7 @@
           <p:cNvPr id="2" name="Vertical Title 1">
             <a:extLst>
               <a:ext uri="{FF2B5EF4-FFF2-40B4-BE49-F238E27FC236}">
-                <a16:creationId xmlns:a16="http://schemas.microsoft.com/office/drawing/2014/main" id="{E771FD9F-2F88-B9DD-970C-A2FDAC8216E2}"/>
+                <a16:creationId xmlns:a16="http://schemas.microsoft.com/office/drawing/2014/main" id="{70976A45-E1EF-620C-C500-952243BBD5FB}"/>
               </a:ext>
             </a:extLst>
           </p:cNvPr>
@@ -585,7 +1123,7 @@
           <p:cNvPr id="3" name="Vertical Text Placeholder 2">
             <a:extLst>
               <a:ext uri="{FF2B5EF4-FFF2-40B4-BE49-F238E27FC236}">
-                <a16:creationId xmlns:a16="http://schemas.microsoft.com/office/drawing/2014/main" id="{BF17DE76-887E-9A55-01F0-ED1E841078B5}"/>
+                <a16:creationId xmlns:a16="http://schemas.microsoft.com/office/drawing/2014/main" id="{089312BC-A6D7-9B38-93C2-67850D476018}"/>
               </a:ext>
             </a:extLst>
           </p:cNvPr>
@@ -648,7 +1186,7 @@
           <p:cNvPr id="4" name="Date Placeholder 3">
             <a:extLst>
               <a:ext uri="{FF2B5EF4-FFF2-40B4-BE49-F238E27FC236}">
-                <a16:creationId xmlns:a16="http://schemas.microsoft.com/office/drawing/2014/main" id="{9A28446F-7C54-A142-6518-169FDA49CE44}"/>
+                <a16:creationId xmlns:a16="http://schemas.microsoft.com/office/drawing/2014/main" id="{32B708DD-6239-26D3-F3A1-A8CCA767C909}"/>
               </a:ext>
             </a:extLst>
           </p:cNvPr>
@@ -677,7 +1215,7 @@
           <p:cNvPr id="5" name="Footer Placeholder 4">
             <a:extLst>
               <a:ext uri="{FF2B5EF4-FFF2-40B4-BE49-F238E27FC236}">
-                <a16:creationId xmlns:a16="http://schemas.microsoft.com/office/drawing/2014/main" id="{9C2B1C8D-0FF9-CA0F-A5CB-E1586CC9CC5A}"/>
+                <a16:creationId xmlns:a16="http://schemas.microsoft.com/office/drawing/2014/main" id="{B38FB2E6-57D4-DBD6-6BAC-123E004BF25C}"/>
               </a:ext>
             </a:extLst>
           </p:cNvPr>
@@ -702,7 +1240,7 @@
           <p:cNvPr id="6" name="Slide Number Placeholder 5">
             <a:extLst>
               <a:ext uri="{FF2B5EF4-FFF2-40B4-BE49-F238E27FC236}">
-                <a16:creationId xmlns:a16="http://schemas.microsoft.com/office/drawing/2014/main" id="{A5117ADB-E3CD-4A16-A891-63E4D7DFD007}"/>
+                <a16:creationId xmlns:a16="http://schemas.microsoft.com/office/drawing/2014/main" id="{3B31FBB8-5C1F-0400-C0CC-DD5EC28991FE}"/>
               </a:ext>
             </a:extLst>
           </p:cNvPr>
@@ -729,7 +1267,7 @@
     </p:spTree>
     <p:extLst>
       <p:ext uri="{BB962C8B-B14F-4D97-AF65-F5344CB8AC3E}">
-        <p14:creationId xmlns:p14="http://schemas.microsoft.com/office/powerpoint/2010/main" val="538907584"/>
+        <p14:creationId xmlns:p14="http://schemas.microsoft.com/office/powerpoint/2010/main" val="1370307707"/>
       </p:ext>
     </p:extLst>
   </p:cSld>
@@ -761,7 +1299,7 @@
           <p:cNvPr id="2" name="Title 1">
             <a:extLst>
               <a:ext uri="{FF2B5EF4-FFF2-40B4-BE49-F238E27FC236}">
-                <a16:creationId xmlns:a16="http://schemas.microsoft.com/office/drawing/2014/main" id="{6BABA065-2F63-2E42-8521-E4EA6B3C9E5C}"/>
+                <a16:creationId xmlns:a16="http://schemas.microsoft.com/office/drawing/2014/main" id="{90994877-51E1-0FF2-6058-C412A715D26C}"/>
               </a:ext>
             </a:extLst>
           </p:cNvPr>
@@ -790,7 +1328,7 @@
           <p:cNvPr id="3" name="Content Placeholder 2">
             <a:extLst>
               <a:ext uri="{FF2B5EF4-FFF2-40B4-BE49-F238E27FC236}">
-                <a16:creationId xmlns:a16="http://schemas.microsoft.com/office/drawing/2014/main" id="{EDB3E320-9955-BEFB-AF71-CD16A76AD7D0}"/>
+                <a16:creationId xmlns:a16="http://schemas.microsoft.com/office/drawing/2014/main" id="{24C59DF8-A49B-DE92-CC2E-F87AE32D0576}"/>
               </a:ext>
             </a:extLst>
           </p:cNvPr>
@@ -848,7 +1386,7 @@
           <p:cNvPr id="4" name="Date Placeholder 3">
             <a:extLst>
               <a:ext uri="{FF2B5EF4-FFF2-40B4-BE49-F238E27FC236}">
-                <a16:creationId xmlns:a16="http://schemas.microsoft.com/office/drawing/2014/main" id="{844C9F02-B292-4141-5F09-F22441F2F091}"/>
+                <a16:creationId xmlns:a16="http://schemas.microsoft.com/office/drawing/2014/main" id="{13267398-047C-72A0-B5BB-4598A10DF95E}"/>
               </a:ext>
             </a:extLst>
           </p:cNvPr>
@@ -877,7 +1415,7 @@
           <p:cNvPr id="5" name="Footer Placeholder 4">
             <a:extLst>
               <a:ext uri="{FF2B5EF4-FFF2-40B4-BE49-F238E27FC236}">
-                <a16:creationId xmlns:a16="http://schemas.microsoft.com/office/drawing/2014/main" id="{1B7DD4FD-C4F4-67C9-071B-601F106FEC7E}"/>
+                <a16:creationId xmlns:a16="http://schemas.microsoft.com/office/drawing/2014/main" id="{A6A6AED8-531B-9333-373C-2EEA539742B3}"/>
               </a:ext>
             </a:extLst>
           </p:cNvPr>
@@ -902,7 +1440,7 @@
           <p:cNvPr id="6" name="Slide Number Placeholder 5">
             <a:extLst>
               <a:ext uri="{FF2B5EF4-FFF2-40B4-BE49-F238E27FC236}">
-                <a16:creationId xmlns:a16="http://schemas.microsoft.com/office/drawing/2014/main" id="{3ED7362C-5866-0E11-A022-8939C39CB123}"/>
+                <a16:creationId xmlns:a16="http://schemas.microsoft.com/office/drawing/2014/main" id="{2C957CA5-443A-829C-0B86-663146E3E96D}"/>
               </a:ext>
             </a:extLst>
           </p:cNvPr>
@@ -929,7 +1467,7 @@
     </p:spTree>
     <p:extLst>
       <p:ext uri="{BB962C8B-B14F-4D97-AF65-F5344CB8AC3E}">
-        <p14:creationId xmlns:p14="http://schemas.microsoft.com/office/powerpoint/2010/main" val="3936568946"/>
+        <p14:creationId xmlns:p14="http://schemas.microsoft.com/office/powerpoint/2010/main" val="3069558300"/>
       </p:ext>
     </p:extLst>
   </p:cSld>
@@ -961,7 +1499,7 @@
           <p:cNvPr id="2" name="Title 1">
             <a:extLst>
               <a:ext uri="{FF2B5EF4-FFF2-40B4-BE49-F238E27FC236}">
-                <a16:creationId xmlns:a16="http://schemas.microsoft.com/office/drawing/2014/main" id="{F7ED129D-DABF-E9EB-76B3-DA504E4CE989}"/>
+                <a16:creationId xmlns:a16="http://schemas.microsoft.com/office/drawing/2014/main" id="{E704FA20-19E0-75C3-2256-D1B9B3DC21C2}"/>
               </a:ext>
             </a:extLst>
           </p:cNvPr>
@@ -999,7 +1537,7 @@
           <p:cNvPr id="3" name="Text Placeholder 2">
             <a:extLst>
               <a:ext uri="{FF2B5EF4-FFF2-40B4-BE49-F238E27FC236}">
-                <a16:creationId xmlns:a16="http://schemas.microsoft.com/office/drawing/2014/main" id="{EFC281C5-946D-17F5-2A96-DAC9D6458CB2}"/>
+                <a16:creationId xmlns:a16="http://schemas.microsoft.com/office/drawing/2014/main" id="{7DECD9D1-E661-006C-C475-2E8F783D6488}"/>
               </a:ext>
             </a:extLst>
           </p:cNvPr>
@@ -1124,7 +1662,7 @@
           <p:cNvPr id="4" name="Date Placeholder 3">
             <a:extLst>
               <a:ext uri="{FF2B5EF4-FFF2-40B4-BE49-F238E27FC236}">
-                <a16:creationId xmlns:a16="http://schemas.microsoft.com/office/drawing/2014/main" id="{D656D65A-0994-DB95-CA20-C0B09AE072C9}"/>
+                <a16:creationId xmlns:a16="http://schemas.microsoft.com/office/drawing/2014/main" id="{FCE02E81-137F-E9AC-70A3-9B3E0134F60F}"/>
               </a:ext>
             </a:extLst>
           </p:cNvPr>
@@ -1153,7 +1691,7 @@
           <p:cNvPr id="5" name="Footer Placeholder 4">
             <a:extLst>
               <a:ext uri="{FF2B5EF4-FFF2-40B4-BE49-F238E27FC236}">
-                <a16:creationId xmlns:a16="http://schemas.microsoft.com/office/drawing/2014/main" id="{AAAF58D8-0450-FAE7-427E-7D13A99F64BF}"/>
+                <a16:creationId xmlns:a16="http://schemas.microsoft.com/office/drawing/2014/main" id="{8E9D7B42-9BC7-175F-FA8F-2508E6E75DB1}"/>
               </a:ext>
             </a:extLst>
           </p:cNvPr>
@@ -1178,7 +1716,7 @@
           <p:cNvPr id="6" name="Slide Number Placeholder 5">
             <a:extLst>
               <a:ext uri="{FF2B5EF4-FFF2-40B4-BE49-F238E27FC236}">
-                <a16:creationId xmlns:a16="http://schemas.microsoft.com/office/drawing/2014/main" id="{421F579F-74CD-97E0-E843-7C5C6C1DDD21}"/>
+                <a16:creationId xmlns:a16="http://schemas.microsoft.com/office/drawing/2014/main" id="{1736C69B-24AA-9DF1-F085-419D250F41DA}"/>
               </a:ext>
             </a:extLst>
           </p:cNvPr>
@@ -1205,7 +1743,7 @@
     </p:spTree>
     <p:extLst>
       <p:ext uri="{BB962C8B-B14F-4D97-AF65-F5344CB8AC3E}">
-        <p14:creationId xmlns:p14="http://schemas.microsoft.com/office/powerpoint/2010/main" val="3664710115"/>
+        <p14:creationId xmlns:p14="http://schemas.microsoft.com/office/powerpoint/2010/main" val="1291205488"/>
       </p:ext>
     </p:extLst>
   </p:cSld>
@@ -1237,7 +1775,7 @@
           <p:cNvPr id="2" name="Title 1">
             <a:extLst>
               <a:ext uri="{FF2B5EF4-FFF2-40B4-BE49-F238E27FC236}">
-                <a16:creationId xmlns:a16="http://schemas.microsoft.com/office/drawing/2014/main" id="{55103357-D5B4-0395-8B2C-E472C255B88F}"/>
+                <a16:creationId xmlns:a16="http://schemas.microsoft.com/office/drawing/2014/main" id="{FAF32291-9008-AEAC-3477-399F303A135D}"/>
               </a:ext>
             </a:extLst>
           </p:cNvPr>
@@ -1266,7 +1804,7 @@
           <p:cNvPr id="3" name="Content Placeholder 2">
             <a:extLst>
               <a:ext uri="{FF2B5EF4-FFF2-40B4-BE49-F238E27FC236}">
-                <a16:creationId xmlns:a16="http://schemas.microsoft.com/office/drawing/2014/main" id="{BF30D885-5EC6-424E-6C31-26B8906386C3}"/>
+                <a16:creationId xmlns:a16="http://schemas.microsoft.com/office/drawing/2014/main" id="{65DB9052-703C-4E17-31DB-16A93D84A3C7}"/>
               </a:ext>
             </a:extLst>
           </p:cNvPr>
@@ -1329,7 +1867,7 @@
           <p:cNvPr id="4" name="Content Placeholder 3">
             <a:extLst>
               <a:ext uri="{FF2B5EF4-FFF2-40B4-BE49-F238E27FC236}">
-                <a16:creationId xmlns:a16="http://schemas.microsoft.com/office/drawing/2014/main" id="{3B354560-B4B3-0A05-7880-57D34182919B}"/>
+                <a16:creationId xmlns:a16="http://schemas.microsoft.com/office/drawing/2014/main" id="{D05858AF-489A-0127-00A4-EB9D4973C76C}"/>
               </a:ext>
             </a:extLst>
           </p:cNvPr>
@@ -1392,7 +1930,7 @@
           <p:cNvPr id="5" name="Date Placeholder 4">
             <a:extLst>
               <a:ext uri="{FF2B5EF4-FFF2-40B4-BE49-F238E27FC236}">
-                <a16:creationId xmlns:a16="http://schemas.microsoft.com/office/drawing/2014/main" id="{9A4BD9A5-0FEC-5A70-AF76-5CA1F7A34BEF}"/>
+                <a16:creationId xmlns:a16="http://schemas.microsoft.com/office/drawing/2014/main" id="{7B2D5016-4D4A-4BC8-C534-DC70A124DEAD}"/>
               </a:ext>
             </a:extLst>
           </p:cNvPr>
@@ -1421,7 +1959,7 @@
           <p:cNvPr id="6" name="Footer Placeholder 5">
             <a:extLst>
               <a:ext uri="{FF2B5EF4-FFF2-40B4-BE49-F238E27FC236}">
-                <a16:creationId xmlns:a16="http://schemas.microsoft.com/office/drawing/2014/main" id="{05559FC1-7F6E-5ACC-C7DE-04116E81B5B5}"/>
+                <a16:creationId xmlns:a16="http://schemas.microsoft.com/office/drawing/2014/main" id="{5A2C64E9-C25C-8C24-1382-17B91F8C64AA}"/>
               </a:ext>
             </a:extLst>
           </p:cNvPr>
@@ -1446,7 +1984,7 @@
           <p:cNvPr id="7" name="Slide Number Placeholder 6">
             <a:extLst>
               <a:ext uri="{FF2B5EF4-FFF2-40B4-BE49-F238E27FC236}">
-                <a16:creationId xmlns:a16="http://schemas.microsoft.com/office/drawing/2014/main" id="{7D067F55-44BD-05E1-DFAF-D297D6981867}"/>
+                <a16:creationId xmlns:a16="http://schemas.microsoft.com/office/drawing/2014/main" id="{C8126DCF-6356-4A7B-B250-3BB13689221B}"/>
               </a:ext>
             </a:extLst>
           </p:cNvPr>
@@ -1473,7 +2011,7 @@
     </p:spTree>
     <p:extLst>
       <p:ext uri="{BB962C8B-B14F-4D97-AF65-F5344CB8AC3E}">
-        <p14:creationId xmlns:p14="http://schemas.microsoft.com/office/powerpoint/2010/main" val="285187682"/>
+        <p14:creationId xmlns:p14="http://schemas.microsoft.com/office/powerpoint/2010/main" val="1151982924"/>
       </p:ext>
     </p:extLst>
   </p:cSld>
@@ -1505,7 +2043,7 @@
           <p:cNvPr id="2" name="Title 1">
             <a:extLst>
               <a:ext uri="{FF2B5EF4-FFF2-40B4-BE49-F238E27FC236}">
-                <a16:creationId xmlns:a16="http://schemas.microsoft.com/office/drawing/2014/main" id="{E18EB681-6ED2-3608-1765-6856C272DC5A}"/>
+                <a16:creationId xmlns:a16="http://schemas.microsoft.com/office/drawing/2014/main" id="{92E67BFC-0917-D22F-927F-3CFAE60C1CEF}"/>
               </a:ext>
             </a:extLst>
           </p:cNvPr>
@@ -1539,7 +2077,7 @@
           <p:cNvPr id="3" name="Text Placeholder 2">
             <a:extLst>
               <a:ext uri="{FF2B5EF4-FFF2-40B4-BE49-F238E27FC236}">
-                <a16:creationId xmlns:a16="http://schemas.microsoft.com/office/drawing/2014/main" id="{64DE9F72-01D7-FFC6-6CF1-596245B98909}"/>
+                <a16:creationId xmlns:a16="http://schemas.microsoft.com/office/drawing/2014/main" id="{24F12502-1ACD-CC5F-532C-CF29C26851CA}"/>
               </a:ext>
             </a:extLst>
           </p:cNvPr>
@@ -1610,7 +2148,7 @@
           <p:cNvPr id="4" name="Content Placeholder 3">
             <a:extLst>
               <a:ext uri="{FF2B5EF4-FFF2-40B4-BE49-F238E27FC236}">
-                <a16:creationId xmlns:a16="http://schemas.microsoft.com/office/drawing/2014/main" id="{E6C40236-D085-96BF-EE73-A2F17184331D}"/>
+                <a16:creationId xmlns:a16="http://schemas.microsoft.com/office/drawing/2014/main" id="{E6DBC192-32EC-D24C-338D-C4C4DC42E5F7}"/>
               </a:ext>
             </a:extLst>
           </p:cNvPr>
@@ -1673,7 +2211,7 @@
           <p:cNvPr id="5" name="Text Placeholder 4">
             <a:extLst>
               <a:ext uri="{FF2B5EF4-FFF2-40B4-BE49-F238E27FC236}">
-                <a16:creationId xmlns:a16="http://schemas.microsoft.com/office/drawing/2014/main" id="{885391E6-8A50-C091-9A3E-95EB990B1328}"/>
+                <a16:creationId xmlns:a16="http://schemas.microsoft.com/office/drawing/2014/main" id="{E7540830-72CB-7B85-EE0D-8FA8B5BBE020}"/>
               </a:ext>
             </a:extLst>
           </p:cNvPr>
@@ -1744,7 +2282,7 @@
           <p:cNvPr id="6" name="Content Placeholder 5">
             <a:extLst>
               <a:ext uri="{FF2B5EF4-FFF2-40B4-BE49-F238E27FC236}">
-                <a16:creationId xmlns:a16="http://schemas.microsoft.com/office/drawing/2014/main" id="{3A5C3C94-1AE8-7986-55E6-5226ECE7679F}"/>
+                <a16:creationId xmlns:a16="http://schemas.microsoft.com/office/drawing/2014/main" id="{3C2D5C84-29DE-5BBC-25BF-D1389C296B5D}"/>
               </a:ext>
             </a:extLst>
           </p:cNvPr>
@@ -1807,7 +2345,7 @@
           <p:cNvPr id="7" name="Date Placeholder 6">
             <a:extLst>
               <a:ext uri="{FF2B5EF4-FFF2-40B4-BE49-F238E27FC236}">
-                <a16:creationId xmlns:a16="http://schemas.microsoft.com/office/drawing/2014/main" id="{EFBAEC16-717C-E5A8-E59E-3F8E436A38E2}"/>
+                <a16:creationId xmlns:a16="http://schemas.microsoft.com/office/drawing/2014/main" id="{5C0976FC-3F27-CB08-1E09-D676FF422712}"/>
               </a:ext>
             </a:extLst>
           </p:cNvPr>
@@ -1836,7 +2374,7 @@
           <p:cNvPr id="8" name="Footer Placeholder 7">
             <a:extLst>
               <a:ext uri="{FF2B5EF4-FFF2-40B4-BE49-F238E27FC236}">
-                <a16:creationId xmlns:a16="http://schemas.microsoft.com/office/drawing/2014/main" id="{99DB1884-A6E5-3A99-523E-39EC4F9BAC29}"/>
+                <a16:creationId xmlns:a16="http://schemas.microsoft.com/office/drawing/2014/main" id="{12BEEAEA-F2B2-F5C4-D884-7CE6D90F115E}"/>
               </a:ext>
             </a:extLst>
           </p:cNvPr>
@@ -1861,7 +2399,7 @@
           <p:cNvPr id="9" name="Slide Number Placeholder 8">
             <a:extLst>
               <a:ext uri="{FF2B5EF4-FFF2-40B4-BE49-F238E27FC236}">
-                <a16:creationId xmlns:a16="http://schemas.microsoft.com/office/drawing/2014/main" id="{4BC3291A-0C10-59B6-7A1B-CD6CD5141D96}"/>
+                <a16:creationId xmlns:a16="http://schemas.microsoft.com/office/drawing/2014/main" id="{F807EB2E-1F2E-0706-8A84-77B29136E36C}"/>
               </a:ext>
             </a:extLst>
           </p:cNvPr>
@@ -1888,7 +2426,7 @@
     </p:spTree>
     <p:extLst>
       <p:ext uri="{BB962C8B-B14F-4D97-AF65-F5344CB8AC3E}">
-        <p14:creationId xmlns:p14="http://schemas.microsoft.com/office/powerpoint/2010/main" val="2003959517"/>
+        <p14:creationId xmlns:p14="http://schemas.microsoft.com/office/powerpoint/2010/main" val="2834077429"/>
       </p:ext>
     </p:extLst>
   </p:cSld>
@@ -1920,7 +2458,7 @@
           <p:cNvPr id="2" name="Title 1">
             <a:extLst>
               <a:ext uri="{FF2B5EF4-FFF2-40B4-BE49-F238E27FC236}">
-                <a16:creationId xmlns:a16="http://schemas.microsoft.com/office/drawing/2014/main" id="{A91B419C-AF9F-1E6A-7168-177818606057}"/>
+                <a16:creationId xmlns:a16="http://schemas.microsoft.com/office/drawing/2014/main" id="{EA03E5DC-642D-92A1-AA74-3F784296255D}"/>
               </a:ext>
             </a:extLst>
           </p:cNvPr>
@@ -1949,7 +2487,7 @@
           <p:cNvPr id="3" name="Date Placeholder 2">
             <a:extLst>
               <a:ext uri="{FF2B5EF4-FFF2-40B4-BE49-F238E27FC236}">
-                <a16:creationId xmlns:a16="http://schemas.microsoft.com/office/drawing/2014/main" id="{655BFA14-42A8-B3A6-0075-EFBD78BED516}"/>
+                <a16:creationId xmlns:a16="http://schemas.microsoft.com/office/drawing/2014/main" id="{AB871EC5-7EAB-A345-0AC8-5A8DFE86C43B}"/>
               </a:ext>
             </a:extLst>
           </p:cNvPr>
@@ -1978,7 +2516,7 @@
           <p:cNvPr id="4" name="Footer Placeholder 3">
             <a:extLst>
               <a:ext uri="{FF2B5EF4-FFF2-40B4-BE49-F238E27FC236}">
-                <a16:creationId xmlns:a16="http://schemas.microsoft.com/office/drawing/2014/main" id="{AFF5C8EE-B962-1AB1-67C3-560BE896086E}"/>
+                <a16:creationId xmlns:a16="http://schemas.microsoft.com/office/drawing/2014/main" id="{87F98D45-FCE7-5AEF-8208-4843B2EB7D1F}"/>
               </a:ext>
             </a:extLst>
           </p:cNvPr>
@@ -2003,7 +2541,7 @@
           <p:cNvPr id="5" name="Slide Number Placeholder 4">
             <a:extLst>
               <a:ext uri="{FF2B5EF4-FFF2-40B4-BE49-F238E27FC236}">
-                <a16:creationId xmlns:a16="http://schemas.microsoft.com/office/drawing/2014/main" id="{B5990F3B-C6A1-B78E-898B-4FEED41E1A50}"/>
+                <a16:creationId xmlns:a16="http://schemas.microsoft.com/office/drawing/2014/main" id="{81AC9A9F-F808-78BF-4035-759B6D883657}"/>
               </a:ext>
             </a:extLst>
           </p:cNvPr>
@@ -2030,7 +2568,7 @@
     </p:spTree>
     <p:extLst>
       <p:ext uri="{BB962C8B-B14F-4D97-AF65-F5344CB8AC3E}">
-        <p14:creationId xmlns:p14="http://schemas.microsoft.com/office/powerpoint/2010/main" val="2365182073"/>
+        <p14:creationId xmlns:p14="http://schemas.microsoft.com/office/powerpoint/2010/main" val="2602927419"/>
       </p:ext>
     </p:extLst>
   </p:cSld>
@@ -2062,7 +2600,7 @@
           <p:cNvPr id="2" name="Date Placeholder 1">
             <a:extLst>
               <a:ext uri="{FF2B5EF4-FFF2-40B4-BE49-F238E27FC236}">
-                <a16:creationId xmlns:a16="http://schemas.microsoft.com/office/drawing/2014/main" id="{F66AFC10-88FA-0173-78B9-A9C0B7FCAF3E}"/>
+                <a16:creationId xmlns:a16="http://schemas.microsoft.com/office/drawing/2014/main" id="{FF0A448D-759A-E367-0811-34012737F671}"/>
               </a:ext>
             </a:extLst>
           </p:cNvPr>
@@ -2091,7 +2629,7 @@
           <p:cNvPr id="3" name="Footer Placeholder 2">
             <a:extLst>
               <a:ext uri="{FF2B5EF4-FFF2-40B4-BE49-F238E27FC236}">
-                <a16:creationId xmlns:a16="http://schemas.microsoft.com/office/drawing/2014/main" id="{BA5E4D2A-E65D-9B1E-8160-98DCA7506773}"/>
+                <a16:creationId xmlns:a16="http://schemas.microsoft.com/office/drawing/2014/main" id="{A99251CC-DD44-5D0F-15E4-294207CDD49A}"/>
               </a:ext>
             </a:extLst>
           </p:cNvPr>
@@ -2116,7 +2654,7 @@
           <p:cNvPr id="4" name="Slide Number Placeholder 3">
             <a:extLst>
               <a:ext uri="{FF2B5EF4-FFF2-40B4-BE49-F238E27FC236}">
-                <a16:creationId xmlns:a16="http://schemas.microsoft.com/office/drawing/2014/main" id="{4DD3867C-7A00-4BDE-1A95-FF625B50D581}"/>
+                <a16:creationId xmlns:a16="http://schemas.microsoft.com/office/drawing/2014/main" id="{8CD51EC3-5760-7991-1F57-4C59210F91F2}"/>
               </a:ext>
             </a:extLst>
           </p:cNvPr>
@@ -2143,7 +2681,7 @@
     </p:spTree>
     <p:extLst>
       <p:ext uri="{BB962C8B-B14F-4D97-AF65-F5344CB8AC3E}">
-        <p14:creationId xmlns:p14="http://schemas.microsoft.com/office/powerpoint/2010/main" val="3995189894"/>
+        <p14:creationId xmlns:p14="http://schemas.microsoft.com/office/powerpoint/2010/main" val="4188082108"/>
       </p:ext>
     </p:extLst>
   </p:cSld>
@@ -2175,7 +2713,7 @@
           <p:cNvPr id="2" name="Title 1">
             <a:extLst>
               <a:ext uri="{FF2B5EF4-FFF2-40B4-BE49-F238E27FC236}">
-                <a16:creationId xmlns:a16="http://schemas.microsoft.com/office/drawing/2014/main" id="{C17F6342-7E74-D663-8513-CA9C11E16699}"/>
+                <a16:creationId xmlns:a16="http://schemas.microsoft.com/office/drawing/2014/main" id="{3376C4D5-C2F6-39B0-F820-30E6632CC885}"/>
               </a:ext>
             </a:extLst>
           </p:cNvPr>
@@ -2213,7 +2751,7 @@
           <p:cNvPr id="3" name="Content Placeholder 2">
             <a:extLst>
               <a:ext uri="{FF2B5EF4-FFF2-40B4-BE49-F238E27FC236}">
-                <a16:creationId xmlns:a16="http://schemas.microsoft.com/office/drawing/2014/main" id="{EEE8B80C-F2BA-3FA0-A1BA-BB3694B0F5C7}"/>
+                <a16:creationId xmlns:a16="http://schemas.microsoft.com/office/drawing/2014/main" id="{D310F0EE-12B7-4CA5-2DE5-1BE74553017F}"/>
               </a:ext>
             </a:extLst>
           </p:cNvPr>
@@ -2304,7 +2842,7 @@
           <p:cNvPr id="4" name="Text Placeholder 3">
             <a:extLst>
               <a:ext uri="{FF2B5EF4-FFF2-40B4-BE49-F238E27FC236}">
-                <a16:creationId xmlns:a16="http://schemas.microsoft.com/office/drawing/2014/main" id="{B66A0C72-00CF-988C-7428-7E77F8387CC5}"/>
+                <a16:creationId xmlns:a16="http://schemas.microsoft.com/office/drawing/2014/main" id="{CCAF0489-56DC-B1C9-8378-EE598E177E44}"/>
               </a:ext>
             </a:extLst>
           </p:cNvPr>
@@ -2375,7 +2913,7 @@
           <p:cNvPr id="5" name="Date Placeholder 4">
             <a:extLst>
               <a:ext uri="{FF2B5EF4-FFF2-40B4-BE49-F238E27FC236}">
-                <a16:creationId xmlns:a16="http://schemas.microsoft.com/office/drawing/2014/main" id="{4545201C-343B-3BDB-C038-2E6592D0A0FC}"/>
+                <a16:creationId xmlns:a16="http://schemas.microsoft.com/office/drawing/2014/main" id="{F94B07F8-9C5E-B79C-9C34-EF96124B2F17}"/>
               </a:ext>
             </a:extLst>
           </p:cNvPr>
@@ -2404,7 +2942,7 @@
           <p:cNvPr id="6" name="Footer Placeholder 5">
             <a:extLst>
               <a:ext uri="{FF2B5EF4-FFF2-40B4-BE49-F238E27FC236}">
-                <a16:creationId xmlns:a16="http://schemas.microsoft.com/office/drawing/2014/main" id="{7A7F06DC-B3BF-ACD5-80FB-E218D8F5BFC7}"/>
+                <a16:creationId xmlns:a16="http://schemas.microsoft.com/office/drawing/2014/main" id="{18828CF7-CC1D-1A3E-99F9-F5DAFD8C1CD9}"/>
               </a:ext>
             </a:extLst>
           </p:cNvPr>
@@ -2429,7 +2967,7 @@
           <p:cNvPr id="7" name="Slide Number Placeholder 6">
             <a:extLst>
               <a:ext uri="{FF2B5EF4-FFF2-40B4-BE49-F238E27FC236}">
-                <a16:creationId xmlns:a16="http://schemas.microsoft.com/office/drawing/2014/main" id="{E3D19490-C8C7-2DFA-C719-4909320B157B}"/>
+                <a16:creationId xmlns:a16="http://schemas.microsoft.com/office/drawing/2014/main" id="{472D4232-5B59-46BE-C70F-4FCCA94D2686}"/>
               </a:ext>
             </a:extLst>
           </p:cNvPr>
@@ -2456,7 +2994,7 @@
     </p:spTree>
     <p:extLst>
       <p:ext uri="{BB962C8B-B14F-4D97-AF65-F5344CB8AC3E}">
-        <p14:creationId xmlns:p14="http://schemas.microsoft.com/office/powerpoint/2010/main" val="4143229229"/>
+        <p14:creationId xmlns:p14="http://schemas.microsoft.com/office/powerpoint/2010/main" val="1578343365"/>
       </p:ext>
     </p:extLst>
   </p:cSld>
@@ -2488,7 +3026,7 @@
           <p:cNvPr id="2" name="Title 1">
             <a:extLst>
               <a:ext uri="{FF2B5EF4-FFF2-40B4-BE49-F238E27FC236}">
-                <a16:creationId xmlns:a16="http://schemas.microsoft.com/office/drawing/2014/main" id="{64991C42-35F4-740E-68FC-0F54060C5A68}"/>
+                <a16:creationId xmlns:a16="http://schemas.microsoft.com/office/drawing/2014/main" id="{913D2AEC-DE3D-AA18-F7DE-D0B34DAA9754}"/>
               </a:ext>
             </a:extLst>
           </p:cNvPr>
@@ -2526,7 +3064,7 @@
           <p:cNvPr id="3" name="Picture Placeholder 2">
             <a:extLst>
               <a:ext uri="{FF2B5EF4-FFF2-40B4-BE49-F238E27FC236}">
-                <a16:creationId xmlns:a16="http://schemas.microsoft.com/office/drawing/2014/main" id="{468BE827-E65C-0771-9E28-EB094C6FEF49}"/>
+                <a16:creationId xmlns:a16="http://schemas.microsoft.com/office/drawing/2014/main" id="{E771E8AA-ABA7-EADC-089E-F145697D87C7}"/>
               </a:ext>
             </a:extLst>
           </p:cNvPr>
@@ -2593,7 +3131,7 @@
           <p:cNvPr id="4" name="Text Placeholder 3">
             <a:extLst>
               <a:ext uri="{FF2B5EF4-FFF2-40B4-BE49-F238E27FC236}">
-                <a16:creationId xmlns:a16="http://schemas.microsoft.com/office/drawing/2014/main" id="{C82AF7E0-4D11-5E4E-34F4-C98BF03F99B7}"/>
+                <a16:creationId xmlns:a16="http://schemas.microsoft.com/office/drawing/2014/main" id="{91E0EA3F-7C7C-A86A-2A95-0A9825D582A4}"/>
               </a:ext>
             </a:extLst>
           </p:cNvPr>
@@ -2664,7 +3202,7 @@
           <p:cNvPr id="5" name="Date Placeholder 4">
             <a:extLst>
               <a:ext uri="{FF2B5EF4-FFF2-40B4-BE49-F238E27FC236}">
-                <a16:creationId xmlns:a16="http://schemas.microsoft.com/office/drawing/2014/main" id="{00344684-9D54-FC9D-EF26-6E2B1924A4D3}"/>
+                <a16:creationId xmlns:a16="http://schemas.microsoft.com/office/drawing/2014/main" id="{3D1B35DE-123C-B625-08B2-527F35E9C104}"/>
               </a:ext>
             </a:extLst>
           </p:cNvPr>
@@ -2693,7 +3231,7 @@
           <p:cNvPr id="6" name="Footer Placeholder 5">
             <a:extLst>
               <a:ext uri="{FF2B5EF4-FFF2-40B4-BE49-F238E27FC236}">
-                <a16:creationId xmlns:a16="http://schemas.microsoft.com/office/drawing/2014/main" id="{AB6FA46A-FA96-7BC5-01E6-D684879D934F}"/>
+                <a16:creationId xmlns:a16="http://schemas.microsoft.com/office/drawing/2014/main" id="{1FA027F8-4DDD-96E5-6D06-61557EB079F0}"/>
               </a:ext>
             </a:extLst>
           </p:cNvPr>
@@ -2718,7 +3256,7 @@
           <p:cNvPr id="7" name="Slide Number Placeholder 6">
             <a:extLst>
               <a:ext uri="{FF2B5EF4-FFF2-40B4-BE49-F238E27FC236}">
-                <a16:creationId xmlns:a16="http://schemas.microsoft.com/office/drawing/2014/main" id="{1F9625F1-70CD-FC8F-421F-C36896511200}"/>
+                <a16:creationId xmlns:a16="http://schemas.microsoft.com/office/drawing/2014/main" id="{291A5600-D9F4-DAB6-3206-BFA043F3BA28}"/>
               </a:ext>
             </a:extLst>
           </p:cNvPr>
@@ -2745,7 +3283,7 @@
     </p:spTree>
     <p:extLst>
       <p:ext uri="{BB962C8B-B14F-4D97-AF65-F5344CB8AC3E}">
-        <p14:creationId xmlns:p14="http://schemas.microsoft.com/office/powerpoint/2010/main" val="351269530"/>
+        <p14:creationId xmlns:p14="http://schemas.microsoft.com/office/powerpoint/2010/main" val="3593112064"/>
       </p:ext>
     </p:extLst>
   </p:cSld>
@@ -2759,9 +3297,31 @@
 <p:sldMaster xmlns:a="http://schemas.openxmlformats.org/drawingml/2006/main" xmlns:r="http://schemas.openxmlformats.org/officeDocument/2006/relationships" xmlns:p="http://schemas.openxmlformats.org/presentationml/2006/main">
   <p:cSld>
     <p:bg>
-      <p:bgRef idx="1001">
-        <a:schemeClr val="bg1"/>
-      </p:bgRef>
+      <p:bgPr>
+        <a:blipFill dpi="0" rotWithShape="1">
+          <a:blip r:embed="rId13">
+            <a:extLst>
+              <a:ext uri="{BEBA8EAE-BF5A-486C-A8C5-ECC9F3942E4B}">
+                <a14:imgProps xmlns:a14="http://schemas.microsoft.com/office/drawing/2010/main">
+                  <a14:imgLayer r:embed="rId14">
+                    <a14:imgEffect>
+                      <a14:artisticBlur radius="13"/>
+                    </a14:imgEffect>
+                    <a14:imgEffect>
+                      <a14:brightnessContrast bright="-64000"/>
+                    </a14:imgEffect>
+                  </a14:imgLayer>
+                </a14:imgProps>
+              </a:ext>
+            </a:extLst>
+          </a:blip>
+          <a:srcRect/>
+          <a:stretch>
+            <a:fillRect/>
+          </a:stretch>
+        </a:blipFill>
+        <a:effectLst/>
+      </p:bgPr>
     </p:bg>
     <p:spTree>
       <p:nvGrpSpPr>
@@ -2782,7 +3342,7 @@
           <p:cNvPr id="2" name="Title Placeholder 1">
             <a:extLst>
               <a:ext uri="{FF2B5EF4-FFF2-40B4-BE49-F238E27FC236}">
-                <a16:creationId xmlns:a16="http://schemas.microsoft.com/office/drawing/2014/main" id="{ACD92539-736E-76EA-6309-D200510A48A4}"/>
+                <a16:creationId xmlns:a16="http://schemas.microsoft.com/office/drawing/2014/main" id="{06FA9CF1-A155-7743-3B87-817AA0BC26AE}"/>
               </a:ext>
             </a:extLst>
           </p:cNvPr>
@@ -2809,10 +3369,10 @@
           <a:lstStyle/>
           <a:p>
             <a:r>
-              <a:rPr lang="en-US"/>
+              <a:rPr lang="en-US" dirty="0"/>
               <a:t>Click to edit Master title style</a:t>
             </a:r>
-            <a:endParaRPr lang="en-AU"/>
+            <a:endParaRPr lang="en-AU" dirty="0"/>
           </a:p>
         </p:txBody>
       </p:sp>
@@ -2821,7 +3381,7 @@
           <p:cNvPr id="3" name="Text Placeholder 2">
             <a:extLst>
               <a:ext uri="{FF2B5EF4-FFF2-40B4-BE49-F238E27FC236}">
-                <a16:creationId xmlns:a16="http://schemas.microsoft.com/office/drawing/2014/main" id="{875C64E4-4C9C-890D-AACB-36DA955F61D9}"/>
+                <a16:creationId xmlns:a16="http://schemas.microsoft.com/office/drawing/2014/main" id="{DA434167-C1A3-394F-9FB9-D66DC190A0DA}"/>
               </a:ext>
             </a:extLst>
           </p:cNvPr>
@@ -2889,7 +3449,7 @@
           <p:cNvPr id="4" name="Date Placeholder 3">
             <a:extLst>
               <a:ext uri="{FF2B5EF4-FFF2-40B4-BE49-F238E27FC236}">
-                <a16:creationId xmlns:a16="http://schemas.microsoft.com/office/drawing/2014/main" id="{72506CB7-2A2C-CC32-7EA3-2DF1BECF467E}"/>
+                <a16:creationId xmlns:a16="http://schemas.microsoft.com/office/drawing/2014/main" id="{1A7ED360-437A-FEE1-08A7-1599351F3D99}"/>
               </a:ext>
             </a:extLst>
           </p:cNvPr>
@@ -2936,7 +3496,7 @@
           <p:cNvPr id="5" name="Footer Placeholder 4">
             <a:extLst>
               <a:ext uri="{FF2B5EF4-FFF2-40B4-BE49-F238E27FC236}">
-                <a16:creationId xmlns:a16="http://schemas.microsoft.com/office/drawing/2014/main" id="{1765D487-95A6-F9F3-205D-7F70EB90B448}"/>
+                <a16:creationId xmlns:a16="http://schemas.microsoft.com/office/drawing/2014/main" id="{923491A8-FCBB-F037-FC97-DC9C37FB894B}"/>
               </a:ext>
             </a:extLst>
           </p:cNvPr>
@@ -2979,7 +3539,7 @@
           <p:cNvPr id="6" name="Slide Number Placeholder 5">
             <a:extLst>
               <a:ext uri="{FF2B5EF4-FFF2-40B4-BE49-F238E27FC236}">
-                <a16:creationId xmlns:a16="http://schemas.microsoft.com/office/drawing/2014/main" id="{7374DDBB-8C9F-E58C-1AA5-E5EBF06826B0}"/>
+                <a16:creationId xmlns:a16="http://schemas.microsoft.com/office/drawing/2014/main" id="{7B77476E-0701-9CB4-564E-1C2AA0D4666A}"/>
               </a:ext>
             </a:extLst>
           </p:cNvPr>
@@ -3024,23 +3584,23 @@
     </p:spTree>
     <p:extLst>
       <p:ext uri="{BB962C8B-B14F-4D97-AF65-F5344CB8AC3E}">
-        <p14:creationId xmlns:p14="http://schemas.microsoft.com/office/powerpoint/2010/main" val="3707793292"/>
+        <p14:creationId xmlns:p14="http://schemas.microsoft.com/office/powerpoint/2010/main" val="1458145598"/>
       </p:ext>
     </p:extLst>
   </p:cSld>
   <p:clrMap bg1="lt1" tx1="dk1" bg2="lt2" tx2="dk2" accent1="accent1" accent2="accent2" accent3="accent3" accent4="accent4" accent5="accent5" accent6="accent6" hlink="hlink" folHlink="folHlink"/>
   <p:sldLayoutIdLst>
-    <p:sldLayoutId id="2147483649" r:id="rId1"/>
-    <p:sldLayoutId id="2147483650" r:id="rId2"/>
-    <p:sldLayoutId id="2147483651" r:id="rId3"/>
-    <p:sldLayoutId id="2147483652" r:id="rId4"/>
-    <p:sldLayoutId id="2147483653" r:id="rId5"/>
-    <p:sldLayoutId id="2147483654" r:id="rId6"/>
-    <p:sldLayoutId id="2147483655" r:id="rId7"/>
-    <p:sldLayoutId id="2147483656" r:id="rId8"/>
-    <p:sldLayoutId id="2147483657" r:id="rId9"/>
-    <p:sldLayoutId id="2147483658" r:id="rId10"/>
-    <p:sldLayoutId id="2147483659" r:id="rId11"/>
+    <p:sldLayoutId id="2147483697" r:id="rId1"/>
+    <p:sldLayoutId id="2147483698" r:id="rId2"/>
+    <p:sldLayoutId id="2147483699" r:id="rId3"/>
+    <p:sldLayoutId id="2147483700" r:id="rId4"/>
+    <p:sldLayoutId id="2147483701" r:id="rId5"/>
+    <p:sldLayoutId id="2147483702" r:id="rId6"/>
+    <p:sldLayoutId id="2147483703" r:id="rId7"/>
+    <p:sldLayoutId id="2147483704" r:id="rId8"/>
+    <p:sldLayoutId id="2147483705" r:id="rId9"/>
+    <p:sldLayoutId id="2147483706" r:id="rId10"/>
+    <p:sldLayoutId id="2147483707" r:id="rId11"/>
   </p:sldLayoutIdLst>
   <p:txStyles>
     <p:titleStyle>
@@ -3360,39 +3920,41 @@
         </p:nvSpPr>
         <p:spPr/>
         <p:txBody>
+          <a:bodyPr>
+            <a:normAutofit/>
+          </a:bodyPr>
+          <a:lstStyle/>
+          <a:p>
+            <a:r>
+              <a:rPr lang="en-AU" dirty="0"/>
+              <a:t>Aspire: Onboarding and dev experience of the future?</a:t>
+            </a:r>
+          </a:p>
+        </p:txBody>
+      </p:sp>
+      <p:sp>
+        <p:nvSpPr>
+          <p:cNvPr id="3" name="Subtitle 2">
+            <a:extLst>
+              <a:ext uri="{FF2B5EF4-FFF2-40B4-BE49-F238E27FC236}">
+                <a16:creationId xmlns:a16="http://schemas.microsoft.com/office/drawing/2014/main" id="{77871BF3-E623-AD14-0607-D32F4A250241}"/>
+              </a:ext>
+            </a:extLst>
+          </p:cNvPr>
+          <p:cNvSpPr>
+            <a:spLocks noGrp="1"/>
+          </p:cNvSpPr>
+          <p:nvPr>
+            <p:ph type="subTitle" idx="1"/>
+          </p:nvPr>
+        </p:nvSpPr>
+        <p:spPr/>
+        <p:txBody>
           <a:bodyPr/>
           <a:lstStyle/>
           <a:p>
             <a:r>
               <a:rPr lang="en-AU" dirty="0"/>
-              <a:t>Aspire: Onboarding and dev experience of the future?</a:t>
-            </a:r>
-          </a:p>
-        </p:txBody>
-      </p:sp>
-      <p:sp>
-        <p:nvSpPr>
-          <p:cNvPr id="3" name="Subtitle 2">
-            <a:extLst>
-              <a:ext uri="{FF2B5EF4-FFF2-40B4-BE49-F238E27FC236}">
-                <a16:creationId xmlns:a16="http://schemas.microsoft.com/office/drawing/2014/main" id="{77871BF3-E623-AD14-0607-D32F4A250241}"/>
-              </a:ext>
-            </a:extLst>
-          </p:cNvPr>
-          <p:cNvSpPr>
-            <a:spLocks noGrp="1"/>
-          </p:cNvSpPr>
-          <p:nvPr>
-            <p:ph type="subTitle" idx="1"/>
-          </p:nvPr>
-        </p:nvSpPr>
-        <p:spPr/>
-        <p:txBody>
-          <a:bodyPr/>
-          <a:lstStyle/>
-          <a:p>
-            <a:r>
-              <a:rPr lang="en-AU"/>
               <a:t>????</a:t>
             </a:r>
           </a:p>
@@ -3411,7 +3973,3255 @@
 </p:sld>
 </file>
 
+<file path=ppt/slides/slide10.xml><?xml version="1.0" encoding="utf-8"?>
+<p:sld xmlns:a="http://schemas.openxmlformats.org/drawingml/2006/main" xmlns:r="http://schemas.openxmlformats.org/officeDocument/2006/relationships" xmlns:p="http://schemas.openxmlformats.org/presentationml/2006/main">
+  <p:cSld>
+    <p:spTree>
+      <p:nvGrpSpPr>
+        <p:cNvPr id="1" name=""/>
+        <p:cNvGrpSpPr/>
+        <p:nvPr/>
+      </p:nvGrpSpPr>
+      <p:grpSpPr>
+        <a:xfrm>
+          <a:off x="0" y="0"/>
+          <a:ext cx="0" cy="0"/>
+          <a:chOff x="0" y="0"/>
+          <a:chExt cx="0" cy="0"/>
+        </a:xfrm>
+      </p:grpSpPr>
+      <p:sp>
+        <p:nvSpPr>
+          <p:cNvPr id="2" name="Title 1">
+            <a:extLst>
+              <a:ext uri="{FF2B5EF4-FFF2-40B4-BE49-F238E27FC236}">
+                <a16:creationId xmlns:a16="http://schemas.microsoft.com/office/drawing/2014/main" id="{7DE6BF55-4D01-6B39-2B6F-1FA620A896B6}"/>
+              </a:ext>
+            </a:extLst>
+          </p:cNvPr>
+          <p:cNvSpPr>
+            <a:spLocks noGrp="1"/>
+          </p:cNvSpPr>
+          <p:nvPr>
+            <p:ph type="title"/>
+          </p:nvPr>
+        </p:nvSpPr>
+        <p:spPr/>
+        <p:txBody>
+          <a:bodyPr/>
+          <a:lstStyle/>
+          <a:p>
+            <a:r>
+              <a:rPr lang="en-AU" dirty="0"/>
+              <a:t>Sounds too good to be true…</a:t>
+            </a:r>
+          </a:p>
+        </p:txBody>
+      </p:sp>
+      <p:sp>
+        <p:nvSpPr>
+          <p:cNvPr id="3" name="Content Placeholder 2">
+            <a:extLst>
+              <a:ext uri="{FF2B5EF4-FFF2-40B4-BE49-F238E27FC236}">
+                <a16:creationId xmlns:a16="http://schemas.microsoft.com/office/drawing/2014/main" id="{625D12DC-F261-CD33-0C3D-E9266D16D89F}"/>
+              </a:ext>
+            </a:extLst>
+          </p:cNvPr>
+          <p:cNvSpPr>
+            <a:spLocks noGrp="1"/>
+          </p:cNvSpPr>
+          <p:nvPr>
+            <p:ph idx="1"/>
+          </p:nvPr>
+        </p:nvSpPr>
+        <p:spPr/>
+        <p:txBody>
+          <a:bodyPr/>
+          <a:lstStyle/>
+          <a:p>
+            <a:r>
+              <a:rPr lang="en-US" dirty="0"/>
+              <a:t>Friction for running day to day</a:t>
+            </a:r>
+          </a:p>
+          <a:p>
+            <a:r>
+              <a:rPr lang="en-US" dirty="0"/>
+              <a:t>Still a decent amount of work to get running</a:t>
+            </a:r>
+          </a:p>
+          <a:p>
+            <a:r>
+              <a:rPr lang="en-US" dirty="0"/>
+              <a:t>Don't forget to actually setup your infra correctly so when you deploy there are things to override... </a:t>
+            </a:r>
+          </a:p>
+          <a:p>
+            <a:r>
+              <a:rPr lang="en-US" dirty="0"/>
+              <a:t>Harder to understand the flow? </a:t>
+            </a:r>
+          </a:p>
+          <a:p>
+            <a:r>
+              <a:rPr lang="en-US" dirty="0"/>
+              <a:t>Sometimes, people just don't like it </a:t>
+            </a:r>
+            <a:r>
+              <a:rPr lang="en-AU" dirty="0"/>
+              <a:t>¯\_(ツ)_/¯</a:t>
+            </a:r>
+            <a:endParaRPr lang="en-US" dirty="0"/>
+          </a:p>
+          <a:p>
+            <a:endParaRPr lang="en-AU" dirty="0"/>
+          </a:p>
+        </p:txBody>
+      </p:sp>
+    </p:spTree>
+    <p:extLst>
+      <p:ext uri="{BB962C8B-B14F-4D97-AF65-F5344CB8AC3E}">
+        <p14:creationId xmlns:p14="http://schemas.microsoft.com/office/powerpoint/2010/main" val="3562411058"/>
+      </p:ext>
+    </p:extLst>
+  </p:cSld>
+  <p:clrMapOvr>
+    <a:masterClrMapping/>
+  </p:clrMapOvr>
+</p:sld>
+</file>
+
+<file path=ppt/slides/slide2.xml><?xml version="1.0" encoding="utf-8"?>
+<p:sld xmlns:a="http://schemas.openxmlformats.org/drawingml/2006/main" xmlns:r="http://schemas.openxmlformats.org/officeDocument/2006/relationships" xmlns:p="http://schemas.openxmlformats.org/presentationml/2006/main">
+  <p:cSld>
+    <p:spTree>
+      <p:nvGrpSpPr>
+        <p:cNvPr id="1" name=""/>
+        <p:cNvGrpSpPr/>
+        <p:nvPr/>
+      </p:nvGrpSpPr>
+      <p:grpSpPr>
+        <a:xfrm>
+          <a:off x="0" y="0"/>
+          <a:ext cx="0" cy="0"/>
+          <a:chOff x="0" y="0"/>
+          <a:chExt cx="0" cy="0"/>
+        </a:xfrm>
+      </p:grpSpPr>
+      <p:sp>
+        <p:nvSpPr>
+          <p:cNvPr id="2" name="Title 1">
+            <a:extLst>
+              <a:ext uri="{FF2B5EF4-FFF2-40B4-BE49-F238E27FC236}">
+                <a16:creationId xmlns:a16="http://schemas.microsoft.com/office/drawing/2014/main" id="{CD3F7941-789A-D1D4-07FB-058A1994A5F7}"/>
+              </a:ext>
+            </a:extLst>
+          </p:cNvPr>
+          <p:cNvSpPr>
+            <a:spLocks noGrp="1"/>
+          </p:cNvSpPr>
+          <p:nvPr>
+            <p:ph type="title"/>
+          </p:nvPr>
+        </p:nvSpPr>
+        <p:spPr/>
+        <p:txBody>
+          <a:bodyPr/>
+          <a:lstStyle/>
+          <a:p>
+            <a:r>
+              <a:rPr lang="en-AU" dirty="0"/>
+              <a:t>Onboarding: Past and future?</a:t>
+            </a:r>
+          </a:p>
+        </p:txBody>
+      </p:sp>
+      <p:sp>
+        <p:nvSpPr>
+          <p:cNvPr id="3" name="Content Placeholder 2">
+            <a:extLst>
+              <a:ext uri="{FF2B5EF4-FFF2-40B4-BE49-F238E27FC236}">
+                <a16:creationId xmlns:a16="http://schemas.microsoft.com/office/drawing/2014/main" id="{4F6DDED4-13CE-6445-8833-E8B7E053405C}"/>
+              </a:ext>
+            </a:extLst>
+          </p:cNvPr>
+          <p:cNvSpPr>
+            <a:spLocks noGrp="1"/>
+          </p:cNvSpPr>
+          <p:nvPr>
+            <p:ph idx="1"/>
+          </p:nvPr>
+        </p:nvSpPr>
+        <p:spPr>
+          <a:xfrm>
+            <a:off x="838200" y="1825625"/>
+            <a:ext cx="4728882" cy="4351338"/>
+          </a:xfrm>
+        </p:spPr>
+        <p:txBody>
+          <a:bodyPr/>
+          <a:lstStyle/>
+          <a:p>
+            <a:pPr marL="0" indent="0">
+              <a:buNone/>
+            </a:pPr>
+            <a:r>
+              <a:rPr lang="en-AU" b="1" dirty="0"/>
+              <a:t>Past</a:t>
+            </a:r>
+          </a:p>
+          <a:p>
+            <a:r>
+              <a:rPr lang="en-AU" dirty="0"/>
+              <a:t>ResetTheWorld.ps1</a:t>
+            </a:r>
+          </a:p>
+          <a:p>
+            <a:r>
+              <a:rPr lang="en-AU" dirty="0"/>
+              <a:t>Detailed Readme</a:t>
+            </a:r>
+          </a:p>
+          <a:p>
+            <a:r>
+              <a:rPr lang="en-AU" dirty="0"/>
+              <a:t>Startup profiles in VS/Rider</a:t>
+            </a:r>
+          </a:p>
+        </p:txBody>
+      </p:sp>
+      <p:sp>
+        <p:nvSpPr>
+          <p:cNvPr id="4" name="Content Placeholder 2">
+            <a:extLst>
+              <a:ext uri="{FF2B5EF4-FFF2-40B4-BE49-F238E27FC236}">
+                <a16:creationId xmlns:a16="http://schemas.microsoft.com/office/drawing/2014/main" id="{D57DF8E3-EBFE-A882-9A5A-A9592599BBEB}"/>
+              </a:ext>
+            </a:extLst>
+          </p:cNvPr>
+          <p:cNvSpPr txBox="1">
+            <a:spLocks/>
+          </p:cNvSpPr>
+          <p:nvPr/>
+        </p:nvSpPr>
+        <p:spPr>
+          <a:xfrm>
+            <a:off x="6624920" y="1825625"/>
+            <a:ext cx="4728882" cy="4351338"/>
+          </a:xfrm>
+          <a:prstGeom prst="rect">
+            <a:avLst/>
+          </a:prstGeom>
+        </p:spPr>
+        <p:txBody>
+          <a:bodyPr vert="horz" lIns="91440" tIns="45720" rIns="91440" bIns="45720" rtlCol="0">
+            <a:normAutofit/>
+          </a:bodyPr>
+          <a:lstStyle>
+            <a:lvl1pPr marL="228600" indent="-228600" algn="l" defTabSz="914400" rtl="0" eaLnBrk="1" latinLnBrk="0" hangingPunct="1">
+              <a:lnSpc>
+                <a:spcPct val="90000"/>
+              </a:lnSpc>
+              <a:spcBef>
+                <a:spcPts val="1000"/>
+              </a:spcBef>
+              <a:buFont typeface="Arial" panose="020B0604020202020204" pitchFamily="34" charset="0"/>
+              <a:buChar char="•"/>
+              <a:defRPr sz="2800" kern="1200">
+                <a:solidFill>
+                  <a:schemeClr val="tx1"/>
+                </a:solidFill>
+                <a:latin typeface="+mn-lt"/>
+                <a:ea typeface="+mn-ea"/>
+                <a:cs typeface="+mn-cs"/>
+              </a:defRPr>
+            </a:lvl1pPr>
+            <a:lvl2pPr marL="685800" indent="-228600" algn="l" defTabSz="914400" rtl="0" eaLnBrk="1" latinLnBrk="0" hangingPunct="1">
+              <a:lnSpc>
+                <a:spcPct val="90000"/>
+              </a:lnSpc>
+              <a:spcBef>
+                <a:spcPts val="500"/>
+              </a:spcBef>
+              <a:buFont typeface="Arial" panose="020B0604020202020204" pitchFamily="34" charset="0"/>
+              <a:buChar char="•"/>
+              <a:defRPr sz="2400" kern="1200">
+                <a:solidFill>
+                  <a:schemeClr val="tx1"/>
+                </a:solidFill>
+                <a:latin typeface="+mn-lt"/>
+                <a:ea typeface="+mn-ea"/>
+                <a:cs typeface="+mn-cs"/>
+              </a:defRPr>
+            </a:lvl2pPr>
+            <a:lvl3pPr marL="1143000" indent="-228600" algn="l" defTabSz="914400" rtl="0" eaLnBrk="1" latinLnBrk="0" hangingPunct="1">
+              <a:lnSpc>
+                <a:spcPct val="90000"/>
+              </a:lnSpc>
+              <a:spcBef>
+                <a:spcPts val="500"/>
+              </a:spcBef>
+              <a:buFont typeface="Arial" panose="020B0604020202020204" pitchFamily="34" charset="0"/>
+              <a:buChar char="•"/>
+              <a:defRPr sz="2000" kern="1200">
+                <a:solidFill>
+                  <a:schemeClr val="tx1"/>
+                </a:solidFill>
+                <a:latin typeface="+mn-lt"/>
+                <a:ea typeface="+mn-ea"/>
+                <a:cs typeface="+mn-cs"/>
+              </a:defRPr>
+            </a:lvl3pPr>
+            <a:lvl4pPr marL="1600200" indent="-228600" algn="l" defTabSz="914400" rtl="0" eaLnBrk="1" latinLnBrk="0" hangingPunct="1">
+              <a:lnSpc>
+                <a:spcPct val="90000"/>
+              </a:lnSpc>
+              <a:spcBef>
+                <a:spcPts val="500"/>
+              </a:spcBef>
+              <a:buFont typeface="Arial" panose="020B0604020202020204" pitchFamily="34" charset="0"/>
+              <a:buChar char="•"/>
+              <a:defRPr sz="1800" kern="1200">
+                <a:solidFill>
+                  <a:schemeClr val="tx1"/>
+                </a:solidFill>
+                <a:latin typeface="+mn-lt"/>
+                <a:ea typeface="+mn-ea"/>
+                <a:cs typeface="+mn-cs"/>
+              </a:defRPr>
+            </a:lvl4pPr>
+            <a:lvl5pPr marL="2057400" indent="-228600" algn="l" defTabSz="914400" rtl="0" eaLnBrk="1" latinLnBrk="0" hangingPunct="1">
+              <a:lnSpc>
+                <a:spcPct val="90000"/>
+              </a:lnSpc>
+              <a:spcBef>
+                <a:spcPts val="500"/>
+              </a:spcBef>
+              <a:buFont typeface="Arial" panose="020B0604020202020204" pitchFamily="34" charset="0"/>
+              <a:buChar char="•"/>
+              <a:defRPr sz="1800" kern="1200">
+                <a:solidFill>
+                  <a:schemeClr val="tx1"/>
+                </a:solidFill>
+                <a:latin typeface="+mn-lt"/>
+                <a:ea typeface="+mn-ea"/>
+                <a:cs typeface="+mn-cs"/>
+              </a:defRPr>
+            </a:lvl5pPr>
+            <a:lvl6pPr marL="2514600" indent="-228600" algn="l" defTabSz="914400" rtl="0" eaLnBrk="1" latinLnBrk="0" hangingPunct="1">
+              <a:lnSpc>
+                <a:spcPct val="90000"/>
+              </a:lnSpc>
+              <a:spcBef>
+                <a:spcPts val="500"/>
+              </a:spcBef>
+              <a:buFont typeface="Arial" panose="020B0604020202020204" pitchFamily="34" charset="0"/>
+              <a:buChar char="•"/>
+              <a:defRPr sz="1800" kern="1200">
+                <a:solidFill>
+                  <a:schemeClr val="tx1"/>
+                </a:solidFill>
+                <a:latin typeface="+mn-lt"/>
+                <a:ea typeface="+mn-ea"/>
+                <a:cs typeface="+mn-cs"/>
+              </a:defRPr>
+            </a:lvl6pPr>
+            <a:lvl7pPr marL="2971800" indent="-228600" algn="l" defTabSz="914400" rtl="0" eaLnBrk="1" latinLnBrk="0" hangingPunct="1">
+              <a:lnSpc>
+                <a:spcPct val="90000"/>
+              </a:lnSpc>
+              <a:spcBef>
+                <a:spcPts val="500"/>
+              </a:spcBef>
+              <a:buFont typeface="Arial" panose="020B0604020202020204" pitchFamily="34" charset="0"/>
+              <a:buChar char="•"/>
+              <a:defRPr sz="1800" kern="1200">
+                <a:solidFill>
+                  <a:schemeClr val="tx1"/>
+                </a:solidFill>
+                <a:latin typeface="+mn-lt"/>
+                <a:ea typeface="+mn-ea"/>
+                <a:cs typeface="+mn-cs"/>
+              </a:defRPr>
+            </a:lvl7pPr>
+            <a:lvl8pPr marL="3429000" indent="-228600" algn="l" defTabSz="914400" rtl="0" eaLnBrk="1" latinLnBrk="0" hangingPunct="1">
+              <a:lnSpc>
+                <a:spcPct val="90000"/>
+              </a:lnSpc>
+              <a:spcBef>
+                <a:spcPts val="500"/>
+              </a:spcBef>
+              <a:buFont typeface="Arial" panose="020B0604020202020204" pitchFamily="34" charset="0"/>
+              <a:buChar char="•"/>
+              <a:defRPr sz="1800" kern="1200">
+                <a:solidFill>
+                  <a:schemeClr val="tx1"/>
+                </a:solidFill>
+                <a:latin typeface="+mn-lt"/>
+                <a:ea typeface="+mn-ea"/>
+                <a:cs typeface="+mn-cs"/>
+              </a:defRPr>
+            </a:lvl8pPr>
+            <a:lvl9pPr marL="3886200" indent="-228600" algn="l" defTabSz="914400" rtl="0" eaLnBrk="1" latinLnBrk="0" hangingPunct="1">
+              <a:lnSpc>
+                <a:spcPct val="90000"/>
+              </a:lnSpc>
+              <a:spcBef>
+                <a:spcPts val="500"/>
+              </a:spcBef>
+              <a:buFont typeface="Arial" panose="020B0604020202020204" pitchFamily="34" charset="0"/>
+              <a:buChar char="•"/>
+              <a:defRPr sz="1800" kern="1200">
+                <a:solidFill>
+                  <a:schemeClr val="tx1"/>
+                </a:solidFill>
+                <a:latin typeface="+mn-lt"/>
+                <a:ea typeface="+mn-ea"/>
+                <a:cs typeface="+mn-cs"/>
+              </a:defRPr>
+            </a:lvl9pPr>
+          </a:lstStyle>
+          <a:p>
+            <a:pPr marL="0" indent="0">
+              <a:buFont typeface="Arial" panose="020B0604020202020204" pitchFamily="34" charset="0"/>
+              <a:buNone/>
+            </a:pPr>
+            <a:r>
+              <a:rPr lang="en-AU" b="1" dirty="0"/>
+              <a:t>Future?</a:t>
+            </a:r>
+          </a:p>
+          <a:p>
+            <a:r>
+              <a:rPr lang="en-AU" dirty="0"/>
+              <a:t>Aspire ✨</a:t>
+            </a:r>
+          </a:p>
+        </p:txBody>
+      </p:sp>
+    </p:spTree>
+    <p:extLst>
+      <p:ext uri="{BB962C8B-B14F-4D97-AF65-F5344CB8AC3E}">
+        <p14:creationId xmlns:p14="http://schemas.microsoft.com/office/powerpoint/2010/main" val="2902774191"/>
+      </p:ext>
+    </p:extLst>
+  </p:cSld>
+  <p:clrMapOvr>
+    <a:masterClrMapping/>
+  </p:clrMapOvr>
+</p:sld>
+</file>
+
+<file path=ppt/slides/slide3.xml><?xml version="1.0" encoding="utf-8"?>
+<p:sld xmlns:a="http://schemas.openxmlformats.org/drawingml/2006/main" xmlns:r="http://schemas.openxmlformats.org/officeDocument/2006/relationships" xmlns:p="http://schemas.openxmlformats.org/presentationml/2006/main">
+  <p:cSld>
+    <p:bg>
+      <p:bgPr>
+        <a:blipFill dpi="0" rotWithShape="1">
+          <a:blip r:embed="rId2">
+            <a:duotone>
+              <a:prstClr val="black"/>
+              <a:schemeClr val="accent2">
+                <a:tint val="45000"/>
+                <a:satMod val="400000"/>
+              </a:schemeClr>
+            </a:duotone>
+            <a:extLst>
+              <a:ext uri="{BEBA8EAE-BF5A-486C-A8C5-ECC9F3942E4B}">
+                <a14:imgProps xmlns:a14="http://schemas.microsoft.com/office/drawing/2010/main">
+                  <a14:imgLayer r:embed="rId3">
+                    <a14:imgEffect>
+                      <a14:artisticBlur radius="13"/>
+                    </a14:imgEffect>
+                    <a14:imgEffect>
+                      <a14:brightnessContrast bright="-64000"/>
+                    </a14:imgEffect>
+                  </a14:imgLayer>
+                </a14:imgProps>
+              </a:ext>
+            </a:extLst>
+          </a:blip>
+          <a:srcRect/>
+          <a:stretch>
+            <a:fillRect/>
+          </a:stretch>
+        </a:blipFill>
+        <a:effectLst/>
+      </p:bgPr>
+    </p:bg>
+    <p:spTree>
+      <p:nvGrpSpPr>
+        <p:cNvPr id="1" name=""/>
+        <p:cNvGrpSpPr/>
+        <p:nvPr/>
+      </p:nvGrpSpPr>
+      <p:grpSpPr>
+        <a:xfrm>
+          <a:off x="0" y="0"/>
+          <a:ext cx="0" cy="0"/>
+          <a:chOff x="0" y="0"/>
+          <a:chExt cx="0" cy="0"/>
+        </a:xfrm>
+      </p:grpSpPr>
+      <p:sp>
+        <p:nvSpPr>
+          <p:cNvPr id="2" name="Title 1">
+            <a:extLst>
+              <a:ext uri="{FF2B5EF4-FFF2-40B4-BE49-F238E27FC236}">
+                <a16:creationId xmlns:a16="http://schemas.microsoft.com/office/drawing/2014/main" id="{3DF0FC3F-3370-E1B5-E124-65579184A675}"/>
+              </a:ext>
+            </a:extLst>
+          </p:cNvPr>
+          <p:cNvSpPr>
+            <a:spLocks noGrp="1"/>
+          </p:cNvSpPr>
+          <p:nvPr>
+            <p:ph type="title"/>
+          </p:nvPr>
+        </p:nvSpPr>
+        <p:spPr/>
+        <p:txBody>
+          <a:bodyPr/>
+          <a:lstStyle/>
+          <a:p>
+            <a:r>
+              <a:rPr lang="en-AU" dirty="0"/>
+              <a:t>The brownfields onboarding process</a:t>
+            </a:r>
+          </a:p>
+        </p:txBody>
+      </p:sp>
+      <p:sp>
+        <p:nvSpPr>
+          <p:cNvPr id="3" name="Content Placeholder 2">
+            <a:extLst>
+              <a:ext uri="{FF2B5EF4-FFF2-40B4-BE49-F238E27FC236}">
+                <a16:creationId xmlns:a16="http://schemas.microsoft.com/office/drawing/2014/main" id="{C08D2232-53CE-C197-72BE-FD85BF9C1D19}"/>
+              </a:ext>
+            </a:extLst>
+          </p:cNvPr>
+          <p:cNvSpPr>
+            <a:spLocks noGrp="1"/>
+          </p:cNvSpPr>
+          <p:nvPr>
+            <p:ph idx="1"/>
+          </p:nvPr>
+        </p:nvSpPr>
+        <p:spPr>
+          <a:xfrm>
+            <a:off x="838200" y="1825625"/>
+            <a:ext cx="3959711" cy="616361"/>
+          </a:xfrm>
+        </p:spPr>
+        <p:txBody>
+          <a:bodyPr>
+            <a:normAutofit/>
+          </a:bodyPr>
+          <a:lstStyle/>
+          <a:p>
+            <a:r>
+              <a:rPr lang="en-AU" dirty="0"/>
+              <a:t>Install Dependencies</a:t>
+            </a:r>
+          </a:p>
+        </p:txBody>
+      </p:sp>
+      <p:sp>
+        <p:nvSpPr>
+          <p:cNvPr id="6" name="Content Placeholder 2">
+            <a:extLst>
+              <a:ext uri="{FF2B5EF4-FFF2-40B4-BE49-F238E27FC236}">
+                <a16:creationId xmlns:a16="http://schemas.microsoft.com/office/drawing/2014/main" id="{5968F7FC-9255-37AC-0824-18ED1D246737}"/>
+              </a:ext>
+            </a:extLst>
+          </p:cNvPr>
+          <p:cNvSpPr txBox="1">
+            <a:spLocks/>
+          </p:cNvSpPr>
+          <p:nvPr/>
+        </p:nvSpPr>
+        <p:spPr>
+          <a:xfrm>
+            <a:off x="3034553" y="3258185"/>
+            <a:ext cx="3959711" cy="616361"/>
+          </a:xfrm>
+          <a:prstGeom prst="rect">
+            <a:avLst/>
+          </a:prstGeom>
+        </p:spPr>
+        <p:txBody>
+          <a:bodyPr vert="horz" lIns="91440" tIns="45720" rIns="91440" bIns="45720" rtlCol="0">
+            <a:normAutofit/>
+          </a:bodyPr>
+          <a:lstStyle>
+            <a:lvl1pPr marL="228600" indent="-228600" algn="l" defTabSz="914400" rtl="0" eaLnBrk="1" latinLnBrk="0" hangingPunct="1">
+              <a:lnSpc>
+                <a:spcPct val="90000"/>
+              </a:lnSpc>
+              <a:spcBef>
+                <a:spcPts val="1000"/>
+              </a:spcBef>
+              <a:buFont typeface="Arial" panose="020B0604020202020204" pitchFamily="34" charset="0"/>
+              <a:buChar char="•"/>
+              <a:defRPr sz="2800" kern="1200">
+                <a:solidFill>
+                  <a:schemeClr val="tx1"/>
+                </a:solidFill>
+                <a:latin typeface="+mn-lt"/>
+                <a:ea typeface="+mn-ea"/>
+                <a:cs typeface="+mn-cs"/>
+              </a:defRPr>
+            </a:lvl1pPr>
+            <a:lvl2pPr marL="685800" indent="-228600" algn="l" defTabSz="914400" rtl="0" eaLnBrk="1" latinLnBrk="0" hangingPunct="1">
+              <a:lnSpc>
+                <a:spcPct val="90000"/>
+              </a:lnSpc>
+              <a:spcBef>
+                <a:spcPts val="500"/>
+              </a:spcBef>
+              <a:buFont typeface="Arial" panose="020B0604020202020204" pitchFamily="34" charset="0"/>
+              <a:buChar char="•"/>
+              <a:defRPr sz="2400" kern="1200">
+                <a:solidFill>
+                  <a:schemeClr val="tx1"/>
+                </a:solidFill>
+                <a:latin typeface="+mn-lt"/>
+                <a:ea typeface="+mn-ea"/>
+                <a:cs typeface="+mn-cs"/>
+              </a:defRPr>
+            </a:lvl2pPr>
+            <a:lvl3pPr marL="1143000" indent="-228600" algn="l" defTabSz="914400" rtl="0" eaLnBrk="1" latinLnBrk="0" hangingPunct="1">
+              <a:lnSpc>
+                <a:spcPct val="90000"/>
+              </a:lnSpc>
+              <a:spcBef>
+                <a:spcPts val="500"/>
+              </a:spcBef>
+              <a:buFont typeface="Arial" panose="020B0604020202020204" pitchFamily="34" charset="0"/>
+              <a:buChar char="•"/>
+              <a:defRPr sz="2000" kern="1200">
+                <a:solidFill>
+                  <a:schemeClr val="tx1"/>
+                </a:solidFill>
+                <a:latin typeface="+mn-lt"/>
+                <a:ea typeface="+mn-ea"/>
+                <a:cs typeface="+mn-cs"/>
+              </a:defRPr>
+            </a:lvl3pPr>
+            <a:lvl4pPr marL="1600200" indent="-228600" algn="l" defTabSz="914400" rtl="0" eaLnBrk="1" latinLnBrk="0" hangingPunct="1">
+              <a:lnSpc>
+                <a:spcPct val="90000"/>
+              </a:lnSpc>
+              <a:spcBef>
+                <a:spcPts val="500"/>
+              </a:spcBef>
+              <a:buFont typeface="Arial" panose="020B0604020202020204" pitchFamily="34" charset="0"/>
+              <a:buChar char="•"/>
+              <a:defRPr sz="1800" kern="1200">
+                <a:solidFill>
+                  <a:schemeClr val="tx1"/>
+                </a:solidFill>
+                <a:latin typeface="+mn-lt"/>
+                <a:ea typeface="+mn-ea"/>
+                <a:cs typeface="+mn-cs"/>
+              </a:defRPr>
+            </a:lvl4pPr>
+            <a:lvl5pPr marL="2057400" indent="-228600" algn="l" defTabSz="914400" rtl="0" eaLnBrk="1" latinLnBrk="0" hangingPunct="1">
+              <a:lnSpc>
+                <a:spcPct val="90000"/>
+              </a:lnSpc>
+              <a:spcBef>
+                <a:spcPts val="500"/>
+              </a:spcBef>
+              <a:buFont typeface="Arial" panose="020B0604020202020204" pitchFamily="34" charset="0"/>
+              <a:buChar char="•"/>
+              <a:defRPr sz="1800" kern="1200">
+                <a:solidFill>
+                  <a:schemeClr val="tx1"/>
+                </a:solidFill>
+                <a:latin typeface="+mn-lt"/>
+                <a:ea typeface="+mn-ea"/>
+                <a:cs typeface="+mn-cs"/>
+              </a:defRPr>
+            </a:lvl5pPr>
+            <a:lvl6pPr marL="2514600" indent="-228600" algn="l" defTabSz="914400" rtl="0" eaLnBrk="1" latinLnBrk="0" hangingPunct="1">
+              <a:lnSpc>
+                <a:spcPct val="90000"/>
+              </a:lnSpc>
+              <a:spcBef>
+                <a:spcPts val="500"/>
+              </a:spcBef>
+              <a:buFont typeface="Arial" panose="020B0604020202020204" pitchFamily="34" charset="0"/>
+              <a:buChar char="•"/>
+              <a:defRPr sz="1800" kern="1200">
+                <a:solidFill>
+                  <a:schemeClr val="tx1"/>
+                </a:solidFill>
+                <a:latin typeface="+mn-lt"/>
+                <a:ea typeface="+mn-ea"/>
+                <a:cs typeface="+mn-cs"/>
+              </a:defRPr>
+            </a:lvl6pPr>
+            <a:lvl7pPr marL="2971800" indent="-228600" algn="l" defTabSz="914400" rtl="0" eaLnBrk="1" latinLnBrk="0" hangingPunct="1">
+              <a:lnSpc>
+                <a:spcPct val="90000"/>
+              </a:lnSpc>
+              <a:spcBef>
+                <a:spcPts val="500"/>
+              </a:spcBef>
+              <a:buFont typeface="Arial" panose="020B0604020202020204" pitchFamily="34" charset="0"/>
+              <a:buChar char="•"/>
+              <a:defRPr sz="1800" kern="1200">
+                <a:solidFill>
+                  <a:schemeClr val="tx1"/>
+                </a:solidFill>
+                <a:latin typeface="+mn-lt"/>
+                <a:ea typeface="+mn-ea"/>
+                <a:cs typeface="+mn-cs"/>
+              </a:defRPr>
+            </a:lvl7pPr>
+            <a:lvl8pPr marL="3429000" indent="-228600" algn="l" defTabSz="914400" rtl="0" eaLnBrk="1" latinLnBrk="0" hangingPunct="1">
+              <a:lnSpc>
+                <a:spcPct val="90000"/>
+              </a:lnSpc>
+              <a:spcBef>
+                <a:spcPts val="500"/>
+              </a:spcBef>
+              <a:buFont typeface="Arial" panose="020B0604020202020204" pitchFamily="34" charset="0"/>
+              <a:buChar char="•"/>
+              <a:defRPr sz="1800" kern="1200">
+                <a:solidFill>
+                  <a:schemeClr val="tx1"/>
+                </a:solidFill>
+                <a:latin typeface="+mn-lt"/>
+                <a:ea typeface="+mn-ea"/>
+                <a:cs typeface="+mn-cs"/>
+              </a:defRPr>
+            </a:lvl8pPr>
+            <a:lvl9pPr marL="3886200" indent="-228600" algn="l" defTabSz="914400" rtl="0" eaLnBrk="1" latinLnBrk="0" hangingPunct="1">
+              <a:lnSpc>
+                <a:spcPct val="90000"/>
+              </a:lnSpc>
+              <a:spcBef>
+                <a:spcPts val="500"/>
+              </a:spcBef>
+              <a:buFont typeface="Arial" panose="020B0604020202020204" pitchFamily="34" charset="0"/>
+              <a:buChar char="•"/>
+              <a:defRPr sz="1800" kern="1200">
+                <a:solidFill>
+                  <a:schemeClr val="tx1"/>
+                </a:solidFill>
+                <a:latin typeface="+mn-lt"/>
+                <a:ea typeface="+mn-ea"/>
+                <a:cs typeface="+mn-cs"/>
+              </a:defRPr>
+            </a:lvl9pPr>
+          </a:lstStyle>
+          <a:p>
+            <a:r>
+              <a:rPr lang="en-AU" dirty="0"/>
+              <a:t>Build everything</a:t>
+            </a:r>
+          </a:p>
+        </p:txBody>
+      </p:sp>
+      <p:sp>
+        <p:nvSpPr>
+          <p:cNvPr id="7" name="Content Placeholder 2">
+            <a:extLst>
+              <a:ext uri="{FF2B5EF4-FFF2-40B4-BE49-F238E27FC236}">
+                <a16:creationId xmlns:a16="http://schemas.microsoft.com/office/drawing/2014/main" id="{B4B171DD-CFD3-3A04-18F7-2E6EC2C83C1F}"/>
+              </a:ext>
+            </a:extLst>
+          </p:cNvPr>
+          <p:cNvSpPr txBox="1">
+            <a:spLocks/>
+          </p:cNvSpPr>
+          <p:nvPr/>
+        </p:nvSpPr>
+        <p:spPr>
+          <a:xfrm rot="19654451">
+            <a:off x="7139044" y="1696029"/>
+            <a:ext cx="3959711" cy="616361"/>
+          </a:xfrm>
+          <a:prstGeom prst="rect">
+            <a:avLst/>
+          </a:prstGeom>
+        </p:spPr>
+        <p:txBody>
+          <a:bodyPr vert="horz" lIns="91440" tIns="45720" rIns="91440" bIns="45720" rtlCol="0">
+            <a:normAutofit fontScale="77500" lnSpcReduction="20000"/>
+          </a:bodyPr>
+          <a:lstStyle>
+            <a:lvl1pPr marL="228600" indent="-228600" algn="l" defTabSz="914400" rtl="0" eaLnBrk="1" latinLnBrk="0" hangingPunct="1">
+              <a:lnSpc>
+                <a:spcPct val="90000"/>
+              </a:lnSpc>
+              <a:spcBef>
+                <a:spcPts val="1000"/>
+              </a:spcBef>
+              <a:buFont typeface="Arial" panose="020B0604020202020204" pitchFamily="34" charset="0"/>
+              <a:buChar char="•"/>
+              <a:defRPr sz="2800" kern="1200">
+                <a:solidFill>
+                  <a:schemeClr val="tx1"/>
+                </a:solidFill>
+                <a:latin typeface="+mn-lt"/>
+                <a:ea typeface="+mn-ea"/>
+                <a:cs typeface="+mn-cs"/>
+              </a:defRPr>
+            </a:lvl1pPr>
+            <a:lvl2pPr marL="685800" indent="-228600" algn="l" defTabSz="914400" rtl="0" eaLnBrk="1" latinLnBrk="0" hangingPunct="1">
+              <a:lnSpc>
+                <a:spcPct val="90000"/>
+              </a:lnSpc>
+              <a:spcBef>
+                <a:spcPts val="500"/>
+              </a:spcBef>
+              <a:buFont typeface="Arial" panose="020B0604020202020204" pitchFamily="34" charset="0"/>
+              <a:buChar char="•"/>
+              <a:defRPr sz="2400" kern="1200">
+                <a:solidFill>
+                  <a:schemeClr val="tx1"/>
+                </a:solidFill>
+                <a:latin typeface="+mn-lt"/>
+                <a:ea typeface="+mn-ea"/>
+                <a:cs typeface="+mn-cs"/>
+              </a:defRPr>
+            </a:lvl2pPr>
+            <a:lvl3pPr marL="1143000" indent="-228600" algn="l" defTabSz="914400" rtl="0" eaLnBrk="1" latinLnBrk="0" hangingPunct="1">
+              <a:lnSpc>
+                <a:spcPct val="90000"/>
+              </a:lnSpc>
+              <a:spcBef>
+                <a:spcPts val="500"/>
+              </a:spcBef>
+              <a:buFont typeface="Arial" panose="020B0604020202020204" pitchFamily="34" charset="0"/>
+              <a:buChar char="•"/>
+              <a:defRPr sz="2000" kern="1200">
+                <a:solidFill>
+                  <a:schemeClr val="tx1"/>
+                </a:solidFill>
+                <a:latin typeface="+mn-lt"/>
+                <a:ea typeface="+mn-ea"/>
+                <a:cs typeface="+mn-cs"/>
+              </a:defRPr>
+            </a:lvl3pPr>
+            <a:lvl4pPr marL="1600200" indent="-228600" algn="l" defTabSz="914400" rtl="0" eaLnBrk="1" latinLnBrk="0" hangingPunct="1">
+              <a:lnSpc>
+                <a:spcPct val="90000"/>
+              </a:lnSpc>
+              <a:spcBef>
+                <a:spcPts val="500"/>
+              </a:spcBef>
+              <a:buFont typeface="Arial" panose="020B0604020202020204" pitchFamily="34" charset="0"/>
+              <a:buChar char="•"/>
+              <a:defRPr sz="1800" kern="1200">
+                <a:solidFill>
+                  <a:schemeClr val="tx1"/>
+                </a:solidFill>
+                <a:latin typeface="+mn-lt"/>
+                <a:ea typeface="+mn-ea"/>
+                <a:cs typeface="+mn-cs"/>
+              </a:defRPr>
+            </a:lvl4pPr>
+            <a:lvl5pPr marL="2057400" indent="-228600" algn="l" defTabSz="914400" rtl="0" eaLnBrk="1" latinLnBrk="0" hangingPunct="1">
+              <a:lnSpc>
+                <a:spcPct val="90000"/>
+              </a:lnSpc>
+              <a:spcBef>
+                <a:spcPts val="500"/>
+              </a:spcBef>
+              <a:buFont typeface="Arial" panose="020B0604020202020204" pitchFamily="34" charset="0"/>
+              <a:buChar char="•"/>
+              <a:defRPr sz="1800" kern="1200">
+                <a:solidFill>
+                  <a:schemeClr val="tx1"/>
+                </a:solidFill>
+                <a:latin typeface="+mn-lt"/>
+                <a:ea typeface="+mn-ea"/>
+                <a:cs typeface="+mn-cs"/>
+              </a:defRPr>
+            </a:lvl5pPr>
+            <a:lvl6pPr marL="2514600" indent="-228600" algn="l" defTabSz="914400" rtl="0" eaLnBrk="1" latinLnBrk="0" hangingPunct="1">
+              <a:lnSpc>
+                <a:spcPct val="90000"/>
+              </a:lnSpc>
+              <a:spcBef>
+                <a:spcPts val="500"/>
+              </a:spcBef>
+              <a:buFont typeface="Arial" panose="020B0604020202020204" pitchFamily="34" charset="0"/>
+              <a:buChar char="•"/>
+              <a:defRPr sz="1800" kern="1200">
+                <a:solidFill>
+                  <a:schemeClr val="tx1"/>
+                </a:solidFill>
+                <a:latin typeface="+mn-lt"/>
+                <a:ea typeface="+mn-ea"/>
+                <a:cs typeface="+mn-cs"/>
+              </a:defRPr>
+            </a:lvl6pPr>
+            <a:lvl7pPr marL="2971800" indent="-228600" algn="l" defTabSz="914400" rtl="0" eaLnBrk="1" latinLnBrk="0" hangingPunct="1">
+              <a:lnSpc>
+                <a:spcPct val="90000"/>
+              </a:lnSpc>
+              <a:spcBef>
+                <a:spcPts val="500"/>
+              </a:spcBef>
+              <a:buFont typeface="Arial" panose="020B0604020202020204" pitchFamily="34" charset="0"/>
+              <a:buChar char="•"/>
+              <a:defRPr sz="1800" kern="1200">
+                <a:solidFill>
+                  <a:schemeClr val="tx1"/>
+                </a:solidFill>
+                <a:latin typeface="+mn-lt"/>
+                <a:ea typeface="+mn-ea"/>
+                <a:cs typeface="+mn-cs"/>
+              </a:defRPr>
+            </a:lvl7pPr>
+            <a:lvl8pPr marL="3429000" indent="-228600" algn="l" defTabSz="914400" rtl="0" eaLnBrk="1" latinLnBrk="0" hangingPunct="1">
+              <a:lnSpc>
+                <a:spcPct val="90000"/>
+              </a:lnSpc>
+              <a:spcBef>
+                <a:spcPts val="500"/>
+              </a:spcBef>
+              <a:buFont typeface="Arial" panose="020B0604020202020204" pitchFamily="34" charset="0"/>
+              <a:buChar char="•"/>
+              <a:defRPr sz="1800" kern="1200">
+                <a:solidFill>
+                  <a:schemeClr val="tx1"/>
+                </a:solidFill>
+                <a:latin typeface="+mn-lt"/>
+                <a:ea typeface="+mn-ea"/>
+                <a:cs typeface="+mn-cs"/>
+              </a:defRPr>
+            </a:lvl8pPr>
+            <a:lvl9pPr marL="3886200" indent="-228600" algn="l" defTabSz="914400" rtl="0" eaLnBrk="1" latinLnBrk="0" hangingPunct="1">
+              <a:lnSpc>
+                <a:spcPct val="90000"/>
+              </a:lnSpc>
+              <a:spcBef>
+                <a:spcPts val="500"/>
+              </a:spcBef>
+              <a:buFont typeface="Arial" panose="020B0604020202020204" pitchFamily="34" charset="0"/>
+              <a:buChar char="•"/>
+              <a:defRPr sz="1800" kern="1200">
+                <a:solidFill>
+                  <a:schemeClr val="tx1"/>
+                </a:solidFill>
+                <a:latin typeface="+mn-lt"/>
+                <a:ea typeface="+mn-ea"/>
+                <a:cs typeface="+mn-cs"/>
+              </a:defRPr>
+            </a:lvl9pPr>
+          </a:lstStyle>
+          <a:p>
+            <a:r>
+              <a:rPr lang="en-US" dirty="0"/>
+              <a:t>Figure out which app you need to run</a:t>
+            </a:r>
+          </a:p>
+        </p:txBody>
+      </p:sp>
+      <p:sp>
+        <p:nvSpPr>
+          <p:cNvPr id="8" name="Content Placeholder 2">
+            <a:extLst>
+              <a:ext uri="{FF2B5EF4-FFF2-40B4-BE49-F238E27FC236}">
+                <a16:creationId xmlns:a16="http://schemas.microsoft.com/office/drawing/2014/main" id="{0FFB8F01-3501-8A44-FE59-FA43EAB749E1}"/>
+              </a:ext>
+            </a:extLst>
+          </p:cNvPr>
+          <p:cNvSpPr txBox="1">
+            <a:spLocks/>
+          </p:cNvSpPr>
+          <p:nvPr/>
+        </p:nvSpPr>
+        <p:spPr>
+          <a:xfrm>
+            <a:off x="5919394" y="4238924"/>
+            <a:ext cx="3959711" cy="616361"/>
+          </a:xfrm>
+          <a:prstGeom prst="rect">
+            <a:avLst/>
+          </a:prstGeom>
+        </p:spPr>
+        <p:txBody>
+          <a:bodyPr vert="horz" lIns="91440" tIns="45720" rIns="91440" bIns="45720" rtlCol="0">
+            <a:normAutofit fontScale="77500" lnSpcReduction="20000"/>
+          </a:bodyPr>
+          <a:lstStyle>
+            <a:lvl1pPr marL="228600" indent="-228600" algn="l" defTabSz="914400" rtl="0" eaLnBrk="1" latinLnBrk="0" hangingPunct="1">
+              <a:lnSpc>
+                <a:spcPct val="90000"/>
+              </a:lnSpc>
+              <a:spcBef>
+                <a:spcPts val="1000"/>
+              </a:spcBef>
+              <a:buFont typeface="Arial" panose="020B0604020202020204" pitchFamily="34" charset="0"/>
+              <a:buChar char="•"/>
+              <a:defRPr sz="2800" kern="1200">
+                <a:solidFill>
+                  <a:schemeClr val="tx1"/>
+                </a:solidFill>
+                <a:latin typeface="+mn-lt"/>
+                <a:ea typeface="+mn-ea"/>
+                <a:cs typeface="+mn-cs"/>
+              </a:defRPr>
+            </a:lvl1pPr>
+            <a:lvl2pPr marL="685800" indent="-228600" algn="l" defTabSz="914400" rtl="0" eaLnBrk="1" latinLnBrk="0" hangingPunct="1">
+              <a:lnSpc>
+                <a:spcPct val="90000"/>
+              </a:lnSpc>
+              <a:spcBef>
+                <a:spcPts val="500"/>
+              </a:spcBef>
+              <a:buFont typeface="Arial" panose="020B0604020202020204" pitchFamily="34" charset="0"/>
+              <a:buChar char="•"/>
+              <a:defRPr sz="2400" kern="1200">
+                <a:solidFill>
+                  <a:schemeClr val="tx1"/>
+                </a:solidFill>
+                <a:latin typeface="+mn-lt"/>
+                <a:ea typeface="+mn-ea"/>
+                <a:cs typeface="+mn-cs"/>
+              </a:defRPr>
+            </a:lvl2pPr>
+            <a:lvl3pPr marL="1143000" indent="-228600" algn="l" defTabSz="914400" rtl="0" eaLnBrk="1" latinLnBrk="0" hangingPunct="1">
+              <a:lnSpc>
+                <a:spcPct val="90000"/>
+              </a:lnSpc>
+              <a:spcBef>
+                <a:spcPts val="500"/>
+              </a:spcBef>
+              <a:buFont typeface="Arial" panose="020B0604020202020204" pitchFamily="34" charset="0"/>
+              <a:buChar char="•"/>
+              <a:defRPr sz="2000" kern="1200">
+                <a:solidFill>
+                  <a:schemeClr val="tx1"/>
+                </a:solidFill>
+                <a:latin typeface="+mn-lt"/>
+                <a:ea typeface="+mn-ea"/>
+                <a:cs typeface="+mn-cs"/>
+              </a:defRPr>
+            </a:lvl3pPr>
+            <a:lvl4pPr marL="1600200" indent="-228600" algn="l" defTabSz="914400" rtl="0" eaLnBrk="1" latinLnBrk="0" hangingPunct="1">
+              <a:lnSpc>
+                <a:spcPct val="90000"/>
+              </a:lnSpc>
+              <a:spcBef>
+                <a:spcPts val="500"/>
+              </a:spcBef>
+              <a:buFont typeface="Arial" panose="020B0604020202020204" pitchFamily="34" charset="0"/>
+              <a:buChar char="•"/>
+              <a:defRPr sz="1800" kern="1200">
+                <a:solidFill>
+                  <a:schemeClr val="tx1"/>
+                </a:solidFill>
+                <a:latin typeface="+mn-lt"/>
+                <a:ea typeface="+mn-ea"/>
+                <a:cs typeface="+mn-cs"/>
+              </a:defRPr>
+            </a:lvl4pPr>
+            <a:lvl5pPr marL="2057400" indent="-228600" algn="l" defTabSz="914400" rtl="0" eaLnBrk="1" latinLnBrk="0" hangingPunct="1">
+              <a:lnSpc>
+                <a:spcPct val="90000"/>
+              </a:lnSpc>
+              <a:spcBef>
+                <a:spcPts val="500"/>
+              </a:spcBef>
+              <a:buFont typeface="Arial" panose="020B0604020202020204" pitchFamily="34" charset="0"/>
+              <a:buChar char="•"/>
+              <a:defRPr sz="1800" kern="1200">
+                <a:solidFill>
+                  <a:schemeClr val="tx1"/>
+                </a:solidFill>
+                <a:latin typeface="+mn-lt"/>
+                <a:ea typeface="+mn-ea"/>
+                <a:cs typeface="+mn-cs"/>
+              </a:defRPr>
+            </a:lvl5pPr>
+            <a:lvl6pPr marL="2514600" indent="-228600" algn="l" defTabSz="914400" rtl="0" eaLnBrk="1" latinLnBrk="0" hangingPunct="1">
+              <a:lnSpc>
+                <a:spcPct val="90000"/>
+              </a:lnSpc>
+              <a:spcBef>
+                <a:spcPts val="500"/>
+              </a:spcBef>
+              <a:buFont typeface="Arial" panose="020B0604020202020204" pitchFamily="34" charset="0"/>
+              <a:buChar char="•"/>
+              <a:defRPr sz="1800" kern="1200">
+                <a:solidFill>
+                  <a:schemeClr val="tx1"/>
+                </a:solidFill>
+                <a:latin typeface="+mn-lt"/>
+                <a:ea typeface="+mn-ea"/>
+                <a:cs typeface="+mn-cs"/>
+              </a:defRPr>
+            </a:lvl6pPr>
+            <a:lvl7pPr marL="2971800" indent="-228600" algn="l" defTabSz="914400" rtl="0" eaLnBrk="1" latinLnBrk="0" hangingPunct="1">
+              <a:lnSpc>
+                <a:spcPct val="90000"/>
+              </a:lnSpc>
+              <a:spcBef>
+                <a:spcPts val="500"/>
+              </a:spcBef>
+              <a:buFont typeface="Arial" panose="020B0604020202020204" pitchFamily="34" charset="0"/>
+              <a:buChar char="•"/>
+              <a:defRPr sz="1800" kern="1200">
+                <a:solidFill>
+                  <a:schemeClr val="tx1"/>
+                </a:solidFill>
+                <a:latin typeface="+mn-lt"/>
+                <a:ea typeface="+mn-ea"/>
+                <a:cs typeface="+mn-cs"/>
+              </a:defRPr>
+            </a:lvl7pPr>
+            <a:lvl8pPr marL="3429000" indent="-228600" algn="l" defTabSz="914400" rtl="0" eaLnBrk="1" latinLnBrk="0" hangingPunct="1">
+              <a:lnSpc>
+                <a:spcPct val="90000"/>
+              </a:lnSpc>
+              <a:spcBef>
+                <a:spcPts val="500"/>
+              </a:spcBef>
+              <a:buFont typeface="Arial" panose="020B0604020202020204" pitchFamily="34" charset="0"/>
+              <a:buChar char="•"/>
+              <a:defRPr sz="1800" kern="1200">
+                <a:solidFill>
+                  <a:schemeClr val="tx1"/>
+                </a:solidFill>
+                <a:latin typeface="+mn-lt"/>
+                <a:ea typeface="+mn-ea"/>
+                <a:cs typeface="+mn-cs"/>
+              </a:defRPr>
+            </a:lvl8pPr>
+            <a:lvl9pPr marL="3886200" indent="-228600" algn="l" defTabSz="914400" rtl="0" eaLnBrk="1" latinLnBrk="0" hangingPunct="1">
+              <a:lnSpc>
+                <a:spcPct val="90000"/>
+              </a:lnSpc>
+              <a:spcBef>
+                <a:spcPts val="500"/>
+              </a:spcBef>
+              <a:buFont typeface="Arial" panose="020B0604020202020204" pitchFamily="34" charset="0"/>
+              <a:buChar char="•"/>
+              <a:defRPr sz="1800" kern="1200">
+                <a:solidFill>
+                  <a:schemeClr val="tx1"/>
+                </a:solidFill>
+                <a:latin typeface="+mn-lt"/>
+                <a:ea typeface="+mn-ea"/>
+                <a:cs typeface="+mn-cs"/>
+              </a:defRPr>
+            </a:lvl9pPr>
+          </a:lstStyle>
+          <a:p>
+            <a:r>
+              <a:rPr lang="en-US" dirty="0"/>
+              <a:t>Also which apps need to run to support the one you want</a:t>
+            </a:r>
+          </a:p>
+        </p:txBody>
+      </p:sp>
+      <p:sp>
+        <p:nvSpPr>
+          <p:cNvPr id="9" name="Content Placeholder 2">
+            <a:extLst>
+              <a:ext uri="{FF2B5EF4-FFF2-40B4-BE49-F238E27FC236}">
+                <a16:creationId xmlns:a16="http://schemas.microsoft.com/office/drawing/2014/main" id="{482D1CC2-1C48-821C-318E-096D18544332}"/>
+              </a:ext>
+            </a:extLst>
+          </p:cNvPr>
+          <p:cNvSpPr txBox="1">
+            <a:spLocks/>
+          </p:cNvSpPr>
+          <p:nvPr/>
+        </p:nvSpPr>
+        <p:spPr>
+          <a:xfrm>
+            <a:off x="1054697" y="4690745"/>
+            <a:ext cx="3959711" cy="616361"/>
+          </a:xfrm>
+          <a:prstGeom prst="rect">
+            <a:avLst/>
+          </a:prstGeom>
+        </p:spPr>
+        <p:txBody>
+          <a:bodyPr vert="horz" lIns="91440" tIns="45720" rIns="91440" bIns="45720" rtlCol="0">
+            <a:normAutofit fontScale="77500" lnSpcReduction="20000"/>
+          </a:bodyPr>
+          <a:lstStyle>
+            <a:lvl1pPr marL="228600" indent="-228600" algn="l" defTabSz="914400" rtl="0" eaLnBrk="1" latinLnBrk="0" hangingPunct="1">
+              <a:lnSpc>
+                <a:spcPct val="90000"/>
+              </a:lnSpc>
+              <a:spcBef>
+                <a:spcPts val="1000"/>
+              </a:spcBef>
+              <a:buFont typeface="Arial" panose="020B0604020202020204" pitchFamily="34" charset="0"/>
+              <a:buChar char="•"/>
+              <a:defRPr sz="2800" kern="1200">
+                <a:solidFill>
+                  <a:schemeClr val="tx1"/>
+                </a:solidFill>
+                <a:latin typeface="+mn-lt"/>
+                <a:ea typeface="+mn-ea"/>
+                <a:cs typeface="+mn-cs"/>
+              </a:defRPr>
+            </a:lvl1pPr>
+            <a:lvl2pPr marL="685800" indent="-228600" algn="l" defTabSz="914400" rtl="0" eaLnBrk="1" latinLnBrk="0" hangingPunct="1">
+              <a:lnSpc>
+                <a:spcPct val="90000"/>
+              </a:lnSpc>
+              <a:spcBef>
+                <a:spcPts val="500"/>
+              </a:spcBef>
+              <a:buFont typeface="Arial" panose="020B0604020202020204" pitchFamily="34" charset="0"/>
+              <a:buChar char="•"/>
+              <a:defRPr sz="2400" kern="1200">
+                <a:solidFill>
+                  <a:schemeClr val="tx1"/>
+                </a:solidFill>
+                <a:latin typeface="+mn-lt"/>
+                <a:ea typeface="+mn-ea"/>
+                <a:cs typeface="+mn-cs"/>
+              </a:defRPr>
+            </a:lvl2pPr>
+            <a:lvl3pPr marL="1143000" indent="-228600" algn="l" defTabSz="914400" rtl="0" eaLnBrk="1" latinLnBrk="0" hangingPunct="1">
+              <a:lnSpc>
+                <a:spcPct val="90000"/>
+              </a:lnSpc>
+              <a:spcBef>
+                <a:spcPts val="500"/>
+              </a:spcBef>
+              <a:buFont typeface="Arial" panose="020B0604020202020204" pitchFamily="34" charset="0"/>
+              <a:buChar char="•"/>
+              <a:defRPr sz="2000" kern="1200">
+                <a:solidFill>
+                  <a:schemeClr val="tx1"/>
+                </a:solidFill>
+                <a:latin typeface="+mn-lt"/>
+                <a:ea typeface="+mn-ea"/>
+                <a:cs typeface="+mn-cs"/>
+              </a:defRPr>
+            </a:lvl3pPr>
+            <a:lvl4pPr marL="1600200" indent="-228600" algn="l" defTabSz="914400" rtl="0" eaLnBrk="1" latinLnBrk="0" hangingPunct="1">
+              <a:lnSpc>
+                <a:spcPct val="90000"/>
+              </a:lnSpc>
+              <a:spcBef>
+                <a:spcPts val="500"/>
+              </a:spcBef>
+              <a:buFont typeface="Arial" panose="020B0604020202020204" pitchFamily="34" charset="0"/>
+              <a:buChar char="•"/>
+              <a:defRPr sz="1800" kern="1200">
+                <a:solidFill>
+                  <a:schemeClr val="tx1"/>
+                </a:solidFill>
+                <a:latin typeface="+mn-lt"/>
+                <a:ea typeface="+mn-ea"/>
+                <a:cs typeface="+mn-cs"/>
+              </a:defRPr>
+            </a:lvl4pPr>
+            <a:lvl5pPr marL="2057400" indent="-228600" algn="l" defTabSz="914400" rtl="0" eaLnBrk="1" latinLnBrk="0" hangingPunct="1">
+              <a:lnSpc>
+                <a:spcPct val="90000"/>
+              </a:lnSpc>
+              <a:spcBef>
+                <a:spcPts val="500"/>
+              </a:spcBef>
+              <a:buFont typeface="Arial" panose="020B0604020202020204" pitchFamily="34" charset="0"/>
+              <a:buChar char="•"/>
+              <a:defRPr sz="1800" kern="1200">
+                <a:solidFill>
+                  <a:schemeClr val="tx1"/>
+                </a:solidFill>
+                <a:latin typeface="+mn-lt"/>
+                <a:ea typeface="+mn-ea"/>
+                <a:cs typeface="+mn-cs"/>
+              </a:defRPr>
+            </a:lvl5pPr>
+            <a:lvl6pPr marL="2514600" indent="-228600" algn="l" defTabSz="914400" rtl="0" eaLnBrk="1" latinLnBrk="0" hangingPunct="1">
+              <a:lnSpc>
+                <a:spcPct val="90000"/>
+              </a:lnSpc>
+              <a:spcBef>
+                <a:spcPts val="500"/>
+              </a:spcBef>
+              <a:buFont typeface="Arial" panose="020B0604020202020204" pitchFamily="34" charset="0"/>
+              <a:buChar char="•"/>
+              <a:defRPr sz="1800" kern="1200">
+                <a:solidFill>
+                  <a:schemeClr val="tx1"/>
+                </a:solidFill>
+                <a:latin typeface="+mn-lt"/>
+                <a:ea typeface="+mn-ea"/>
+                <a:cs typeface="+mn-cs"/>
+              </a:defRPr>
+            </a:lvl6pPr>
+            <a:lvl7pPr marL="2971800" indent="-228600" algn="l" defTabSz="914400" rtl="0" eaLnBrk="1" latinLnBrk="0" hangingPunct="1">
+              <a:lnSpc>
+                <a:spcPct val="90000"/>
+              </a:lnSpc>
+              <a:spcBef>
+                <a:spcPts val="500"/>
+              </a:spcBef>
+              <a:buFont typeface="Arial" panose="020B0604020202020204" pitchFamily="34" charset="0"/>
+              <a:buChar char="•"/>
+              <a:defRPr sz="1800" kern="1200">
+                <a:solidFill>
+                  <a:schemeClr val="tx1"/>
+                </a:solidFill>
+                <a:latin typeface="+mn-lt"/>
+                <a:ea typeface="+mn-ea"/>
+                <a:cs typeface="+mn-cs"/>
+              </a:defRPr>
+            </a:lvl7pPr>
+            <a:lvl8pPr marL="3429000" indent="-228600" algn="l" defTabSz="914400" rtl="0" eaLnBrk="1" latinLnBrk="0" hangingPunct="1">
+              <a:lnSpc>
+                <a:spcPct val="90000"/>
+              </a:lnSpc>
+              <a:spcBef>
+                <a:spcPts val="500"/>
+              </a:spcBef>
+              <a:buFont typeface="Arial" panose="020B0604020202020204" pitchFamily="34" charset="0"/>
+              <a:buChar char="•"/>
+              <a:defRPr sz="1800" kern="1200">
+                <a:solidFill>
+                  <a:schemeClr val="tx1"/>
+                </a:solidFill>
+                <a:latin typeface="+mn-lt"/>
+                <a:ea typeface="+mn-ea"/>
+                <a:cs typeface="+mn-cs"/>
+              </a:defRPr>
+            </a:lvl8pPr>
+            <a:lvl9pPr marL="3886200" indent="-228600" algn="l" defTabSz="914400" rtl="0" eaLnBrk="1" latinLnBrk="0" hangingPunct="1">
+              <a:lnSpc>
+                <a:spcPct val="90000"/>
+              </a:lnSpc>
+              <a:spcBef>
+                <a:spcPts val="500"/>
+              </a:spcBef>
+              <a:buFont typeface="Arial" panose="020B0604020202020204" pitchFamily="34" charset="0"/>
+              <a:buChar char="•"/>
+              <a:defRPr sz="1800" kern="1200">
+                <a:solidFill>
+                  <a:schemeClr val="tx1"/>
+                </a:solidFill>
+                <a:latin typeface="+mn-lt"/>
+                <a:ea typeface="+mn-ea"/>
+                <a:cs typeface="+mn-cs"/>
+              </a:defRPr>
+            </a:lvl9pPr>
+          </a:lstStyle>
+          <a:p>
+            <a:r>
+              <a:rPr lang="en-US" dirty="0"/>
+              <a:t>Sort out auth, secrets, and config</a:t>
+            </a:r>
+          </a:p>
+        </p:txBody>
+      </p:sp>
+      <p:sp>
+        <p:nvSpPr>
+          <p:cNvPr id="10" name="Content Placeholder 2">
+            <a:extLst>
+              <a:ext uri="{FF2B5EF4-FFF2-40B4-BE49-F238E27FC236}">
+                <a16:creationId xmlns:a16="http://schemas.microsoft.com/office/drawing/2014/main" id="{39F88666-086F-974B-AB61-ED95DD0EEE34}"/>
+              </a:ext>
+            </a:extLst>
+          </p:cNvPr>
+          <p:cNvSpPr txBox="1">
+            <a:spLocks/>
+          </p:cNvSpPr>
+          <p:nvPr/>
+        </p:nvSpPr>
+        <p:spPr>
+          <a:xfrm rot="685514">
+            <a:off x="6038626" y="2850085"/>
+            <a:ext cx="3959711" cy="616361"/>
+          </a:xfrm>
+          <a:prstGeom prst="rect">
+            <a:avLst/>
+          </a:prstGeom>
+        </p:spPr>
+        <p:txBody>
+          <a:bodyPr vert="horz" lIns="91440" tIns="45720" rIns="91440" bIns="45720" rtlCol="0">
+            <a:normAutofit/>
+          </a:bodyPr>
+          <a:lstStyle>
+            <a:lvl1pPr marL="228600" indent="-228600" algn="l" defTabSz="914400" rtl="0" eaLnBrk="1" latinLnBrk="0" hangingPunct="1">
+              <a:lnSpc>
+                <a:spcPct val="90000"/>
+              </a:lnSpc>
+              <a:spcBef>
+                <a:spcPts val="1000"/>
+              </a:spcBef>
+              <a:buFont typeface="Arial" panose="020B0604020202020204" pitchFamily="34" charset="0"/>
+              <a:buChar char="•"/>
+              <a:defRPr sz="2800" kern="1200">
+                <a:solidFill>
+                  <a:schemeClr val="tx1"/>
+                </a:solidFill>
+                <a:latin typeface="+mn-lt"/>
+                <a:ea typeface="+mn-ea"/>
+                <a:cs typeface="+mn-cs"/>
+              </a:defRPr>
+            </a:lvl1pPr>
+            <a:lvl2pPr marL="685800" indent="-228600" algn="l" defTabSz="914400" rtl="0" eaLnBrk="1" latinLnBrk="0" hangingPunct="1">
+              <a:lnSpc>
+                <a:spcPct val="90000"/>
+              </a:lnSpc>
+              <a:spcBef>
+                <a:spcPts val="500"/>
+              </a:spcBef>
+              <a:buFont typeface="Arial" panose="020B0604020202020204" pitchFamily="34" charset="0"/>
+              <a:buChar char="•"/>
+              <a:defRPr sz="2400" kern="1200">
+                <a:solidFill>
+                  <a:schemeClr val="tx1"/>
+                </a:solidFill>
+                <a:latin typeface="+mn-lt"/>
+                <a:ea typeface="+mn-ea"/>
+                <a:cs typeface="+mn-cs"/>
+              </a:defRPr>
+            </a:lvl2pPr>
+            <a:lvl3pPr marL="1143000" indent="-228600" algn="l" defTabSz="914400" rtl="0" eaLnBrk="1" latinLnBrk="0" hangingPunct="1">
+              <a:lnSpc>
+                <a:spcPct val="90000"/>
+              </a:lnSpc>
+              <a:spcBef>
+                <a:spcPts val="500"/>
+              </a:spcBef>
+              <a:buFont typeface="Arial" panose="020B0604020202020204" pitchFamily="34" charset="0"/>
+              <a:buChar char="•"/>
+              <a:defRPr sz="2000" kern="1200">
+                <a:solidFill>
+                  <a:schemeClr val="tx1"/>
+                </a:solidFill>
+                <a:latin typeface="+mn-lt"/>
+                <a:ea typeface="+mn-ea"/>
+                <a:cs typeface="+mn-cs"/>
+              </a:defRPr>
+            </a:lvl3pPr>
+            <a:lvl4pPr marL="1600200" indent="-228600" algn="l" defTabSz="914400" rtl="0" eaLnBrk="1" latinLnBrk="0" hangingPunct="1">
+              <a:lnSpc>
+                <a:spcPct val="90000"/>
+              </a:lnSpc>
+              <a:spcBef>
+                <a:spcPts val="500"/>
+              </a:spcBef>
+              <a:buFont typeface="Arial" panose="020B0604020202020204" pitchFamily="34" charset="0"/>
+              <a:buChar char="•"/>
+              <a:defRPr sz="1800" kern="1200">
+                <a:solidFill>
+                  <a:schemeClr val="tx1"/>
+                </a:solidFill>
+                <a:latin typeface="+mn-lt"/>
+                <a:ea typeface="+mn-ea"/>
+                <a:cs typeface="+mn-cs"/>
+              </a:defRPr>
+            </a:lvl4pPr>
+            <a:lvl5pPr marL="2057400" indent="-228600" algn="l" defTabSz="914400" rtl="0" eaLnBrk="1" latinLnBrk="0" hangingPunct="1">
+              <a:lnSpc>
+                <a:spcPct val="90000"/>
+              </a:lnSpc>
+              <a:spcBef>
+                <a:spcPts val="500"/>
+              </a:spcBef>
+              <a:buFont typeface="Arial" panose="020B0604020202020204" pitchFamily="34" charset="0"/>
+              <a:buChar char="•"/>
+              <a:defRPr sz="1800" kern="1200">
+                <a:solidFill>
+                  <a:schemeClr val="tx1"/>
+                </a:solidFill>
+                <a:latin typeface="+mn-lt"/>
+                <a:ea typeface="+mn-ea"/>
+                <a:cs typeface="+mn-cs"/>
+              </a:defRPr>
+            </a:lvl5pPr>
+            <a:lvl6pPr marL="2514600" indent="-228600" algn="l" defTabSz="914400" rtl="0" eaLnBrk="1" latinLnBrk="0" hangingPunct="1">
+              <a:lnSpc>
+                <a:spcPct val="90000"/>
+              </a:lnSpc>
+              <a:spcBef>
+                <a:spcPts val="500"/>
+              </a:spcBef>
+              <a:buFont typeface="Arial" panose="020B0604020202020204" pitchFamily="34" charset="0"/>
+              <a:buChar char="•"/>
+              <a:defRPr sz="1800" kern="1200">
+                <a:solidFill>
+                  <a:schemeClr val="tx1"/>
+                </a:solidFill>
+                <a:latin typeface="+mn-lt"/>
+                <a:ea typeface="+mn-ea"/>
+                <a:cs typeface="+mn-cs"/>
+              </a:defRPr>
+            </a:lvl6pPr>
+            <a:lvl7pPr marL="2971800" indent="-228600" algn="l" defTabSz="914400" rtl="0" eaLnBrk="1" latinLnBrk="0" hangingPunct="1">
+              <a:lnSpc>
+                <a:spcPct val="90000"/>
+              </a:lnSpc>
+              <a:spcBef>
+                <a:spcPts val="500"/>
+              </a:spcBef>
+              <a:buFont typeface="Arial" panose="020B0604020202020204" pitchFamily="34" charset="0"/>
+              <a:buChar char="•"/>
+              <a:defRPr sz="1800" kern="1200">
+                <a:solidFill>
+                  <a:schemeClr val="tx1"/>
+                </a:solidFill>
+                <a:latin typeface="+mn-lt"/>
+                <a:ea typeface="+mn-ea"/>
+                <a:cs typeface="+mn-cs"/>
+              </a:defRPr>
+            </a:lvl7pPr>
+            <a:lvl8pPr marL="3429000" indent="-228600" algn="l" defTabSz="914400" rtl="0" eaLnBrk="1" latinLnBrk="0" hangingPunct="1">
+              <a:lnSpc>
+                <a:spcPct val="90000"/>
+              </a:lnSpc>
+              <a:spcBef>
+                <a:spcPts val="500"/>
+              </a:spcBef>
+              <a:buFont typeface="Arial" panose="020B0604020202020204" pitchFamily="34" charset="0"/>
+              <a:buChar char="•"/>
+              <a:defRPr sz="1800" kern="1200">
+                <a:solidFill>
+                  <a:schemeClr val="tx1"/>
+                </a:solidFill>
+                <a:latin typeface="+mn-lt"/>
+                <a:ea typeface="+mn-ea"/>
+                <a:cs typeface="+mn-cs"/>
+              </a:defRPr>
+            </a:lvl8pPr>
+            <a:lvl9pPr marL="3886200" indent="-228600" algn="l" defTabSz="914400" rtl="0" eaLnBrk="1" latinLnBrk="0" hangingPunct="1">
+              <a:lnSpc>
+                <a:spcPct val="90000"/>
+              </a:lnSpc>
+              <a:spcBef>
+                <a:spcPts val="500"/>
+              </a:spcBef>
+              <a:buFont typeface="Arial" panose="020B0604020202020204" pitchFamily="34" charset="0"/>
+              <a:buChar char="•"/>
+              <a:defRPr sz="1800" kern="1200">
+                <a:solidFill>
+                  <a:schemeClr val="tx1"/>
+                </a:solidFill>
+                <a:latin typeface="+mn-lt"/>
+                <a:ea typeface="+mn-ea"/>
+                <a:cs typeface="+mn-cs"/>
+              </a:defRPr>
+            </a:lvl9pPr>
+          </a:lstStyle>
+          <a:p>
+            <a:r>
+              <a:rPr lang="en-AU" dirty="0"/>
+              <a:t>Logging</a:t>
+            </a:r>
+          </a:p>
+        </p:txBody>
+      </p:sp>
+      <p:sp>
+        <p:nvSpPr>
+          <p:cNvPr id="11" name="Content Placeholder 2">
+            <a:extLst>
+              <a:ext uri="{FF2B5EF4-FFF2-40B4-BE49-F238E27FC236}">
+                <a16:creationId xmlns:a16="http://schemas.microsoft.com/office/drawing/2014/main" id="{160FA0AE-60C5-CE8D-D461-2C3057D62FE7}"/>
+              </a:ext>
+            </a:extLst>
+          </p:cNvPr>
+          <p:cNvSpPr txBox="1">
+            <a:spLocks/>
+          </p:cNvSpPr>
+          <p:nvPr/>
+        </p:nvSpPr>
+        <p:spPr>
+          <a:xfrm>
+            <a:off x="1250577" y="2441985"/>
+            <a:ext cx="3959711" cy="616361"/>
+          </a:xfrm>
+          <a:prstGeom prst="rect">
+            <a:avLst/>
+          </a:prstGeom>
+        </p:spPr>
+        <p:txBody>
+          <a:bodyPr vert="horz" lIns="91440" tIns="45720" rIns="91440" bIns="45720" rtlCol="0">
+            <a:normAutofit/>
+          </a:bodyPr>
+          <a:lstStyle>
+            <a:lvl1pPr marL="228600" indent="-228600" algn="l" defTabSz="914400" rtl="0" eaLnBrk="1" latinLnBrk="0" hangingPunct="1">
+              <a:lnSpc>
+                <a:spcPct val="90000"/>
+              </a:lnSpc>
+              <a:spcBef>
+                <a:spcPts val="1000"/>
+              </a:spcBef>
+              <a:buFont typeface="Arial" panose="020B0604020202020204" pitchFamily="34" charset="0"/>
+              <a:buChar char="•"/>
+              <a:defRPr sz="2800" kern="1200">
+                <a:solidFill>
+                  <a:schemeClr val="tx1"/>
+                </a:solidFill>
+                <a:latin typeface="+mn-lt"/>
+                <a:ea typeface="+mn-ea"/>
+                <a:cs typeface="+mn-cs"/>
+              </a:defRPr>
+            </a:lvl1pPr>
+            <a:lvl2pPr marL="685800" indent="-228600" algn="l" defTabSz="914400" rtl="0" eaLnBrk="1" latinLnBrk="0" hangingPunct="1">
+              <a:lnSpc>
+                <a:spcPct val="90000"/>
+              </a:lnSpc>
+              <a:spcBef>
+                <a:spcPts val="500"/>
+              </a:spcBef>
+              <a:buFont typeface="Arial" panose="020B0604020202020204" pitchFamily="34" charset="0"/>
+              <a:buChar char="•"/>
+              <a:defRPr sz="2400" kern="1200">
+                <a:solidFill>
+                  <a:schemeClr val="tx1"/>
+                </a:solidFill>
+                <a:latin typeface="+mn-lt"/>
+                <a:ea typeface="+mn-ea"/>
+                <a:cs typeface="+mn-cs"/>
+              </a:defRPr>
+            </a:lvl2pPr>
+            <a:lvl3pPr marL="1143000" indent="-228600" algn="l" defTabSz="914400" rtl="0" eaLnBrk="1" latinLnBrk="0" hangingPunct="1">
+              <a:lnSpc>
+                <a:spcPct val="90000"/>
+              </a:lnSpc>
+              <a:spcBef>
+                <a:spcPts val="500"/>
+              </a:spcBef>
+              <a:buFont typeface="Arial" panose="020B0604020202020204" pitchFamily="34" charset="0"/>
+              <a:buChar char="•"/>
+              <a:defRPr sz="2000" kern="1200">
+                <a:solidFill>
+                  <a:schemeClr val="tx1"/>
+                </a:solidFill>
+                <a:latin typeface="+mn-lt"/>
+                <a:ea typeface="+mn-ea"/>
+                <a:cs typeface="+mn-cs"/>
+              </a:defRPr>
+            </a:lvl3pPr>
+            <a:lvl4pPr marL="1600200" indent="-228600" algn="l" defTabSz="914400" rtl="0" eaLnBrk="1" latinLnBrk="0" hangingPunct="1">
+              <a:lnSpc>
+                <a:spcPct val="90000"/>
+              </a:lnSpc>
+              <a:spcBef>
+                <a:spcPts val="500"/>
+              </a:spcBef>
+              <a:buFont typeface="Arial" panose="020B0604020202020204" pitchFamily="34" charset="0"/>
+              <a:buChar char="•"/>
+              <a:defRPr sz="1800" kern="1200">
+                <a:solidFill>
+                  <a:schemeClr val="tx1"/>
+                </a:solidFill>
+                <a:latin typeface="+mn-lt"/>
+                <a:ea typeface="+mn-ea"/>
+                <a:cs typeface="+mn-cs"/>
+              </a:defRPr>
+            </a:lvl4pPr>
+            <a:lvl5pPr marL="2057400" indent="-228600" algn="l" defTabSz="914400" rtl="0" eaLnBrk="1" latinLnBrk="0" hangingPunct="1">
+              <a:lnSpc>
+                <a:spcPct val="90000"/>
+              </a:lnSpc>
+              <a:spcBef>
+                <a:spcPts val="500"/>
+              </a:spcBef>
+              <a:buFont typeface="Arial" panose="020B0604020202020204" pitchFamily="34" charset="0"/>
+              <a:buChar char="•"/>
+              <a:defRPr sz="1800" kern="1200">
+                <a:solidFill>
+                  <a:schemeClr val="tx1"/>
+                </a:solidFill>
+                <a:latin typeface="+mn-lt"/>
+                <a:ea typeface="+mn-ea"/>
+                <a:cs typeface="+mn-cs"/>
+              </a:defRPr>
+            </a:lvl5pPr>
+            <a:lvl6pPr marL="2514600" indent="-228600" algn="l" defTabSz="914400" rtl="0" eaLnBrk="1" latinLnBrk="0" hangingPunct="1">
+              <a:lnSpc>
+                <a:spcPct val="90000"/>
+              </a:lnSpc>
+              <a:spcBef>
+                <a:spcPts val="500"/>
+              </a:spcBef>
+              <a:buFont typeface="Arial" panose="020B0604020202020204" pitchFamily="34" charset="0"/>
+              <a:buChar char="•"/>
+              <a:defRPr sz="1800" kern="1200">
+                <a:solidFill>
+                  <a:schemeClr val="tx1"/>
+                </a:solidFill>
+                <a:latin typeface="+mn-lt"/>
+                <a:ea typeface="+mn-ea"/>
+                <a:cs typeface="+mn-cs"/>
+              </a:defRPr>
+            </a:lvl6pPr>
+            <a:lvl7pPr marL="2971800" indent="-228600" algn="l" defTabSz="914400" rtl="0" eaLnBrk="1" latinLnBrk="0" hangingPunct="1">
+              <a:lnSpc>
+                <a:spcPct val="90000"/>
+              </a:lnSpc>
+              <a:spcBef>
+                <a:spcPts val="500"/>
+              </a:spcBef>
+              <a:buFont typeface="Arial" panose="020B0604020202020204" pitchFamily="34" charset="0"/>
+              <a:buChar char="•"/>
+              <a:defRPr sz="1800" kern="1200">
+                <a:solidFill>
+                  <a:schemeClr val="tx1"/>
+                </a:solidFill>
+                <a:latin typeface="+mn-lt"/>
+                <a:ea typeface="+mn-ea"/>
+                <a:cs typeface="+mn-cs"/>
+              </a:defRPr>
+            </a:lvl7pPr>
+            <a:lvl8pPr marL="3429000" indent="-228600" algn="l" defTabSz="914400" rtl="0" eaLnBrk="1" latinLnBrk="0" hangingPunct="1">
+              <a:lnSpc>
+                <a:spcPct val="90000"/>
+              </a:lnSpc>
+              <a:spcBef>
+                <a:spcPts val="500"/>
+              </a:spcBef>
+              <a:buFont typeface="Arial" panose="020B0604020202020204" pitchFamily="34" charset="0"/>
+              <a:buChar char="•"/>
+              <a:defRPr sz="1800" kern="1200">
+                <a:solidFill>
+                  <a:schemeClr val="tx1"/>
+                </a:solidFill>
+                <a:latin typeface="+mn-lt"/>
+                <a:ea typeface="+mn-ea"/>
+                <a:cs typeface="+mn-cs"/>
+              </a:defRPr>
+            </a:lvl8pPr>
+            <a:lvl9pPr marL="3886200" indent="-228600" algn="l" defTabSz="914400" rtl="0" eaLnBrk="1" latinLnBrk="0" hangingPunct="1">
+              <a:lnSpc>
+                <a:spcPct val="90000"/>
+              </a:lnSpc>
+              <a:spcBef>
+                <a:spcPts val="500"/>
+              </a:spcBef>
+              <a:buFont typeface="Arial" panose="020B0604020202020204" pitchFamily="34" charset="0"/>
+              <a:buChar char="•"/>
+              <a:defRPr sz="1800" kern="1200">
+                <a:solidFill>
+                  <a:schemeClr val="tx1"/>
+                </a:solidFill>
+                <a:latin typeface="+mn-lt"/>
+                <a:ea typeface="+mn-ea"/>
+                <a:cs typeface="+mn-cs"/>
+              </a:defRPr>
+            </a:lvl9pPr>
+          </a:lstStyle>
+          <a:p>
+            <a:r>
+              <a:rPr lang="en-AU" dirty="0"/>
+              <a:t>Database setup</a:t>
+            </a:r>
+          </a:p>
+        </p:txBody>
+      </p:sp>
+      <p:sp>
+        <p:nvSpPr>
+          <p:cNvPr id="12" name="Content Placeholder 2">
+            <a:extLst>
+              <a:ext uri="{FF2B5EF4-FFF2-40B4-BE49-F238E27FC236}">
+                <a16:creationId xmlns:a16="http://schemas.microsoft.com/office/drawing/2014/main" id="{CEE9849C-F93C-AC20-76A0-3E6006002AE5}"/>
+              </a:ext>
+            </a:extLst>
+          </p:cNvPr>
+          <p:cNvSpPr txBox="1">
+            <a:spLocks/>
+          </p:cNvSpPr>
+          <p:nvPr/>
+        </p:nvSpPr>
+        <p:spPr>
+          <a:xfrm>
+            <a:off x="870024" y="3874545"/>
+            <a:ext cx="3959711" cy="616361"/>
+          </a:xfrm>
+          <a:prstGeom prst="rect">
+            <a:avLst/>
+          </a:prstGeom>
+        </p:spPr>
+        <p:txBody>
+          <a:bodyPr vert="horz" lIns="91440" tIns="45720" rIns="91440" bIns="45720" rtlCol="0">
+            <a:normAutofit/>
+          </a:bodyPr>
+          <a:lstStyle>
+            <a:lvl1pPr marL="228600" indent="-228600" algn="l" defTabSz="914400" rtl="0" eaLnBrk="1" latinLnBrk="0" hangingPunct="1">
+              <a:lnSpc>
+                <a:spcPct val="90000"/>
+              </a:lnSpc>
+              <a:spcBef>
+                <a:spcPts val="1000"/>
+              </a:spcBef>
+              <a:buFont typeface="Arial" panose="020B0604020202020204" pitchFamily="34" charset="0"/>
+              <a:buChar char="•"/>
+              <a:defRPr sz="2800" kern="1200">
+                <a:solidFill>
+                  <a:schemeClr val="tx1"/>
+                </a:solidFill>
+                <a:latin typeface="+mn-lt"/>
+                <a:ea typeface="+mn-ea"/>
+                <a:cs typeface="+mn-cs"/>
+              </a:defRPr>
+            </a:lvl1pPr>
+            <a:lvl2pPr marL="685800" indent="-228600" algn="l" defTabSz="914400" rtl="0" eaLnBrk="1" latinLnBrk="0" hangingPunct="1">
+              <a:lnSpc>
+                <a:spcPct val="90000"/>
+              </a:lnSpc>
+              <a:spcBef>
+                <a:spcPts val="500"/>
+              </a:spcBef>
+              <a:buFont typeface="Arial" panose="020B0604020202020204" pitchFamily="34" charset="0"/>
+              <a:buChar char="•"/>
+              <a:defRPr sz="2400" kern="1200">
+                <a:solidFill>
+                  <a:schemeClr val="tx1"/>
+                </a:solidFill>
+                <a:latin typeface="+mn-lt"/>
+                <a:ea typeface="+mn-ea"/>
+                <a:cs typeface="+mn-cs"/>
+              </a:defRPr>
+            </a:lvl2pPr>
+            <a:lvl3pPr marL="1143000" indent="-228600" algn="l" defTabSz="914400" rtl="0" eaLnBrk="1" latinLnBrk="0" hangingPunct="1">
+              <a:lnSpc>
+                <a:spcPct val="90000"/>
+              </a:lnSpc>
+              <a:spcBef>
+                <a:spcPts val="500"/>
+              </a:spcBef>
+              <a:buFont typeface="Arial" panose="020B0604020202020204" pitchFamily="34" charset="0"/>
+              <a:buChar char="•"/>
+              <a:defRPr sz="2000" kern="1200">
+                <a:solidFill>
+                  <a:schemeClr val="tx1"/>
+                </a:solidFill>
+                <a:latin typeface="+mn-lt"/>
+                <a:ea typeface="+mn-ea"/>
+                <a:cs typeface="+mn-cs"/>
+              </a:defRPr>
+            </a:lvl3pPr>
+            <a:lvl4pPr marL="1600200" indent="-228600" algn="l" defTabSz="914400" rtl="0" eaLnBrk="1" latinLnBrk="0" hangingPunct="1">
+              <a:lnSpc>
+                <a:spcPct val="90000"/>
+              </a:lnSpc>
+              <a:spcBef>
+                <a:spcPts val="500"/>
+              </a:spcBef>
+              <a:buFont typeface="Arial" panose="020B0604020202020204" pitchFamily="34" charset="0"/>
+              <a:buChar char="•"/>
+              <a:defRPr sz="1800" kern="1200">
+                <a:solidFill>
+                  <a:schemeClr val="tx1"/>
+                </a:solidFill>
+                <a:latin typeface="+mn-lt"/>
+                <a:ea typeface="+mn-ea"/>
+                <a:cs typeface="+mn-cs"/>
+              </a:defRPr>
+            </a:lvl4pPr>
+            <a:lvl5pPr marL="2057400" indent="-228600" algn="l" defTabSz="914400" rtl="0" eaLnBrk="1" latinLnBrk="0" hangingPunct="1">
+              <a:lnSpc>
+                <a:spcPct val="90000"/>
+              </a:lnSpc>
+              <a:spcBef>
+                <a:spcPts val="500"/>
+              </a:spcBef>
+              <a:buFont typeface="Arial" panose="020B0604020202020204" pitchFamily="34" charset="0"/>
+              <a:buChar char="•"/>
+              <a:defRPr sz="1800" kern="1200">
+                <a:solidFill>
+                  <a:schemeClr val="tx1"/>
+                </a:solidFill>
+                <a:latin typeface="+mn-lt"/>
+                <a:ea typeface="+mn-ea"/>
+                <a:cs typeface="+mn-cs"/>
+              </a:defRPr>
+            </a:lvl5pPr>
+            <a:lvl6pPr marL="2514600" indent="-228600" algn="l" defTabSz="914400" rtl="0" eaLnBrk="1" latinLnBrk="0" hangingPunct="1">
+              <a:lnSpc>
+                <a:spcPct val="90000"/>
+              </a:lnSpc>
+              <a:spcBef>
+                <a:spcPts val="500"/>
+              </a:spcBef>
+              <a:buFont typeface="Arial" panose="020B0604020202020204" pitchFamily="34" charset="0"/>
+              <a:buChar char="•"/>
+              <a:defRPr sz="1800" kern="1200">
+                <a:solidFill>
+                  <a:schemeClr val="tx1"/>
+                </a:solidFill>
+                <a:latin typeface="+mn-lt"/>
+                <a:ea typeface="+mn-ea"/>
+                <a:cs typeface="+mn-cs"/>
+              </a:defRPr>
+            </a:lvl6pPr>
+            <a:lvl7pPr marL="2971800" indent="-228600" algn="l" defTabSz="914400" rtl="0" eaLnBrk="1" latinLnBrk="0" hangingPunct="1">
+              <a:lnSpc>
+                <a:spcPct val="90000"/>
+              </a:lnSpc>
+              <a:spcBef>
+                <a:spcPts val="500"/>
+              </a:spcBef>
+              <a:buFont typeface="Arial" panose="020B0604020202020204" pitchFamily="34" charset="0"/>
+              <a:buChar char="•"/>
+              <a:defRPr sz="1800" kern="1200">
+                <a:solidFill>
+                  <a:schemeClr val="tx1"/>
+                </a:solidFill>
+                <a:latin typeface="+mn-lt"/>
+                <a:ea typeface="+mn-ea"/>
+                <a:cs typeface="+mn-cs"/>
+              </a:defRPr>
+            </a:lvl7pPr>
+            <a:lvl8pPr marL="3429000" indent="-228600" algn="l" defTabSz="914400" rtl="0" eaLnBrk="1" latinLnBrk="0" hangingPunct="1">
+              <a:lnSpc>
+                <a:spcPct val="90000"/>
+              </a:lnSpc>
+              <a:spcBef>
+                <a:spcPts val="500"/>
+              </a:spcBef>
+              <a:buFont typeface="Arial" panose="020B0604020202020204" pitchFamily="34" charset="0"/>
+              <a:buChar char="•"/>
+              <a:defRPr sz="1800" kern="1200">
+                <a:solidFill>
+                  <a:schemeClr val="tx1"/>
+                </a:solidFill>
+                <a:latin typeface="+mn-lt"/>
+                <a:ea typeface="+mn-ea"/>
+                <a:cs typeface="+mn-cs"/>
+              </a:defRPr>
+            </a:lvl8pPr>
+            <a:lvl9pPr marL="3886200" indent="-228600" algn="l" defTabSz="914400" rtl="0" eaLnBrk="1" latinLnBrk="0" hangingPunct="1">
+              <a:lnSpc>
+                <a:spcPct val="90000"/>
+              </a:lnSpc>
+              <a:spcBef>
+                <a:spcPts val="500"/>
+              </a:spcBef>
+              <a:buFont typeface="Arial" panose="020B0604020202020204" pitchFamily="34" charset="0"/>
+              <a:buChar char="•"/>
+              <a:defRPr sz="1800" kern="1200">
+                <a:solidFill>
+                  <a:schemeClr val="tx1"/>
+                </a:solidFill>
+                <a:latin typeface="+mn-lt"/>
+                <a:ea typeface="+mn-ea"/>
+                <a:cs typeface="+mn-cs"/>
+              </a:defRPr>
+            </a:lvl9pPr>
+          </a:lstStyle>
+          <a:p>
+            <a:r>
+              <a:rPr lang="en-AU" dirty="0"/>
+              <a:t>Run the things</a:t>
+            </a:r>
+          </a:p>
+        </p:txBody>
+      </p:sp>
+      <p:sp>
+        <p:nvSpPr>
+          <p:cNvPr id="13" name="Content Placeholder 2">
+            <a:extLst>
+              <a:ext uri="{FF2B5EF4-FFF2-40B4-BE49-F238E27FC236}">
+                <a16:creationId xmlns:a16="http://schemas.microsoft.com/office/drawing/2014/main" id="{14E4B71E-5219-7D0F-6F58-5B3B171EA550}"/>
+              </a:ext>
+            </a:extLst>
+          </p:cNvPr>
+          <p:cNvSpPr txBox="1">
+            <a:spLocks/>
+          </p:cNvSpPr>
+          <p:nvPr/>
+        </p:nvSpPr>
+        <p:spPr>
+          <a:xfrm>
+            <a:off x="6771939" y="3340455"/>
+            <a:ext cx="3959711" cy="616361"/>
+          </a:xfrm>
+          <a:prstGeom prst="rect">
+            <a:avLst/>
+          </a:prstGeom>
+        </p:spPr>
+        <p:txBody>
+          <a:bodyPr vert="horz" lIns="91440" tIns="45720" rIns="91440" bIns="45720" rtlCol="0">
+            <a:normAutofit/>
+          </a:bodyPr>
+          <a:lstStyle>
+            <a:lvl1pPr marL="228600" indent="-228600" algn="l" defTabSz="914400" rtl="0" eaLnBrk="1" latinLnBrk="0" hangingPunct="1">
+              <a:lnSpc>
+                <a:spcPct val="90000"/>
+              </a:lnSpc>
+              <a:spcBef>
+                <a:spcPts val="1000"/>
+              </a:spcBef>
+              <a:buFont typeface="Arial" panose="020B0604020202020204" pitchFamily="34" charset="0"/>
+              <a:buChar char="•"/>
+              <a:defRPr sz="2800" kern="1200">
+                <a:solidFill>
+                  <a:schemeClr val="tx1"/>
+                </a:solidFill>
+                <a:latin typeface="+mn-lt"/>
+                <a:ea typeface="+mn-ea"/>
+                <a:cs typeface="+mn-cs"/>
+              </a:defRPr>
+            </a:lvl1pPr>
+            <a:lvl2pPr marL="685800" indent="-228600" algn="l" defTabSz="914400" rtl="0" eaLnBrk="1" latinLnBrk="0" hangingPunct="1">
+              <a:lnSpc>
+                <a:spcPct val="90000"/>
+              </a:lnSpc>
+              <a:spcBef>
+                <a:spcPts val="500"/>
+              </a:spcBef>
+              <a:buFont typeface="Arial" panose="020B0604020202020204" pitchFamily="34" charset="0"/>
+              <a:buChar char="•"/>
+              <a:defRPr sz="2400" kern="1200">
+                <a:solidFill>
+                  <a:schemeClr val="tx1"/>
+                </a:solidFill>
+                <a:latin typeface="+mn-lt"/>
+                <a:ea typeface="+mn-ea"/>
+                <a:cs typeface="+mn-cs"/>
+              </a:defRPr>
+            </a:lvl2pPr>
+            <a:lvl3pPr marL="1143000" indent="-228600" algn="l" defTabSz="914400" rtl="0" eaLnBrk="1" latinLnBrk="0" hangingPunct="1">
+              <a:lnSpc>
+                <a:spcPct val="90000"/>
+              </a:lnSpc>
+              <a:spcBef>
+                <a:spcPts val="500"/>
+              </a:spcBef>
+              <a:buFont typeface="Arial" panose="020B0604020202020204" pitchFamily="34" charset="0"/>
+              <a:buChar char="•"/>
+              <a:defRPr sz="2000" kern="1200">
+                <a:solidFill>
+                  <a:schemeClr val="tx1"/>
+                </a:solidFill>
+                <a:latin typeface="+mn-lt"/>
+                <a:ea typeface="+mn-ea"/>
+                <a:cs typeface="+mn-cs"/>
+              </a:defRPr>
+            </a:lvl3pPr>
+            <a:lvl4pPr marL="1600200" indent="-228600" algn="l" defTabSz="914400" rtl="0" eaLnBrk="1" latinLnBrk="0" hangingPunct="1">
+              <a:lnSpc>
+                <a:spcPct val="90000"/>
+              </a:lnSpc>
+              <a:spcBef>
+                <a:spcPts val="500"/>
+              </a:spcBef>
+              <a:buFont typeface="Arial" panose="020B0604020202020204" pitchFamily="34" charset="0"/>
+              <a:buChar char="•"/>
+              <a:defRPr sz="1800" kern="1200">
+                <a:solidFill>
+                  <a:schemeClr val="tx1"/>
+                </a:solidFill>
+                <a:latin typeface="+mn-lt"/>
+                <a:ea typeface="+mn-ea"/>
+                <a:cs typeface="+mn-cs"/>
+              </a:defRPr>
+            </a:lvl4pPr>
+            <a:lvl5pPr marL="2057400" indent="-228600" algn="l" defTabSz="914400" rtl="0" eaLnBrk="1" latinLnBrk="0" hangingPunct="1">
+              <a:lnSpc>
+                <a:spcPct val="90000"/>
+              </a:lnSpc>
+              <a:spcBef>
+                <a:spcPts val="500"/>
+              </a:spcBef>
+              <a:buFont typeface="Arial" panose="020B0604020202020204" pitchFamily="34" charset="0"/>
+              <a:buChar char="•"/>
+              <a:defRPr sz="1800" kern="1200">
+                <a:solidFill>
+                  <a:schemeClr val="tx1"/>
+                </a:solidFill>
+                <a:latin typeface="+mn-lt"/>
+                <a:ea typeface="+mn-ea"/>
+                <a:cs typeface="+mn-cs"/>
+              </a:defRPr>
+            </a:lvl5pPr>
+            <a:lvl6pPr marL="2514600" indent="-228600" algn="l" defTabSz="914400" rtl="0" eaLnBrk="1" latinLnBrk="0" hangingPunct="1">
+              <a:lnSpc>
+                <a:spcPct val="90000"/>
+              </a:lnSpc>
+              <a:spcBef>
+                <a:spcPts val="500"/>
+              </a:spcBef>
+              <a:buFont typeface="Arial" panose="020B0604020202020204" pitchFamily="34" charset="0"/>
+              <a:buChar char="•"/>
+              <a:defRPr sz="1800" kern="1200">
+                <a:solidFill>
+                  <a:schemeClr val="tx1"/>
+                </a:solidFill>
+                <a:latin typeface="+mn-lt"/>
+                <a:ea typeface="+mn-ea"/>
+                <a:cs typeface="+mn-cs"/>
+              </a:defRPr>
+            </a:lvl6pPr>
+            <a:lvl7pPr marL="2971800" indent="-228600" algn="l" defTabSz="914400" rtl="0" eaLnBrk="1" latinLnBrk="0" hangingPunct="1">
+              <a:lnSpc>
+                <a:spcPct val="90000"/>
+              </a:lnSpc>
+              <a:spcBef>
+                <a:spcPts val="500"/>
+              </a:spcBef>
+              <a:buFont typeface="Arial" panose="020B0604020202020204" pitchFamily="34" charset="0"/>
+              <a:buChar char="•"/>
+              <a:defRPr sz="1800" kern="1200">
+                <a:solidFill>
+                  <a:schemeClr val="tx1"/>
+                </a:solidFill>
+                <a:latin typeface="+mn-lt"/>
+                <a:ea typeface="+mn-ea"/>
+                <a:cs typeface="+mn-cs"/>
+              </a:defRPr>
+            </a:lvl7pPr>
+            <a:lvl8pPr marL="3429000" indent="-228600" algn="l" defTabSz="914400" rtl="0" eaLnBrk="1" latinLnBrk="0" hangingPunct="1">
+              <a:lnSpc>
+                <a:spcPct val="90000"/>
+              </a:lnSpc>
+              <a:spcBef>
+                <a:spcPts val="500"/>
+              </a:spcBef>
+              <a:buFont typeface="Arial" panose="020B0604020202020204" pitchFamily="34" charset="0"/>
+              <a:buChar char="•"/>
+              <a:defRPr sz="1800" kern="1200">
+                <a:solidFill>
+                  <a:schemeClr val="tx1"/>
+                </a:solidFill>
+                <a:latin typeface="+mn-lt"/>
+                <a:ea typeface="+mn-ea"/>
+                <a:cs typeface="+mn-cs"/>
+              </a:defRPr>
+            </a:lvl8pPr>
+            <a:lvl9pPr marL="3886200" indent="-228600" algn="l" defTabSz="914400" rtl="0" eaLnBrk="1" latinLnBrk="0" hangingPunct="1">
+              <a:lnSpc>
+                <a:spcPct val="90000"/>
+              </a:lnSpc>
+              <a:spcBef>
+                <a:spcPts val="500"/>
+              </a:spcBef>
+              <a:buFont typeface="Arial" panose="020B0604020202020204" pitchFamily="34" charset="0"/>
+              <a:buChar char="•"/>
+              <a:defRPr sz="1800" kern="1200">
+                <a:solidFill>
+                  <a:schemeClr val="tx1"/>
+                </a:solidFill>
+                <a:latin typeface="+mn-lt"/>
+                <a:ea typeface="+mn-ea"/>
+                <a:cs typeface="+mn-cs"/>
+              </a:defRPr>
+            </a:lvl9pPr>
+          </a:lstStyle>
+          <a:p>
+            <a:r>
+              <a:rPr lang="en-AU" dirty="0"/>
+              <a:t>Debug the things</a:t>
+            </a:r>
+          </a:p>
+        </p:txBody>
+      </p:sp>
+    </p:spTree>
+    <p:extLst>
+      <p:ext uri="{BB962C8B-B14F-4D97-AF65-F5344CB8AC3E}">
+        <p14:creationId xmlns:p14="http://schemas.microsoft.com/office/powerpoint/2010/main" val="2714788919"/>
+      </p:ext>
+    </p:extLst>
+  </p:cSld>
+  <p:clrMapOvr>
+    <a:masterClrMapping/>
+  </p:clrMapOvr>
+</p:sld>
+</file>
+
+<file path=ppt/slides/slide4.xml><?xml version="1.0" encoding="utf-8"?>
+<p:sld xmlns:a="http://schemas.openxmlformats.org/drawingml/2006/main" xmlns:r="http://schemas.openxmlformats.org/officeDocument/2006/relationships" xmlns:p="http://schemas.openxmlformats.org/presentationml/2006/main">
+  <p:cSld>
+    <p:bg>
+      <p:bgPr>
+        <a:blipFill dpi="0" rotWithShape="1">
+          <a:blip r:embed="rId3">
+            <a:duotone>
+              <a:prstClr val="black"/>
+              <a:schemeClr val="accent2">
+                <a:tint val="45000"/>
+                <a:satMod val="400000"/>
+              </a:schemeClr>
+            </a:duotone>
+            <a:extLst>
+              <a:ext uri="{BEBA8EAE-BF5A-486C-A8C5-ECC9F3942E4B}">
+                <a14:imgProps xmlns:a14="http://schemas.microsoft.com/office/drawing/2010/main">
+                  <a14:imgLayer r:embed="rId4">
+                    <a14:imgEffect>
+                      <a14:artisticBlur radius="13"/>
+                    </a14:imgEffect>
+                    <a14:imgEffect>
+                      <a14:brightnessContrast bright="-64000"/>
+                    </a14:imgEffect>
+                  </a14:imgLayer>
+                </a14:imgProps>
+              </a:ext>
+            </a:extLst>
+          </a:blip>
+          <a:srcRect/>
+          <a:stretch>
+            <a:fillRect/>
+          </a:stretch>
+        </a:blipFill>
+        <a:effectLst/>
+      </p:bgPr>
+    </p:bg>
+    <p:spTree>
+      <p:nvGrpSpPr>
+        <p:cNvPr id="1" name="">
+          <a:extLst>
+            <a:ext uri="{FF2B5EF4-FFF2-40B4-BE49-F238E27FC236}">
+              <a16:creationId xmlns:a16="http://schemas.microsoft.com/office/drawing/2014/main" id="{F3979EEE-BCE9-1F2A-A14B-041828C3FD8D}"/>
+            </a:ext>
+          </a:extLst>
+        </p:cNvPr>
+        <p:cNvGrpSpPr/>
+        <p:nvPr/>
+      </p:nvGrpSpPr>
+      <p:grpSpPr>
+        <a:xfrm>
+          <a:off x="0" y="0"/>
+          <a:ext cx="0" cy="0"/>
+          <a:chOff x="0" y="0"/>
+          <a:chExt cx="0" cy="0"/>
+        </a:xfrm>
+      </p:grpSpPr>
+      <p:sp>
+        <p:nvSpPr>
+          <p:cNvPr id="2" name="Title 1">
+            <a:extLst>
+              <a:ext uri="{FF2B5EF4-FFF2-40B4-BE49-F238E27FC236}">
+                <a16:creationId xmlns:a16="http://schemas.microsoft.com/office/drawing/2014/main" id="{3A1B1142-542A-B4FE-7CE5-0880E83B6AF6}"/>
+              </a:ext>
+            </a:extLst>
+          </p:cNvPr>
+          <p:cNvSpPr>
+            <a:spLocks noGrp="1"/>
+          </p:cNvSpPr>
+          <p:nvPr>
+            <p:ph type="title"/>
+          </p:nvPr>
+        </p:nvSpPr>
+        <p:spPr/>
+        <p:txBody>
+          <a:bodyPr/>
+          <a:lstStyle/>
+          <a:p>
+            <a:r>
+              <a:rPr lang="en-AU" dirty="0"/>
+              <a:t>Some brownfields onboarding tropes</a:t>
+            </a:r>
+          </a:p>
+        </p:txBody>
+      </p:sp>
+      <p:sp>
+        <p:nvSpPr>
+          <p:cNvPr id="3" name="Content Placeholder 2">
+            <a:extLst>
+              <a:ext uri="{FF2B5EF4-FFF2-40B4-BE49-F238E27FC236}">
+                <a16:creationId xmlns:a16="http://schemas.microsoft.com/office/drawing/2014/main" id="{8BF569EE-2DF4-955B-7BFB-36065D838086}"/>
+              </a:ext>
+            </a:extLst>
+          </p:cNvPr>
+          <p:cNvSpPr>
+            <a:spLocks noGrp="1"/>
+          </p:cNvSpPr>
+          <p:nvPr>
+            <p:ph idx="1"/>
+          </p:nvPr>
+        </p:nvSpPr>
+        <p:spPr/>
+        <p:txBody>
+          <a:bodyPr/>
+          <a:lstStyle/>
+          <a:p>
+            <a:r>
+              <a:rPr lang="en-AU" dirty="0"/>
+              <a:t>Running </a:t>
+            </a:r>
+            <a:r>
+              <a:rPr lang="en-AU" dirty="0" err="1"/>
+              <a:t>api</a:t>
+            </a:r>
+            <a:r>
+              <a:rPr lang="en-AU" dirty="0"/>
+              <a:t> and </a:t>
+            </a:r>
+            <a:r>
+              <a:rPr lang="en-AU" dirty="0" err="1"/>
+              <a:t>ui</a:t>
+            </a:r>
+            <a:r>
+              <a:rPr lang="en-AU" dirty="0"/>
+              <a:t> separately?</a:t>
+            </a:r>
+          </a:p>
+          <a:p>
+            <a:r>
+              <a:rPr lang="en-AU" dirty="0"/>
+              <a:t>Manual overriding shared vars like connection strings</a:t>
+            </a:r>
+          </a:p>
+          <a:p>
+            <a:r>
+              <a:rPr lang="en-AU" dirty="0"/>
+              <a:t>How to create/seed database?</a:t>
+            </a:r>
+          </a:p>
+          <a:p>
+            <a:r>
+              <a:rPr lang="en-AU" dirty="0"/>
+              <a:t>What projects need to be run when?</a:t>
+            </a:r>
+          </a:p>
+          <a:p>
+            <a:r>
+              <a:rPr lang="en-AU" dirty="0"/>
+              <a:t>How to run just one out of 50 functions in Azure function?</a:t>
+            </a:r>
+          </a:p>
+        </p:txBody>
+      </p:sp>
+    </p:spTree>
+    <p:extLst>
+      <p:ext uri="{BB962C8B-B14F-4D97-AF65-F5344CB8AC3E}">
+        <p14:creationId xmlns:p14="http://schemas.microsoft.com/office/powerpoint/2010/main" val="673554225"/>
+      </p:ext>
+    </p:extLst>
+  </p:cSld>
+  <p:clrMapOvr>
+    <a:masterClrMapping/>
+  </p:clrMapOvr>
+</p:sld>
+</file>
+
+<file path=ppt/slides/slide5.xml><?xml version="1.0" encoding="utf-8"?>
+<p:sld xmlns:a="http://schemas.openxmlformats.org/drawingml/2006/main" xmlns:r="http://schemas.openxmlformats.org/officeDocument/2006/relationships" xmlns:p="http://schemas.openxmlformats.org/presentationml/2006/main">
+  <p:cSld>
+    <p:spTree>
+      <p:nvGrpSpPr>
+        <p:cNvPr id="1" name=""/>
+        <p:cNvGrpSpPr/>
+        <p:nvPr/>
+      </p:nvGrpSpPr>
+      <p:grpSpPr>
+        <a:xfrm>
+          <a:off x="0" y="0"/>
+          <a:ext cx="0" cy="0"/>
+          <a:chOff x="0" y="0"/>
+          <a:chExt cx="0" cy="0"/>
+        </a:xfrm>
+      </p:grpSpPr>
+      <p:sp>
+        <p:nvSpPr>
+          <p:cNvPr id="2" name="Title 1">
+            <a:extLst>
+              <a:ext uri="{FF2B5EF4-FFF2-40B4-BE49-F238E27FC236}">
+                <a16:creationId xmlns:a16="http://schemas.microsoft.com/office/drawing/2014/main" id="{14DAA1F9-8018-7FB0-55E1-BD0E60FC5A7A}"/>
+              </a:ext>
+            </a:extLst>
+          </p:cNvPr>
+          <p:cNvSpPr>
+            <a:spLocks noGrp="1"/>
+          </p:cNvSpPr>
+          <p:nvPr>
+            <p:ph type="title"/>
+          </p:nvPr>
+        </p:nvSpPr>
+        <p:spPr/>
+        <p:txBody>
+          <a:bodyPr/>
+          <a:lstStyle/>
+          <a:p>
+            <a:r>
+              <a:rPr lang="en-AU" dirty="0"/>
+              <a:t>Fixing all that with Aspire!</a:t>
+            </a:r>
+          </a:p>
+        </p:txBody>
+      </p:sp>
+      <p:sp>
+        <p:nvSpPr>
+          <p:cNvPr id="4" name="Content Placeholder 2">
+            <a:extLst>
+              <a:ext uri="{FF2B5EF4-FFF2-40B4-BE49-F238E27FC236}">
+                <a16:creationId xmlns:a16="http://schemas.microsoft.com/office/drawing/2014/main" id="{5B0E7055-3264-2DA9-D118-4736A1EC4196}"/>
+              </a:ext>
+            </a:extLst>
+          </p:cNvPr>
+          <p:cNvSpPr>
+            <a:spLocks noGrp="1"/>
+          </p:cNvSpPr>
+          <p:nvPr>
+            <p:ph idx="1"/>
+          </p:nvPr>
+        </p:nvSpPr>
+        <p:spPr/>
+        <p:txBody>
+          <a:bodyPr>
+            <a:normAutofit/>
+          </a:bodyPr>
+          <a:lstStyle/>
+          <a:p>
+            <a:r>
+              <a:rPr lang="en-AU" sz="2400" dirty="0"/>
+              <a:t>Running </a:t>
+            </a:r>
+            <a:r>
+              <a:rPr lang="en-AU" sz="2400" dirty="0" err="1"/>
+              <a:t>api</a:t>
+            </a:r>
+            <a:r>
+              <a:rPr lang="en-AU" sz="2400" dirty="0"/>
+              <a:t> and </a:t>
+            </a:r>
+            <a:r>
+              <a:rPr lang="en-AU" sz="2400" dirty="0" err="1"/>
+              <a:t>ui</a:t>
+            </a:r>
+            <a:r>
+              <a:rPr lang="en-AU" sz="2400" dirty="0"/>
+              <a:t> separately</a:t>
+            </a:r>
+          </a:p>
+          <a:p>
+            <a:pPr lvl="1"/>
+            <a:r>
+              <a:rPr lang="en-AU" sz="2000" dirty="0"/>
+              <a:t>Not really Aspire related, but can streamline</a:t>
+            </a:r>
+          </a:p>
+          <a:p>
+            <a:r>
+              <a:rPr lang="en-AU" sz="2400" dirty="0"/>
+              <a:t>Overriding shared vars like connection strings</a:t>
+            </a:r>
+          </a:p>
+          <a:p>
+            <a:pPr lvl="1"/>
+            <a:r>
+              <a:rPr lang="en-AU" sz="2000" dirty="0"/>
+              <a:t>Configure with user secrets, override in all child apps</a:t>
+            </a:r>
+          </a:p>
+          <a:p>
+            <a:r>
+              <a:rPr lang="en-AU" sz="2400" dirty="0"/>
+              <a:t>How to create/seed database?</a:t>
+            </a:r>
+          </a:p>
+          <a:p>
+            <a:pPr lvl="1"/>
+            <a:r>
+              <a:rPr lang="en-AU" sz="2000" dirty="0"/>
+              <a:t>Make a button!</a:t>
+            </a:r>
+          </a:p>
+          <a:p>
+            <a:r>
+              <a:rPr lang="en-AU" sz="2400" dirty="0"/>
+              <a:t>What projects need to be run when?</a:t>
+            </a:r>
+          </a:p>
+          <a:p>
+            <a:pPr lvl="1"/>
+            <a:r>
+              <a:rPr lang="en-AU" sz="2000" dirty="0"/>
+              <a:t>Grouped projects to run and make one button to run them</a:t>
+            </a:r>
+          </a:p>
+          <a:p>
+            <a:r>
+              <a:rPr lang="en-AU" sz="2400" dirty="0"/>
+              <a:t>How to run just one out of 50 functions in Azure function?</a:t>
+            </a:r>
+          </a:p>
+          <a:p>
+            <a:pPr lvl="1"/>
+            <a:r>
+              <a:rPr lang="en-AU" sz="2000" dirty="0"/>
+              <a:t>Have a picker!</a:t>
+            </a:r>
+          </a:p>
+        </p:txBody>
+      </p:sp>
+    </p:spTree>
+    <p:extLst>
+      <p:ext uri="{BB962C8B-B14F-4D97-AF65-F5344CB8AC3E}">
+        <p14:creationId xmlns:p14="http://schemas.microsoft.com/office/powerpoint/2010/main" val="4003740363"/>
+      </p:ext>
+    </p:extLst>
+  </p:cSld>
+  <p:clrMapOvr>
+    <a:masterClrMapping/>
+  </p:clrMapOvr>
+</p:sld>
+</file>
+
+<file path=ppt/slides/slide6.xml><?xml version="1.0" encoding="utf-8"?>
+<p:sld xmlns:a="http://schemas.openxmlformats.org/drawingml/2006/main" xmlns:r="http://schemas.openxmlformats.org/officeDocument/2006/relationships" xmlns:p="http://schemas.openxmlformats.org/presentationml/2006/main">
+  <p:cSld>
+    <p:spTree>
+      <p:nvGrpSpPr>
+        <p:cNvPr id="1" name=""/>
+        <p:cNvGrpSpPr/>
+        <p:nvPr/>
+      </p:nvGrpSpPr>
+      <p:grpSpPr>
+        <a:xfrm>
+          <a:off x="0" y="0"/>
+          <a:ext cx="0" cy="0"/>
+          <a:chOff x="0" y="0"/>
+          <a:chExt cx="0" cy="0"/>
+        </a:xfrm>
+      </p:grpSpPr>
+      <p:sp>
+        <p:nvSpPr>
+          <p:cNvPr id="2" name="Title 1">
+            <a:extLst>
+              <a:ext uri="{FF2B5EF4-FFF2-40B4-BE49-F238E27FC236}">
+                <a16:creationId xmlns:a16="http://schemas.microsoft.com/office/drawing/2014/main" id="{93378072-A642-34B7-3905-D2CA9CF357CD}"/>
+              </a:ext>
+            </a:extLst>
+          </p:cNvPr>
+          <p:cNvSpPr>
+            <a:spLocks noGrp="1"/>
+          </p:cNvSpPr>
+          <p:nvPr>
+            <p:ph type="title"/>
+          </p:nvPr>
+        </p:nvSpPr>
+        <p:spPr/>
+        <p:txBody>
+          <a:bodyPr/>
+          <a:lstStyle/>
+          <a:p>
+            <a:r>
+              <a:rPr lang="en-AU" dirty="0"/>
+              <a:t>And </a:t>
+            </a:r>
+            <a:r>
+              <a:rPr lang="en-AU" dirty="0" err="1"/>
+              <a:t>moar</a:t>
+            </a:r>
+            <a:r>
+              <a:rPr lang="en-AU" dirty="0"/>
+              <a:t>!</a:t>
+            </a:r>
+          </a:p>
+        </p:txBody>
+      </p:sp>
+      <p:sp>
+        <p:nvSpPr>
+          <p:cNvPr id="3" name="Content Placeholder 2">
+            <a:extLst>
+              <a:ext uri="{FF2B5EF4-FFF2-40B4-BE49-F238E27FC236}">
+                <a16:creationId xmlns:a16="http://schemas.microsoft.com/office/drawing/2014/main" id="{F18016DF-0E81-719E-1C82-247F343DFB0F}"/>
+              </a:ext>
+            </a:extLst>
+          </p:cNvPr>
+          <p:cNvSpPr>
+            <a:spLocks noGrp="1"/>
+          </p:cNvSpPr>
+          <p:nvPr>
+            <p:ph idx="1"/>
+          </p:nvPr>
+        </p:nvSpPr>
+        <p:spPr/>
+        <p:txBody>
+          <a:bodyPr>
+            <a:normAutofit/>
+          </a:bodyPr>
+          <a:lstStyle/>
+          <a:p>
+            <a:r>
+              <a:rPr lang="en-AU" dirty="0"/>
+              <a:t>Automatic OTEL</a:t>
+            </a:r>
+          </a:p>
+          <a:p>
+            <a:pPr lvl="1"/>
+            <a:r>
+              <a:rPr lang="en-AU" dirty="0"/>
+              <a:t>Metrics</a:t>
+            </a:r>
+          </a:p>
+          <a:p>
+            <a:pPr lvl="1"/>
+            <a:r>
+              <a:rPr lang="en-AU" dirty="0"/>
+              <a:t>Logs</a:t>
+            </a:r>
+          </a:p>
+          <a:p>
+            <a:pPr lvl="1"/>
+            <a:r>
+              <a:rPr lang="en-AU" dirty="0"/>
+              <a:t>Traces</a:t>
+            </a:r>
+          </a:p>
+          <a:p>
+            <a:r>
+              <a:rPr lang="en-AU" dirty="0"/>
+              <a:t>“Infra” graph</a:t>
+            </a:r>
+          </a:p>
+          <a:p>
+            <a:pPr lvl="1"/>
+            <a:r>
+              <a:rPr lang="en-AU" dirty="0"/>
+              <a:t>What more could you want!</a:t>
+            </a:r>
+          </a:p>
+          <a:p>
+            <a:r>
+              <a:rPr lang="en-AU" dirty="0"/>
+              <a:t>Config management</a:t>
+            </a:r>
+          </a:p>
+          <a:p>
+            <a:r>
+              <a:rPr lang="en-AU" dirty="0"/>
+              <a:t>Infra export</a:t>
+            </a:r>
+          </a:p>
+        </p:txBody>
+      </p:sp>
+    </p:spTree>
+    <p:extLst>
+      <p:ext uri="{BB962C8B-B14F-4D97-AF65-F5344CB8AC3E}">
+        <p14:creationId xmlns:p14="http://schemas.microsoft.com/office/powerpoint/2010/main" val="1331963624"/>
+      </p:ext>
+    </p:extLst>
+  </p:cSld>
+  <p:clrMapOvr>
+    <a:masterClrMapping/>
+  </p:clrMapOvr>
+</p:sld>
+</file>
+
+<file path=ppt/slides/slide7.xml><?xml version="1.0" encoding="utf-8"?>
+<p:sld xmlns:a="http://schemas.openxmlformats.org/drawingml/2006/main" xmlns:r="http://schemas.openxmlformats.org/officeDocument/2006/relationships" xmlns:p="http://schemas.openxmlformats.org/presentationml/2006/main">
+  <p:cSld>
+    <p:spTree>
+      <p:nvGrpSpPr>
+        <p:cNvPr id="1" name=""/>
+        <p:cNvGrpSpPr/>
+        <p:nvPr/>
+      </p:nvGrpSpPr>
+      <p:grpSpPr>
+        <a:xfrm>
+          <a:off x="0" y="0"/>
+          <a:ext cx="0" cy="0"/>
+          <a:chOff x="0" y="0"/>
+          <a:chExt cx="0" cy="0"/>
+        </a:xfrm>
+      </p:grpSpPr>
+      <p:sp>
+        <p:nvSpPr>
+          <p:cNvPr id="2" name="Title 1">
+            <a:extLst>
+              <a:ext uri="{FF2B5EF4-FFF2-40B4-BE49-F238E27FC236}">
+                <a16:creationId xmlns:a16="http://schemas.microsoft.com/office/drawing/2014/main" id="{62A4C736-0F43-0A6D-051B-032B2C81015A}"/>
+              </a:ext>
+            </a:extLst>
+          </p:cNvPr>
+          <p:cNvSpPr>
+            <a:spLocks noGrp="1"/>
+          </p:cNvSpPr>
+          <p:nvPr>
+            <p:ph type="title"/>
+          </p:nvPr>
+        </p:nvSpPr>
+        <p:spPr/>
+        <p:txBody>
+          <a:bodyPr/>
+          <a:lstStyle/>
+          <a:p>
+            <a:r>
+              <a:rPr lang="en-AU" dirty="0"/>
+              <a:t>Hold up, what actually is this Aspire thing?</a:t>
+            </a:r>
+          </a:p>
+        </p:txBody>
+      </p:sp>
+      <p:sp>
+        <p:nvSpPr>
+          <p:cNvPr id="3" name="Content Placeholder 2">
+            <a:extLst>
+              <a:ext uri="{FF2B5EF4-FFF2-40B4-BE49-F238E27FC236}">
+                <a16:creationId xmlns:a16="http://schemas.microsoft.com/office/drawing/2014/main" id="{1B28BCAE-23B5-BF22-DAC5-2795093A2C12}"/>
+              </a:ext>
+            </a:extLst>
+          </p:cNvPr>
+          <p:cNvSpPr>
+            <a:spLocks noGrp="1"/>
+          </p:cNvSpPr>
+          <p:nvPr>
+            <p:ph idx="1"/>
+          </p:nvPr>
+        </p:nvSpPr>
+        <p:spPr/>
+        <p:txBody>
+          <a:bodyPr/>
+          <a:lstStyle/>
+          <a:p>
+            <a:endParaRPr lang="en-AU" dirty="0"/>
+          </a:p>
+        </p:txBody>
+      </p:sp>
+    </p:spTree>
+    <p:extLst>
+      <p:ext uri="{BB962C8B-B14F-4D97-AF65-F5344CB8AC3E}">
+        <p14:creationId xmlns:p14="http://schemas.microsoft.com/office/powerpoint/2010/main" val="2487767406"/>
+      </p:ext>
+    </p:extLst>
+  </p:cSld>
+  <p:clrMapOvr>
+    <a:masterClrMapping/>
+  </p:clrMapOvr>
+</p:sld>
+</file>
+
+<file path=ppt/slides/slide8.xml><?xml version="1.0" encoding="utf-8"?>
+<p:sld xmlns:a="http://schemas.openxmlformats.org/drawingml/2006/main" xmlns:r="http://schemas.openxmlformats.org/officeDocument/2006/relationships" xmlns:p="http://schemas.openxmlformats.org/presentationml/2006/main">
+  <p:cSld>
+    <p:spTree>
+      <p:nvGrpSpPr>
+        <p:cNvPr id="1" name="">
+          <a:extLst>
+            <a:ext uri="{FF2B5EF4-FFF2-40B4-BE49-F238E27FC236}">
+              <a16:creationId xmlns:a16="http://schemas.microsoft.com/office/drawing/2014/main" id="{3DB2D0EB-B21C-5A49-E1DF-8085AB15FE25}"/>
+            </a:ext>
+          </a:extLst>
+        </p:cNvPr>
+        <p:cNvGrpSpPr/>
+        <p:nvPr/>
+      </p:nvGrpSpPr>
+      <p:grpSpPr>
+        <a:xfrm>
+          <a:off x="0" y="0"/>
+          <a:ext cx="0" cy="0"/>
+          <a:chOff x="0" y="0"/>
+          <a:chExt cx="0" cy="0"/>
+        </a:xfrm>
+      </p:grpSpPr>
+      <p:sp>
+        <p:nvSpPr>
+          <p:cNvPr id="2" name="Title 1">
+            <a:extLst>
+              <a:ext uri="{FF2B5EF4-FFF2-40B4-BE49-F238E27FC236}">
+                <a16:creationId xmlns:a16="http://schemas.microsoft.com/office/drawing/2014/main" id="{5F4DF2CC-5685-E47D-A99F-387EA1DAB9D3}"/>
+              </a:ext>
+            </a:extLst>
+          </p:cNvPr>
+          <p:cNvSpPr>
+            <a:spLocks noGrp="1"/>
+          </p:cNvSpPr>
+          <p:nvPr>
+            <p:ph type="title"/>
+          </p:nvPr>
+        </p:nvSpPr>
+        <p:spPr/>
+        <p:txBody>
+          <a:bodyPr/>
+          <a:lstStyle/>
+          <a:p>
+            <a:r>
+              <a:rPr lang="en-AU" dirty="0"/>
+              <a:t>Demo setup</a:t>
+            </a:r>
+          </a:p>
+        </p:txBody>
+      </p:sp>
+      <p:sp>
+        <p:nvSpPr>
+          <p:cNvPr id="3" name="Content Placeholder 2">
+            <a:extLst>
+              <a:ext uri="{FF2B5EF4-FFF2-40B4-BE49-F238E27FC236}">
+                <a16:creationId xmlns:a16="http://schemas.microsoft.com/office/drawing/2014/main" id="{D7C13343-8E78-A466-5F7E-645FA8A58DE2}"/>
+              </a:ext>
+            </a:extLst>
+          </p:cNvPr>
+          <p:cNvSpPr>
+            <a:spLocks noGrp="1"/>
+          </p:cNvSpPr>
+          <p:nvPr>
+            <p:ph idx="1"/>
+          </p:nvPr>
+        </p:nvSpPr>
+        <p:spPr/>
+        <p:txBody>
+          <a:bodyPr>
+            <a:normAutofit/>
+          </a:bodyPr>
+          <a:lstStyle/>
+          <a:p>
+            <a:r>
+              <a:rPr lang="en-AU" dirty="0"/>
+              <a:t>Several </a:t>
+            </a:r>
+            <a:r>
+              <a:rPr lang="en-AU" dirty="0" err="1"/>
+              <a:t>aspnetcore</a:t>
+            </a:r>
+            <a:r>
+              <a:rPr lang="en-AU" dirty="0"/>
+              <a:t> apps</a:t>
+            </a:r>
+          </a:p>
+          <a:p>
+            <a:r>
+              <a:rPr lang="en-AU" dirty="0"/>
+              <a:t>React UIs</a:t>
+            </a:r>
+          </a:p>
+          <a:p>
+            <a:r>
+              <a:rPr lang="en-AU" dirty="0"/>
+              <a:t>Azure function for funsies</a:t>
+            </a:r>
+          </a:p>
+          <a:p>
+            <a:r>
+              <a:rPr lang="en-AU" dirty="0"/>
+              <a:t>SQL server database and Postgres DB</a:t>
+            </a:r>
+          </a:p>
+          <a:p>
+            <a:r>
+              <a:rPr lang="en-AU" dirty="0"/>
+              <a:t>Seq (could be any others OR even none)</a:t>
+            </a:r>
+          </a:p>
+          <a:p>
+            <a:r>
+              <a:rPr lang="en-AU" dirty="0"/>
+              <a:t>Database managers (pg4admin, SQL???)</a:t>
+            </a:r>
+          </a:p>
+          <a:p>
+            <a:r>
+              <a:rPr lang="en-AU" dirty="0"/>
+              <a:t>User Secrets for local overrides</a:t>
+            </a:r>
+          </a:p>
+        </p:txBody>
+      </p:sp>
+    </p:spTree>
+    <p:extLst>
+      <p:ext uri="{BB962C8B-B14F-4D97-AF65-F5344CB8AC3E}">
+        <p14:creationId xmlns:p14="http://schemas.microsoft.com/office/powerpoint/2010/main" val="446273543"/>
+      </p:ext>
+    </p:extLst>
+  </p:cSld>
+  <p:clrMapOvr>
+    <a:masterClrMapping/>
+  </p:clrMapOvr>
+</p:sld>
+</file>
+
+<file path=ppt/slides/slide9.xml><?xml version="1.0" encoding="utf-8"?>
+<p:sld xmlns:a="http://schemas.openxmlformats.org/drawingml/2006/main" xmlns:r="http://schemas.openxmlformats.org/officeDocument/2006/relationships" xmlns:p="http://schemas.openxmlformats.org/presentationml/2006/main">
+  <p:cSld>
+    <p:spTree>
+      <p:nvGrpSpPr>
+        <p:cNvPr id="1" name=""/>
+        <p:cNvGrpSpPr/>
+        <p:nvPr/>
+      </p:nvGrpSpPr>
+      <p:grpSpPr>
+        <a:xfrm>
+          <a:off x="0" y="0"/>
+          <a:ext cx="0" cy="0"/>
+          <a:chOff x="0" y="0"/>
+          <a:chExt cx="0" cy="0"/>
+        </a:xfrm>
+      </p:grpSpPr>
+      <p:sp>
+        <p:nvSpPr>
+          <p:cNvPr id="4" name="Title 3">
+            <a:extLst>
+              <a:ext uri="{FF2B5EF4-FFF2-40B4-BE49-F238E27FC236}">
+                <a16:creationId xmlns:a16="http://schemas.microsoft.com/office/drawing/2014/main" id="{3B714D8E-852A-F60C-0344-4C46397D7D8C}"/>
+              </a:ext>
+            </a:extLst>
+          </p:cNvPr>
+          <p:cNvSpPr>
+            <a:spLocks noGrp="1"/>
+          </p:cNvSpPr>
+          <p:nvPr>
+            <p:ph type="ctrTitle"/>
+          </p:nvPr>
+        </p:nvSpPr>
+        <p:spPr/>
+        <p:txBody>
+          <a:bodyPr/>
+          <a:lstStyle/>
+          <a:p>
+            <a:r>
+              <a:rPr lang="en-AU" dirty="0"/>
+              <a:t>DEMO</a:t>
+            </a:r>
+          </a:p>
+        </p:txBody>
+      </p:sp>
+      <p:sp>
+        <p:nvSpPr>
+          <p:cNvPr id="5" name="Subtitle 4">
+            <a:extLst>
+              <a:ext uri="{FF2B5EF4-FFF2-40B4-BE49-F238E27FC236}">
+                <a16:creationId xmlns:a16="http://schemas.microsoft.com/office/drawing/2014/main" id="{7D1ABCFF-B076-45DD-BA14-1E0F629DEDF0}"/>
+              </a:ext>
+            </a:extLst>
+          </p:cNvPr>
+          <p:cNvSpPr>
+            <a:spLocks noGrp="1"/>
+          </p:cNvSpPr>
+          <p:nvPr>
+            <p:ph type="subTitle" idx="1"/>
+          </p:nvPr>
+        </p:nvSpPr>
+        <p:spPr/>
+        <p:txBody>
+          <a:bodyPr/>
+          <a:lstStyle/>
+          <a:p>
+            <a:endParaRPr lang="en-AU"/>
+          </a:p>
+        </p:txBody>
+      </p:sp>
+    </p:spTree>
+    <p:extLst>
+      <p:ext uri="{BB962C8B-B14F-4D97-AF65-F5344CB8AC3E}">
+        <p14:creationId xmlns:p14="http://schemas.microsoft.com/office/powerpoint/2010/main" val="1495023163"/>
+      </p:ext>
+    </p:extLst>
+  </p:cSld>
+  <p:clrMapOvr>
+    <a:masterClrMapping/>
+  </p:clrMapOvr>
+</p:sld>
+</file>
+
 <file path=ppt/theme/theme1.xml><?xml version="1.0" encoding="utf-8"?>
+<a:theme xmlns:a="http://schemas.openxmlformats.org/drawingml/2006/main" name="Office Theme">
+  <a:themeElements>
+    <a:clrScheme name="Custom 1">
+      <a:dk1>
+        <a:srgbClr val="FFFFFF"/>
+      </a:dk1>
+      <a:lt1>
+        <a:sysClr val="window" lastClr="FFFFFF"/>
+      </a:lt1>
+      <a:dk2>
+        <a:srgbClr val="0E2841"/>
+      </a:dk2>
+      <a:lt2>
+        <a:srgbClr val="E8E8E8"/>
+      </a:lt2>
+      <a:accent1>
+        <a:srgbClr val="156082"/>
+      </a:accent1>
+      <a:accent2>
+        <a:srgbClr val="E97132"/>
+      </a:accent2>
+      <a:accent3>
+        <a:srgbClr val="196B24"/>
+      </a:accent3>
+      <a:accent4>
+        <a:srgbClr val="0F9ED5"/>
+      </a:accent4>
+      <a:accent5>
+        <a:srgbClr val="A02B93"/>
+      </a:accent5>
+      <a:accent6>
+        <a:srgbClr val="4EA72E"/>
+      </a:accent6>
+      <a:hlink>
+        <a:srgbClr val="467886"/>
+      </a:hlink>
+      <a:folHlink>
+        <a:srgbClr val="96607D"/>
+      </a:folHlink>
+    </a:clrScheme>
+    <a:fontScheme name="Office">
+      <a:majorFont>
+        <a:latin typeface="Aptos Display" panose="02110004020202020204"/>
+        <a:ea typeface=""/>
+        <a:cs typeface=""/>
+        <a:font script="Jpan" typeface="游ゴシック Light"/>
+        <a:font script="Hang" typeface="맑은 고딕"/>
+        <a:font script="Hans" typeface="等线 Light"/>
+        <a:font script="Hant" typeface="新細明體"/>
+        <a:font script="Arab" typeface="Times New Roman"/>
+        <a:font script="Hebr" typeface="Times New Roman"/>
+        <a:font script="Thai" typeface="Angsana New"/>
+        <a:font script="Ethi" typeface="Nyala"/>
+        <a:font script="Beng" typeface="Vrinda"/>
+        <a:font script="Gujr" typeface="Shruti"/>
+        <a:font script="Khmr" typeface="MoolBoran"/>
+        <a:font script="Knda" typeface="Tunga"/>
+        <a:font script="Guru" typeface="Raavi"/>
+        <a:font script="Cans" typeface="Euphemia"/>
+        <a:font script="Cher" typeface="Plantagenet Cherokee"/>
+        <a:font script="Yiii" typeface="Microsoft Yi Baiti"/>
+        <a:font script="Tibt" typeface="Microsoft Himalaya"/>
+        <a:font script="Thaa" typeface="MV Boli"/>
+        <a:font script="Deva" typeface="Mangal"/>
+        <a:font script="Telu" typeface="Gautami"/>
+        <a:font script="Taml" typeface="Latha"/>
+        <a:font script="Syrc" typeface="Estrangelo Edessa"/>
+        <a:font script="Orya" typeface="Kalinga"/>
+        <a:font script="Mlym" typeface="Kartika"/>
+        <a:font script="Laoo" typeface="DokChampa"/>
+        <a:font script="Sinh" typeface="Iskoola Pota"/>
+        <a:font script="Mong" typeface="Mongolian Baiti"/>
+        <a:font script="Viet" typeface="Times New Roman"/>
+        <a:font script="Uigh" typeface="Microsoft Uighur"/>
+        <a:font script="Geor" typeface="Sylfaen"/>
+        <a:font script="Armn" typeface="Arial"/>
+        <a:font script="Bugi" typeface="Leelawadee UI"/>
+        <a:font script="Bopo" typeface="Microsoft JhengHei"/>
+        <a:font script="Java" typeface="Javanese Text"/>
+        <a:font script="Lisu" typeface="Segoe UI"/>
+        <a:font script="Mymr" typeface="Myanmar Text"/>
+        <a:font script="Nkoo" typeface="Ebrima"/>
+        <a:font script="Olck" typeface="Nirmala UI"/>
+        <a:font script="Osma" typeface="Ebrima"/>
+        <a:font script="Phag" typeface="Phagspa"/>
+        <a:font script="Syrn" typeface="Estrangelo Edessa"/>
+        <a:font script="Syrj" typeface="Estrangelo Edessa"/>
+        <a:font script="Syre" typeface="Estrangelo Edessa"/>
+        <a:font script="Sora" typeface="Nirmala UI"/>
+        <a:font script="Tale" typeface="Microsoft Tai Le"/>
+        <a:font script="Talu" typeface="Microsoft New Tai Lue"/>
+        <a:font script="Tfng" typeface="Ebrima"/>
+      </a:majorFont>
+      <a:minorFont>
+        <a:latin typeface="Aptos" panose="02110004020202020204"/>
+        <a:ea typeface=""/>
+        <a:cs typeface=""/>
+        <a:font script="Jpan" typeface="游ゴシック"/>
+        <a:font script="Hang" typeface="맑은 고딕"/>
+        <a:font script="Hans" typeface="等线"/>
+        <a:font script="Hant" typeface="新細明體"/>
+        <a:font script="Arab" typeface="Arial"/>
+        <a:font script="Hebr" typeface="Arial"/>
+        <a:font script="Thai" typeface="Cordia New"/>
+        <a:font script="Ethi" typeface="Nyala"/>
+        <a:font script="Beng" typeface="Vrinda"/>
+        <a:font script="Gujr" typeface="Shruti"/>
+        <a:font script="Khmr" typeface="DaunPenh"/>
+        <a:font script="Knda" typeface="Tunga"/>
+        <a:font script="Guru" typeface="Raavi"/>
+        <a:font script="Cans" typeface="Euphemia"/>
+        <a:font script="Cher" typeface="Plantagenet Cherokee"/>
+        <a:font script="Yiii" typeface="Microsoft Yi Baiti"/>
+        <a:font script="Tibt" typeface="Microsoft Himalaya"/>
+        <a:font script="Thaa" typeface="MV Boli"/>
+        <a:font script="Deva" typeface="Mangal"/>
+        <a:font script="Telu" typeface="Gautami"/>
+        <a:font script="Taml" typeface="Latha"/>
+        <a:font script="Syrc" typeface="Estrangelo Edessa"/>
+        <a:font script="Orya" typeface="Kalinga"/>
+        <a:font script="Mlym" typeface="Kartika"/>
+        <a:font script="Laoo" typeface="DokChampa"/>
+        <a:font script="Sinh" typeface="Iskoola Pota"/>
+        <a:font script="Mong" typeface="Mongolian Baiti"/>
+        <a:font script="Viet" typeface="Arial"/>
+        <a:font script="Uigh" typeface="Microsoft Uighur"/>
+        <a:font script="Geor" typeface="Sylfaen"/>
+        <a:font script="Armn" typeface="Arial"/>
+        <a:font script="Bugi" typeface="Leelawadee UI"/>
+        <a:font script="Bopo" typeface="Microsoft JhengHei"/>
+        <a:font script="Java" typeface="Javanese Text"/>
+        <a:font script="Lisu" typeface="Segoe UI"/>
+        <a:font script="Mymr" typeface="Myanmar Text"/>
+        <a:font script="Nkoo" typeface="Ebrima"/>
+        <a:font script="Olck" typeface="Nirmala UI"/>
+        <a:font script="Osma" typeface="Ebrima"/>
+        <a:font script="Phag" typeface="Phagspa"/>
+        <a:font script="Syrn" typeface="Estrangelo Edessa"/>
+        <a:font script="Syrj" typeface="Estrangelo Edessa"/>
+        <a:font script="Syre" typeface="Estrangelo Edessa"/>
+        <a:font script="Sora" typeface="Nirmala UI"/>
+        <a:font script="Tale" typeface="Microsoft Tai Le"/>
+        <a:font script="Talu" typeface="Microsoft New Tai Lue"/>
+        <a:font script="Tfng" typeface="Ebrima"/>
+      </a:minorFont>
+    </a:fontScheme>
+    <a:fmtScheme name="Office">
+      <a:fillStyleLst>
+        <a:solidFill>
+          <a:schemeClr val="phClr"/>
+        </a:solidFill>
+        <a:gradFill rotWithShape="1">
+          <a:gsLst>
+            <a:gs pos="0">
+              <a:schemeClr val="phClr">
+                <a:lumMod val="110000"/>
+                <a:satMod val="105000"/>
+                <a:tint val="67000"/>
+              </a:schemeClr>
+            </a:gs>
+            <a:gs pos="50000">
+              <a:schemeClr val="phClr">
+                <a:lumMod val="105000"/>
+                <a:satMod val="103000"/>
+                <a:tint val="73000"/>
+              </a:schemeClr>
+            </a:gs>
+            <a:gs pos="100000">
+              <a:schemeClr val="phClr">
+                <a:lumMod val="105000"/>
+                <a:satMod val="109000"/>
+                <a:tint val="81000"/>
+              </a:schemeClr>
+            </a:gs>
+          </a:gsLst>
+          <a:lin ang="5400000" scaled="0"/>
+        </a:gradFill>
+        <a:gradFill rotWithShape="1">
+          <a:gsLst>
+            <a:gs pos="0">
+              <a:schemeClr val="phClr">
+                <a:satMod val="103000"/>
+                <a:lumMod val="102000"/>
+                <a:tint val="94000"/>
+              </a:schemeClr>
+            </a:gs>
+            <a:gs pos="50000">
+              <a:schemeClr val="phClr">
+                <a:satMod val="110000"/>
+                <a:lumMod val="100000"/>
+                <a:shade val="100000"/>
+              </a:schemeClr>
+            </a:gs>
+            <a:gs pos="100000">
+              <a:schemeClr val="phClr">
+                <a:lumMod val="99000"/>
+                <a:satMod val="120000"/>
+                <a:shade val="78000"/>
+              </a:schemeClr>
+            </a:gs>
+          </a:gsLst>
+          <a:lin ang="5400000" scaled="0"/>
+        </a:gradFill>
+      </a:fillStyleLst>
+      <a:lnStyleLst>
+        <a:ln w="12700" cap="flat" cmpd="sng" algn="ctr">
+          <a:solidFill>
+            <a:schemeClr val="phClr"/>
+          </a:solidFill>
+          <a:prstDash val="solid"/>
+          <a:miter lim="800000"/>
+        </a:ln>
+        <a:ln w="19050" cap="flat" cmpd="sng" algn="ctr">
+          <a:solidFill>
+            <a:schemeClr val="phClr"/>
+          </a:solidFill>
+          <a:prstDash val="solid"/>
+          <a:miter lim="800000"/>
+        </a:ln>
+        <a:ln w="25400" cap="flat" cmpd="sng" algn="ctr">
+          <a:solidFill>
+            <a:schemeClr val="phClr"/>
+          </a:solidFill>
+          <a:prstDash val="solid"/>
+          <a:miter lim="800000"/>
+        </a:ln>
+      </a:lnStyleLst>
+      <a:effectStyleLst>
+        <a:effectStyle>
+          <a:effectLst/>
+        </a:effectStyle>
+        <a:effectStyle>
+          <a:effectLst/>
+        </a:effectStyle>
+        <a:effectStyle>
+          <a:effectLst>
+            <a:outerShdw blurRad="57150" dist="19050" dir="5400000" algn="ctr" rotWithShape="0">
+              <a:srgbClr val="000000">
+                <a:alpha val="63000"/>
+              </a:srgbClr>
+            </a:outerShdw>
+          </a:effectLst>
+        </a:effectStyle>
+      </a:effectStyleLst>
+      <a:bgFillStyleLst>
+        <a:solidFill>
+          <a:schemeClr val="phClr"/>
+        </a:solidFill>
+        <a:solidFill>
+          <a:schemeClr val="phClr">
+            <a:tint val="95000"/>
+            <a:satMod val="170000"/>
+          </a:schemeClr>
+        </a:solidFill>
+        <a:gradFill rotWithShape="1">
+          <a:gsLst>
+            <a:gs pos="0">
+              <a:schemeClr val="phClr">
+                <a:tint val="93000"/>
+                <a:satMod val="150000"/>
+                <a:shade val="98000"/>
+                <a:lumMod val="102000"/>
+              </a:schemeClr>
+            </a:gs>
+            <a:gs pos="50000">
+              <a:schemeClr val="phClr">
+                <a:tint val="98000"/>
+                <a:satMod val="130000"/>
+                <a:shade val="90000"/>
+                <a:lumMod val="103000"/>
+              </a:schemeClr>
+            </a:gs>
+            <a:gs pos="100000">
+              <a:schemeClr val="phClr">
+                <a:shade val="63000"/>
+                <a:satMod val="120000"/>
+              </a:schemeClr>
+            </a:gs>
+          </a:gsLst>
+          <a:lin ang="5400000" scaled="0"/>
+        </a:gradFill>
+      </a:bgFillStyleLst>
+    </a:fmtScheme>
+  </a:themeElements>
+  <a:objectDefaults>
+    <a:lnDef>
+      <a:spPr/>
+      <a:bodyPr/>
+      <a:lstStyle/>
+      <a:style>
+        <a:lnRef idx="2">
+          <a:schemeClr val="accent1"/>
+        </a:lnRef>
+        <a:fillRef idx="0">
+          <a:schemeClr val="accent1"/>
+        </a:fillRef>
+        <a:effectRef idx="1">
+          <a:schemeClr val="accent1"/>
+        </a:effectRef>
+        <a:fontRef idx="minor">
+          <a:schemeClr val="tx1"/>
+        </a:fontRef>
+      </a:style>
+    </a:lnDef>
+  </a:objectDefaults>
+  <a:extraClrSchemeLst/>
+  <a:extLst>
+    <a:ext uri="{05A4C25C-085E-4340-85A3-A5531E510DB2}">
+      <thm15:themeFamily xmlns:thm15="http://schemas.microsoft.com/office/thememl/2012/main" name="Office Theme" id="{2E142A2C-CD16-42D6-873A-C26D2A0506FA}" vid="{1BDDFF52-6CD6-40A5-AB3C-68EB2F1E4D0A}"/>
+    </a:ext>
+  </a:extLst>
+</a:theme>
+</file>
+
+<file path=ppt/theme/theme2.xml><?xml version="1.0" encoding="utf-8"?>
 <a:theme xmlns:a="http://schemas.openxmlformats.org/drawingml/2006/main" name="Office Theme">
   <a:themeElements>
     <a:clrScheme name="Office">

--- a/Aspire.pptx
+++ b/Aspire.pptx
@@ -5,19 +5,20 @@
     <p:sldMasterId id="2147483696" r:id="rId1"/>
   </p:sldMasterIdLst>
   <p:notesMasterIdLst>
-    <p:notesMasterId r:id="rId12"/>
+    <p:notesMasterId r:id="rId13"/>
   </p:notesMasterIdLst>
   <p:sldIdLst>
     <p:sldId id="256" r:id="rId2"/>
-    <p:sldId id="257" r:id="rId3"/>
-    <p:sldId id="258" r:id="rId4"/>
-    <p:sldId id="264" r:id="rId5"/>
+    <p:sldId id="258" r:id="rId3"/>
+    <p:sldId id="264" r:id="rId4"/>
+    <p:sldId id="257" r:id="rId5"/>
     <p:sldId id="259" r:id="rId6"/>
     <p:sldId id="260" r:id="rId7"/>
     <p:sldId id="265" r:id="rId8"/>
     <p:sldId id="263" r:id="rId9"/>
     <p:sldId id="261" r:id="rId10"/>
     <p:sldId id="262" r:id="rId11"/>
+    <p:sldId id="266" r:id="rId12"/>
   </p:sldIdLst>
   <p:sldSz cx="12192000" cy="6858000"/>
   <p:notesSz cx="6858000" cy="9144000"/>
@@ -206,7 +207,7 @@
           <a:p>
             <a:fld id="{0E8ABD95-CF89-4997-A5D9-D8BD864FD8A3}" type="datetimeFigureOut">
               <a:rPr lang="en-AU" smtClean="0"/>
-              <a:t>Wed 1/04/2026</a:t>
+              <a:t>Tue 7/04/2026</a:t>
             </a:fld>
             <a:endParaRPr lang="en-AU"/>
           </a:p>
@@ -542,7 +543,7 @@
           <a:p>
             <a:fld id="{69F1E228-2BE6-48C1-A010-E4FD7019896E}" type="slidenum">
               <a:rPr lang="en-AU" smtClean="0"/>
-              <a:t>4</a:t>
+              <a:t>3</a:t>
             </a:fld>
             <a:endParaRPr lang="en-AU"/>
           </a:p>
@@ -626,6 +627,149 @@
           <a:p>
             <a:fld id="{69F1E228-2BE6-48C1-A010-E4FD7019896E}" type="slidenum">
               <a:rPr lang="en-AU" smtClean="0"/>
+              <a:t>8</a:t>
+            </a:fld>
+            <a:endParaRPr lang="en-AU"/>
+          </a:p>
+        </p:txBody>
+      </p:sp>
+    </p:spTree>
+    <p:extLst>
+      <p:ext uri="{BB962C8B-B14F-4D97-AF65-F5344CB8AC3E}">
+        <p14:creationId xmlns:p14="http://schemas.microsoft.com/office/powerpoint/2010/main" val="1970233290"/>
+      </p:ext>
+    </p:extLst>
+  </p:cSld>
+  <p:clrMapOvr>
+    <a:masterClrMapping/>
+  </p:clrMapOvr>
+</p:notes>
+</file>
+
+<file path=ppt/notesSlides/notesSlide3.xml><?xml version="1.0" encoding="utf-8"?>
+<p:notes xmlns:a="http://schemas.openxmlformats.org/drawingml/2006/main" xmlns:r="http://schemas.openxmlformats.org/officeDocument/2006/relationships" xmlns:p="http://schemas.openxmlformats.org/presentationml/2006/main">
+  <p:cSld>
+    <p:spTree>
+      <p:nvGrpSpPr>
+        <p:cNvPr id="1" name=""/>
+        <p:cNvGrpSpPr/>
+        <p:nvPr/>
+      </p:nvGrpSpPr>
+      <p:grpSpPr>
+        <a:xfrm>
+          <a:off x="0" y="0"/>
+          <a:ext cx="0" cy="0"/>
+          <a:chOff x="0" y="0"/>
+          <a:chExt cx="0" cy="0"/>
+        </a:xfrm>
+      </p:grpSpPr>
+      <p:sp>
+        <p:nvSpPr>
+          <p:cNvPr id="2" name="Slide Image Placeholder 1"/>
+          <p:cNvSpPr>
+            <a:spLocks noGrp="1" noRot="1" noChangeAspect="1"/>
+          </p:cNvSpPr>
+          <p:nvPr>
+            <p:ph type="sldImg"/>
+          </p:nvPr>
+        </p:nvSpPr>
+        <p:spPr/>
+      </p:sp>
+      <p:sp>
+        <p:nvSpPr>
+          <p:cNvPr id="3" name="Notes Placeholder 2"/>
+          <p:cNvSpPr>
+            <a:spLocks noGrp="1"/>
+          </p:cNvSpPr>
+          <p:nvPr>
+            <p:ph type="body" idx="1"/>
+          </p:nvPr>
+        </p:nvSpPr>
+        <p:spPr/>
+        <p:txBody>
+          <a:bodyPr/>
+          <a:lstStyle/>
+          <a:p>
+            <a:r>
+              <a:rPr lang="en-AU" dirty="0"/>
+              <a:t>Specific scenarios to run through:</a:t>
+            </a:r>
+          </a:p>
+          <a:p>
+            <a:pPr marL="171450" indent="-171450">
+              <a:buFontTx/>
+              <a:buChar char="-"/>
+            </a:pPr>
+            <a:r>
+              <a:rPr lang="en-AU" dirty="0"/>
+              <a:t>Unresolved parameters solves “go get variables from </a:t>
+            </a:r>
+            <a:r>
+              <a:rPr lang="en-AU" dirty="0" err="1"/>
+              <a:t>lastpass</a:t>
+            </a:r>
+            <a:r>
+              <a:rPr lang="en-AU" dirty="0"/>
+              <a:t>”</a:t>
+            </a:r>
+          </a:p>
+          <a:p>
+            <a:pPr marL="171450" indent="-171450">
+              <a:buFontTx/>
+              <a:buChar char="-"/>
+            </a:pPr>
+            <a:r>
+              <a:rPr lang="en-AU" dirty="0"/>
+              <a:t>Which project seeds </a:t>
+            </a:r>
+            <a:r>
+              <a:rPr lang="en-AU" dirty="0" err="1"/>
+              <a:t>dbs</a:t>
+            </a:r>
+            <a:r>
+              <a:rPr lang="en-AU" dirty="0"/>
+              <a:t>? </a:t>
+            </a:r>
+          </a:p>
+          <a:p>
+            <a:pPr marL="171450" indent="-171450">
+              <a:buFontTx/>
+              <a:buChar char="-"/>
+            </a:pPr>
+            <a:r>
+              <a:rPr lang="en-AU" dirty="0"/>
+              <a:t>How do I just run everything up? Grouped start parameter</a:t>
+            </a:r>
+          </a:p>
+          <a:p>
+            <a:pPr marL="171450" indent="-171450">
+              <a:buFontTx/>
+              <a:buChar char="-"/>
+            </a:pPr>
+            <a:r>
+              <a:rPr lang="en-AU" dirty="0"/>
+              <a:t>How do I change shared config? Just one place!</a:t>
+            </a:r>
+          </a:p>
+        </p:txBody>
+      </p:sp>
+      <p:sp>
+        <p:nvSpPr>
+          <p:cNvPr id="4" name="Slide Number Placeholder 3"/>
+          <p:cNvSpPr>
+            <a:spLocks noGrp="1"/>
+          </p:cNvSpPr>
+          <p:nvPr>
+            <p:ph type="sldNum" sz="quarter" idx="5"/>
+          </p:nvPr>
+        </p:nvSpPr>
+        <p:spPr/>
+        <p:txBody>
+          <a:bodyPr/>
+          <a:lstStyle/>
+          <a:p>
+            <a:fld id="{69F1E228-2BE6-48C1-A010-E4FD7019896E}" type="slidenum">
+              <a:rPr lang="en-AU" smtClean="0"/>
               <a:t>9</a:t>
             </a:fld>
             <a:endParaRPr lang="en-AU"/>
@@ -636,6 +780,173 @@
     <p:extLst>
       <p:ext uri="{BB962C8B-B14F-4D97-AF65-F5344CB8AC3E}">
         <p14:creationId xmlns:p14="http://schemas.microsoft.com/office/powerpoint/2010/main" val="2571222990"/>
+      </p:ext>
+    </p:extLst>
+  </p:cSld>
+  <p:clrMapOvr>
+    <a:masterClrMapping/>
+  </p:clrMapOvr>
+</p:notes>
+</file>
+
+<file path=ppt/notesSlides/notesSlide4.xml><?xml version="1.0" encoding="utf-8"?>
+<p:notes xmlns:a="http://schemas.openxmlformats.org/drawingml/2006/main" xmlns:r="http://schemas.openxmlformats.org/officeDocument/2006/relationships" xmlns:p="http://schemas.openxmlformats.org/presentationml/2006/main">
+  <p:cSld>
+    <p:spTree>
+      <p:nvGrpSpPr>
+        <p:cNvPr id="1" name="">
+          <a:extLst>
+            <a:ext uri="{FF2B5EF4-FFF2-40B4-BE49-F238E27FC236}">
+              <a16:creationId xmlns:a16="http://schemas.microsoft.com/office/drawing/2014/main" id="{6BCD95F5-2C1F-D5CE-B3F6-A997F65344CB}"/>
+            </a:ext>
+          </a:extLst>
+        </p:cNvPr>
+        <p:cNvGrpSpPr/>
+        <p:nvPr/>
+      </p:nvGrpSpPr>
+      <p:grpSpPr>
+        <a:xfrm>
+          <a:off x="0" y="0"/>
+          <a:ext cx="0" cy="0"/>
+          <a:chOff x="0" y="0"/>
+          <a:chExt cx="0" cy="0"/>
+        </a:xfrm>
+      </p:grpSpPr>
+      <p:sp>
+        <p:nvSpPr>
+          <p:cNvPr id="2" name="Slide Image Placeholder 1">
+            <a:extLst>
+              <a:ext uri="{FF2B5EF4-FFF2-40B4-BE49-F238E27FC236}">
+                <a16:creationId xmlns:a16="http://schemas.microsoft.com/office/drawing/2014/main" id="{94817FB6-EF82-A197-2E4F-6A663F9ABBB6}"/>
+              </a:ext>
+            </a:extLst>
+          </p:cNvPr>
+          <p:cNvSpPr>
+            <a:spLocks noGrp="1" noRot="1" noChangeAspect="1"/>
+          </p:cNvSpPr>
+          <p:nvPr>
+            <p:ph type="sldImg"/>
+          </p:nvPr>
+        </p:nvSpPr>
+        <p:spPr/>
+      </p:sp>
+      <p:sp>
+        <p:nvSpPr>
+          <p:cNvPr id="3" name="Notes Placeholder 2">
+            <a:extLst>
+              <a:ext uri="{FF2B5EF4-FFF2-40B4-BE49-F238E27FC236}">
+                <a16:creationId xmlns:a16="http://schemas.microsoft.com/office/drawing/2014/main" id="{5F61556F-3F68-3BA9-744D-EEC983543B41}"/>
+              </a:ext>
+            </a:extLst>
+          </p:cNvPr>
+          <p:cNvSpPr>
+            <a:spLocks noGrp="1"/>
+          </p:cNvSpPr>
+          <p:nvPr>
+            <p:ph type="body" idx="1"/>
+          </p:nvPr>
+        </p:nvSpPr>
+        <p:spPr/>
+        <p:txBody>
+          <a:bodyPr/>
+          <a:lstStyle/>
+          <a:p>
+            <a:r>
+              <a:rPr lang="en-AU" dirty="0"/>
+              <a:t>Specific scenarios to run through:</a:t>
+            </a:r>
+          </a:p>
+          <a:p>
+            <a:pPr marL="171450" indent="-171450">
+              <a:buFontTx/>
+              <a:buChar char="-"/>
+            </a:pPr>
+            <a:r>
+              <a:rPr lang="en-AU" dirty="0"/>
+              <a:t>Unresolved parameters solves “go get variables from </a:t>
+            </a:r>
+            <a:r>
+              <a:rPr lang="en-AU" dirty="0" err="1"/>
+              <a:t>lastpass</a:t>
+            </a:r>
+            <a:r>
+              <a:rPr lang="en-AU" dirty="0"/>
+              <a:t>”</a:t>
+            </a:r>
+          </a:p>
+          <a:p>
+            <a:pPr marL="171450" indent="-171450">
+              <a:buFontTx/>
+              <a:buChar char="-"/>
+            </a:pPr>
+            <a:r>
+              <a:rPr lang="en-AU" dirty="0"/>
+              <a:t>Which project seeds </a:t>
+            </a:r>
+            <a:r>
+              <a:rPr lang="en-AU" dirty="0" err="1"/>
+              <a:t>dbs</a:t>
+            </a:r>
+            <a:r>
+              <a:rPr lang="en-AU" dirty="0"/>
+              <a:t>? </a:t>
+            </a:r>
+          </a:p>
+          <a:p>
+            <a:pPr marL="171450" indent="-171450">
+              <a:buFontTx/>
+              <a:buChar char="-"/>
+            </a:pPr>
+            <a:r>
+              <a:rPr lang="en-AU" dirty="0"/>
+              <a:t>How do I just run everything up? Grouped start parameter</a:t>
+            </a:r>
+          </a:p>
+          <a:p>
+            <a:pPr marL="171450" indent="-171450">
+              <a:buFontTx/>
+              <a:buChar char="-"/>
+            </a:pPr>
+            <a:r>
+              <a:rPr lang="en-AU" dirty="0"/>
+              <a:t>How do I change shared config? Just one place!</a:t>
+            </a:r>
+          </a:p>
+        </p:txBody>
+      </p:sp>
+      <p:sp>
+        <p:nvSpPr>
+          <p:cNvPr id="4" name="Slide Number Placeholder 3">
+            <a:extLst>
+              <a:ext uri="{FF2B5EF4-FFF2-40B4-BE49-F238E27FC236}">
+                <a16:creationId xmlns:a16="http://schemas.microsoft.com/office/drawing/2014/main" id="{56CDE1CC-B650-48C9-44AB-0DB1639032ED}"/>
+              </a:ext>
+            </a:extLst>
+          </p:cNvPr>
+          <p:cNvSpPr>
+            <a:spLocks noGrp="1"/>
+          </p:cNvSpPr>
+          <p:nvPr>
+            <p:ph type="sldNum" sz="quarter" idx="5"/>
+          </p:nvPr>
+        </p:nvSpPr>
+        <p:spPr/>
+        <p:txBody>
+          <a:bodyPr/>
+          <a:lstStyle/>
+          <a:p>
+            <a:fld id="{69F1E228-2BE6-48C1-A010-E4FD7019896E}" type="slidenum">
+              <a:rPr lang="en-AU" smtClean="0"/>
+              <a:t>11</a:t>
+            </a:fld>
+            <a:endParaRPr lang="en-AU"/>
+          </a:p>
+        </p:txBody>
+      </p:sp>
+    </p:spTree>
+    <p:extLst>
+      <p:ext uri="{BB962C8B-B14F-4D97-AF65-F5344CB8AC3E}">
+        <p14:creationId xmlns:p14="http://schemas.microsoft.com/office/powerpoint/2010/main" val="1461132090"/>
       </p:ext>
     </p:extLst>
   </p:cSld>
@@ -787,14 +1098,22 @@
             <p:ph type="dt" sz="half" idx="10"/>
           </p:nvPr>
         </p:nvSpPr>
-        <p:spPr/>
+        <p:spPr>
+          <a:xfrm>
+            <a:off x="838200" y="6356350"/>
+            <a:ext cx="2743200" cy="365125"/>
+          </a:xfrm>
+          <a:prstGeom prst="rect">
+            <a:avLst/>
+          </a:prstGeom>
+        </p:spPr>
         <p:txBody>
           <a:bodyPr/>
           <a:lstStyle/>
           <a:p>
             <a:fld id="{83ABD3F5-BD16-4E9A-96A2-3A1B8604A0AE}" type="datetimeFigureOut">
               <a:rPr lang="en-AU" smtClean="0"/>
-              <a:t>Wed 1/04/2026</a:t>
+              <a:t>Tue 7/04/2026</a:t>
             </a:fld>
             <a:endParaRPr lang="en-AU"/>
           </a:p>
@@ -816,7 +1135,15 @@
             <p:ph type="ftr" sz="quarter" idx="11"/>
           </p:nvPr>
         </p:nvSpPr>
-        <p:spPr/>
+        <p:spPr>
+          <a:xfrm>
+            <a:off x="4038600" y="6356350"/>
+            <a:ext cx="4114800" cy="365125"/>
+          </a:xfrm>
+          <a:prstGeom prst="rect">
+            <a:avLst/>
+          </a:prstGeom>
+        </p:spPr>
         <p:txBody>
           <a:bodyPr/>
           <a:lstStyle/>
@@ -987,14 +1314,22 @@
             <p:ph type="dt" sz="half" idx="10"/>
           </p:nvPr>
         </p:nvSpPr>
-        <p:spPr/>
+        <p:spPr>
+          <a:xfrm>
+            <a:off x="838200" y="6356350"/>
+            <a:ext cx="2743200" cy="365125"/>
+          </a:xfrm>
+          <a:prstGeom prst="rect">
+            <a:avLst/>
+          </a:prstGeom>
+        </p:spPr>
         <p:txBody>
           <a:bodyPr/>
           <a:lstStyle/>
           <a:p>
             <a:fld id="{83ABD3F5-BD16-4E9A-96A2-3A1B8604A0AE}" type="datetimeFigureOut">
               <a:rPr lang="en-AU" smtClean="0"/>
-              <a:t>Wed 1/04/2026</a:t>
+              <a:t>Tue 7/04/2026</a:t>
             </a:fld>
             <a:endParaRPr lang="en-AU"/>
           </a:p>
@@ -1016,7 +1351,15 @@
             <p:ph type="ftr" sz="quarter" idx="11"/>
           </p:nvPr>
         </p:nvSpPr>
-        <p:spPr/>
+        <p:spPr>
+          <a:xfrm>
+            <a:off x="4038600" y="6356350"/>
+            <a:ext cx="4114800" cy="365125"/>
+          </a:xfrm>
+          <a:prstGeom prst="rect">
+            <a:avLst/>
+          </a:prstGeom>
+        </p:spPr>
         <p:txBody>
           <a:bodyPr/>
           <a:lstStyle/>
@@ -1197,14 +1540,22 @@
             <p:ph type="dt" sz="half" idx="10"/>
           </p:nvPr>
         </p:nvSpPr>
-        <p:spPr/>
+        <p:spPr>
+          <a:xfrm>
+            <a:off x="838200" y="6356350"/>
+            <a:ext cx="2743200" cy="365125"/>
+          </a:xfrm>
+          <a:prstGeom prst="rect">
+            <a:avLst/>
+          </a:prstGeom>
+        </p:spPr>
         <p:txBody>
           <a:bodyPr/>
           <a:lstStyle/>
           <a:p>
             <a:fld id="{83ABD3F5-BD16-4E9A-96A2-3A1B8604A0AE}" type="datetimeFigureOut">
               <a:rPr lang="en-AU" smtClean="0"/>
-              <a:t>Wed 1/04/2026</a:t>
+              <a:t>Tue 7/04/2026</a:t>
             </a:fld>
             <a:endParaRPr lang="en-AU"/>
           </a:p>
@@ -1226,7 +1577,15 @@
             <p:ph type="ftr" sz="quarter" idx="11"/>
           </p:nvPr>
         </p:nvSpPr>
-        <p:spPr/>
+        <p:spPr>
+          <a:xfrm>
+            <a:off x="4038600" y="6356350"/>
+            <a:ext cx="4114800" cy="365125"/>
+          </a:xfrm>
+          <a:prstGeom prst="rect">
+            <a:avLst/>
+          </a:prstGeom>
+        </p:spPr>
         <p:txBody>
           <a:bodyPr/>
           <a:lstStyle/>
@@ -1397,14 +1756,22 @@
             <p:ph type="dt" sz="half" idx="10"/>
           </p:nvPr>
         </p:nvSpPr>
-        <p:spPr/>
+        <p:spPr>
+          <a:xfrm>
+            <a:off x="838200" y="6356350"/>
+            <a:ext cx="2743200" cy="365125"/>
+          </a:xfrm>
+          <a:prstGeom prst="rect">
+            <a:avLst/>
+          </a:prstGeom>
+        </p:spPr>
         <p:txBody>
           <a:bodyPr/>
           <a:lstStyle/>
           <a:p>
             <a:fld id="{83ABD3F5-BD16-4E9A-96A2-3A1B8604A0AE}" type="datetimeFigureOut">
               <a:rPr lang="en-AU" smtClean="0"/>
-              <a:t>Wed 1/04/2026</a:t>
+              <a:t>Tue 7/04/2026</a:t>
             </a:fld>
             <a:endParaRPr lang="en-AU"/>
           </a:p>
@@ -1426,7 +1793,15 @@
             <p:ph type="ftr" sz="quarter" idx="11"/>
           </p:nvPr>
         </p:nvSpPr>
-        <p:spPr/>
+        <p:spPr>
+          <a:xfrm>
+            <a:off x="4038600" y="6356350"/>
+            <a:ext cx="4114800" cy="365125"/>
+          </a:xfrm>
+          <a:prstGeom prst="rect">
+            <a:avLst/>
+          </a:prstGeom>
+        </p:spPr>
         <p:txBody>
           <a:bodyPr/>
           <a:lstStyle/>
@@ -1673,14 +2048,22 @@
             <p:ph type="dt" sz="half" idx="10"/>
           </p:nvPr>
         </p:nvSpPr>
-        <p:spPr/>
+        <p:spPr>
+          <a:xfrm>
+            <a:off x="838200" y="6356350"/>
+            <a:ext cx="2743200" cy="365125"/>
+          </a:xfrm>
+          <a:prstGeom prst="rect">
+            <a:avLst/>
+          </a:prstGeom>
+        </p:spPr>
         <p:txBody>
           <a:bodyPr/>
           <a:lstStyle/>
           <a:p>
             <a:fld id="{83ABD3F5-BD16-4E9A-96A2-3A1B8604A0AE}" type="datetimeFigureOut">
               <a:rPr lang="en-AU" smtClean="0"/>
-              <a:t>Wed 1/04/2026</a:t>
+              <a:t>Tue 7/04/2026</a:t>
             </a:fld>
             <a:endParaRPr lang="en-AU"/>
           </a:p>
@@ -1702,7 +2085,15 @@
             <p:ph type="ftr" sz="quarter" idx="11"/>
           </p:nvPr>
         </p:nvSpPr>
-        <p:spPr/>
+        <p:spPr>
+          <a:xfrm>
+            <a:off x="4038600" y="6356350"/>
+            <a:ext cx="4114800" cy="365125"/>
+          </a:xfrm>
+          <a:prstGeom prst="rect">
+            <a:avLst/>
+          </a:prstGeom>
+        </p:spPr>
         <p:txBody>
           <a:bodyPr/>
           <a:lstStyle/>
@@ -1941,14 +2332,22 @@
             <p:ph type="dt" sz="half" idx="10"/>
           </p:nvPr>
         </p:nvSpPr>
-        <p:spPr/>
+        <p:spPr>
+          <a:xfrm>
+            <a:off x="838200" y="6356350"/>
+            <a:ext cx="2743200" cy="365125"/>
+          </a:xfrm>
+          <a:prstGeom prst="rect">
+            <a:avLst/>
+          </a:prstGeom>
+        </p:spPr>
         <p:txBody>
           <a:bodyPr/>
           <a:lstStyle/>
           <a:p>
             <a:fld id="{83ABD3F5-BD16-4E9A-96A2-3A1B8604A0AE}" type="datetimeFigureOut">
               <a:rPr lang="en-AU" smtClean="0"/>
-              <a:t>Wed 1/04/2026</a:t>
+              <a:t>Tue 7/04/2026</a:t>
             </a:fld>
             <a:endParaRPr lang="en-AU"/>
           </a:p>
@@ -1970,7 +2369,15 @@
             <p:ph type="ftr" sz="quarter" idx="11"/>
           </p:nvPr>
         </p:nvSpPr>
-        <p:spPr/>
+        <p:spPr>
+          <a:xfrm>
+            <a:off x="4038600" y="6356350"/>
+            <a:ext cx="4114800" cy="365125"/>
+          </a:xfrm>
+          <a:prstGeom prst="rect">
+            <a:avLst/>
+          </a:prstGeom>
+        </p:spPr>
         <p:txBody>
           <a:bodyPr/>
           <a:lstStyle/>
@@ -2356,14 +2763,22 @@
             <p:ph type="dt" sz="half" idx="10"/>
           </p:nvPr>
         </p:nvSpPr>
-        <p:spPr/>
+        <p:spPr>
+          <a:xfrm>
+            <a:off x="838200" y="6356350"/>
+            <a:ext cx="2743200" cy="365125"/>
+          </a:xfrm>
+          <a:prstGeom prst="rect">
+            <a:avLst/>
+          </a:prstGeom>
+        </p:spPr>
         <p:txBody>
           <a:bodyPr/>
           <a:lstStyle/>
           <a:p>
             <a:fld id="{83ABD3F5-BD16-4E9A-96A2-3A1B8604A0AE}" type="datetimeFigureOut">
               <a:rPr lang="en-AU" smtClean="0"/>
-              <a:t>Wed 1/04/2026</a:t>
+              <a:t>Tue 7/04/2026</a:t>
             </a:fld>
             <a:endParaRPr lang="en-AU"/>
           </a:p>
@@ -2385,7 +2800,15 @@
             <p:ph type="ftr" sz="quarter" idx="11"/>
           </p:nvPr>
         </p:nvSpPr>
-        <p:spPr/>
+        <p:spPr>
+          <a:xfrm>
+            <a:off x="4038600" y="6356350"/>
+            <a:ext cx="4114800" cy="365125"/>
+          </a:xfrm>
+          <a:prstGeom prst="rect">
+            <a:avLst/>
+          </a:prstGeom>
+        </p:spPr>
         <p:txBody>
           <a:bodyPr/>
           <a:lstStyle/>
@@ -2498,14 +2921,22 @@
             <p:ph type="dt" sz="half" idx="10"/>
           </p:nvPr>
         </p:nvSpPr>
-        <p:spPr/>
+        <p:spPr>
+          <a:xfrm>
+            <a:off x="838200" y="6356350"/>
+            <a:ext cx="2743200" cy="365125"/>
+          </a:xfrm>
+          <a:prstGeom prst="rect">
+            <a:avLst/>
+          </a:prstGeom>
+        </p:spPr>
         <p:txBody>
           <a:bodyPr/>
           <a:lstStyle/>
           <a:p>
             <a:fld id="{83ABD3F5-BD16-4E9A-96A2-3A1B8604A0AE}" type="datetimeFigureOut">
               <a:rPr lang="en-AU" smtClean="0"/>
-              <a:t>Wed 1/04/2026</a:t>
+              <a:t>Tue 7/04/2026</a:t>
             </a:fld>
             <a:endParaRPr lang="en-AU"/>
           </a:p>
@@ -2527,7 +2958,15 @@
             <p:ph type="ftr" sz="quarter" idx="11"/>
           </p:nvPr>
         </p:nvSpPr>
-        <p:spPr/>
+        <p:spPr>
+          <a:xfrm>
+            <a:off x="4038600" y="6356350"/>
+            <a:ext cx="4114800" cy="365125"/>
+          </a:xfrm>
+          <a:prstGeom prst="rect">
+            <a:avLst/>
+          </a:prstGeom>
+        </p:spPr>
         <p:txBody>
           <a:bodyPr/>
           <a:lstStyle/>
@@ -2611,14 +3050,22 @@
             <p:ph type="dt" sz="half" idx="10"/>
           </p:nvPr>
         </p:nvSpPr>
-        <p:spPr/>
+        <p:spPr>
+          <a:xfrm>
+            <a:off x="838200" y="6356350"/>
+            <a:ext cx="2743200" cy="365125"/>
+          </a:xfrm>
+          <a:prstGeom prst="rect">
+            <a:avLst/>
+          </a:prstGeom>
+        </p:spPr>
         <p:txBody>
           <a:bodyPr/>
           <a:lstStyle/>
           <a:p>
             <a:fld id="{83ABD3F5-BD16-4E9A-96A2-3A1B8604A0AE}" type="datetimeFigureOut">
               <a:rPr lang="en-AU" smtClean="0"/>
-              <a:t>Wed 1/04/2026</a:t>
+              <a:t>Tue 7/04/2026</a:t>
             </a:fld>
             <a:endParaRPr lang="en-AU"/>
           </a:p>
@@ -2640,7 +3087,15 @@
             <p:ph type="ftr" sz="quarter" idx="11"/>
           </p:nvPr>
         </p:nvSpPr>
-        <p:spPr/>
+        <p:spPr>
+          <a:xfrm>
+            <a:off x="4038600" y="6356350"/>
+            <a:ext cx="4114800" cy="365125"/>
+          </a:xfrm>
+          <a:prstGeom prst="rect">
+            <a:avLst/>
+          </a:prstGeom>
+        </p:spPr>
         <p:txBody>
           <a:bodyPr/>
           <a:lstStyle/>
@@ -2924,14 +3379,22 @@
             <p:ph type="dt" sz="half" idx="10"/>
           </p:nvPr>
         </p:nvSpPr>
-        <p:spPr/>
+        <p:spPr>
+          <a:xfrm>
+            <a:off x="838200" y="6356350"/>
+            <a:ext cx="2743200" cy="365125"/>
+          </a:xfrm>
+          <a:prstGeom prst="rect">
+            <a:avLst/>
+          </a:prstGeom>
+        </p:spPr>
         <p:txBody>
           <a:bodyPr/>
           <a:lstStyle/>
           <a:p>
             <a:fld id="{83ABD3F5-BD16-4E9A-96A2-3A1B8604A0AE}" type="datetimeFigureOut">
               <a:rPr lang="en-AU" smtClean="0"/>
-              <a:t>Wed 1/04/2026</a:t>
+              <a:t>Tue 7/04/2026</a:t>
             </a:fld>
             <a:endParaRPr lang="en-AU"/>
           </a:p>
@@ -2953,7 +3416,15 @@
             <p:ph type="ftr" sz="quarter" idx="11"/>
           </p:nvPr>
         </p:nvSpPr>
-        <p:spPr/>
+        <p:spPr>
+          <a:xfrm>
+            <a:off x="4038600" y="6356350"/>
+            <a:ext cx="4114800" cy="365125"/>
+          </a:xfrm>
+          <a:prstGeom prst="rect">
+            <a:avLst/>
+          </a:prstGeom>
+        </p:spPr>
         <p:txBody>
           <a:bodyPr/>
           <a:lstStyle/>
@@ -3213,14 +3684,22 @@
             <p:ph type="dt" sz="half" idx="10"/>
           </p:nvPr>
         </p:nvSpPr>
-        <p:spPr/>
+        <p:spPr>
+          <a:xfrm>
+            <a:off x="838200" y="6356350"/>
+            <a:ext cx="2743200" cy="365125"/>
+          </a:xfrm>
+          <a:prstGeom prst="rect">
+            <a:avLst/>
+          </a:prstGeom>
+        </p:spPr>
         <p:txBody>
           <a:bodyPr/>
           <a:lstStyle/>
           <a:p>
             <a:fld id="{83ABD3F5-BD16-4E9A-96A2-3A1B8604A0AE}" type="datetimeFigureOut">
               <a:rPr lang="en-AU" smtClean="0"/>
-              <a:t>Wed 1/04/2026</a:t>
+              <a:t>Tue 7/04/2026</a:t>
             </a:fld>
             <a:endParaRPr lang="en-AU"/>
           </a:p>
@@ -3242,7 +3721,15 @@
             <p:ph type="ftr" sz="quarter" idx="11"/>
           </p:nvPr>
         </p:nvSpPr>
-        <p:spPr/>
+        <p:spPr>
+          <a:xfrm>
+            <a:off x="4038600" y="6356350"/>
+            <a:ext cx="4114800" cy="365125"/>
+          </a:xfrm>
+          <a:prstGeom prst="rect">
+            <a:avLst/>
+          </a:prstGeom>
+        </p:spPr>
         <p:txBody>
           <a:bodyPr/>
           <a:lstStyle/>
@@ -3409,128 +3896,38 @@
           <a:p>
             <a:pPr lvl="0"/>
             <a:r>
-              <a:rPr lang="en-US"/>
+              <a:rPr lang="en-US" dirty="0"/>
               <a:t>Click to edit Master text styles</a:t>
             </a:r>
           </a:p>
           <a:p>
             <a:pPr lvl="1"/>
             <a:r>
-              <a:rPr lang="en-US"/>
+              <a:rPr lang="en-US" dirty="0"/>
               <a:t>Second level</a:t>
             </a:r>
           </a:p>
           <a:p>
             <a:pPr lvl="2"/>
             <a:r>
-              <a:rPr lang="en-US"/>
+              <a:rPr lang="en-US" dirty="0"/>
               <a:t>Third level</a:t>
             </a:r>
           </a:p>
           <a:p>
             <a:pPr lvl="3"/>
             <a:r>
-              <a:rPr lang="en-US"/>
+              <a:rPr lang="en-US" dirty="0"/>
               <a:t>Fourth level</a:t>
             </a:r>
           </a:p>
           <a:p>
             <a:pPr lvl="4"/>
             <a:r>
-              <a:rPr lang="en-US"/>
+              <a:rPr lang="en-US" dirty="0"/>
               <a:t>Fifth level</a:t>
             </a:r>
-            <a:endParaRPr lang="en-AU"/>
-          </a:p>
-        </p:txBody>
-      </p:sp>
-      <p:sp>
-        <p:nvSpPr>
-          <p:cNvPr id="4" name="Date Placeholder 3">
-            <a:extLst>
-              <a:ext uri="{FF2B5EF4-FFF2-40B4-BE49-F238E27FC236}">
-                <a16:creationId xmlns:a16="http://schemas.microsoft.com/office/drawing/2014/main" id="{1A7ED360-437A-FEE1-08A7-1599351F3D99}"/>
-              </a:ext>
-            </a:extLst>
-          </p:cNvPr>
-          <p:cNvSpPr>
-            <a:spLocks noGrp="1"/>
-          </p:cNvSpPr>
-          <p:nvPr>
-            <p:ph type="dt" sz="half" idx="2"/>
-          </p:nvPr>
-        </p:nvSpPr>
-        <p:spPr>
-          <a:xfrm>
-            <a:off x="838200" y="6356350"/>
-            <a:ext cx="2743200" cy="365125"/>
-          </a:xfrm>
-          <a:prstGeom prst="rect">
-            <a:avLst/>
-          </a:prstGeom>
-        </p:spPr>
-        <p:txBody>
-          <a:bodyPr vert="horz" lIns="91440" tIns="45720" rIns="91440" bIns="45720" rtlCol="0" anchor="ctr"/>
-          <a:lstStyle>
-            <a:lvl1pPr algn="l">
-              <a:defRPr sz="1200">
-                <a:solidFill>
-                  <a:schemeClr val="tx1">
-                    <a:tint val="82000"/>
-                  </a:schemeClr>
-                </a:solidFill>
-              </a:defRPr>
-            </a:lvl1pPr>
-          </a:lstStyle>
-          <a:p>
-            <a:fld id="{83ABD3F5-BD16-4E9A-96A2-3A1B8604A0AE}" type="datetimeFigureOut">
-              <a:rPr lang="en-AU" smtClean="0"/>
-              <a:t>Wed 1/04/2026</a:t>
-            </a:fld>
-            <a:endParaRPr lang="en-AU"/>
-          </a:p>
-        </p:txBody>
-      </p:sp>
-      <p:sp>
-        <p:nvSpPr>
-          <p:cNvPr id="5" name="Footer Placeholder 4">
-            <a:extLst>
-              <a:ext uri="{FF2B5EF4-FFF2-40B4-BE49-F238E27FC236}">
-                <a16:creationId xmlns:a16="http://schemas.microsoft.com/office/drawing/2014/main" id="{923491A8-FCBB-F037-FC97-DC9C37FB894B}"/>
-              </a:ext>
-            </a:extLst>
-          </p:cNvPr>
-          <p:cNvSpPr>
-            <a:spLocks noGrp="1"/>
-          </p:cNvSpPr>
-          <p:nvPr>
-            <p:ph type="ftr" sz="quarter" idx="3"/>
-          </p:nvPr>
-        </p:nvSpPr>
-        <p:spPr>
-          <a:xfrm>
-            <a:off x="4038600" y="6356350"/>
-            <a:ext cx="4114800" cy="365125"/>
-          </a:xfrm>
-          <a:prstGeom prst="rect">
-            <a:avLst/>
-          </a:prstGeom>
-        </p:spPr>
-        <p:txBody>
-          <a:bodyPr vert="horz" lIns="91440" tIns="45720" rIns="91440" bIns="45720" rtlCol="0" anchor="ctr"/>
-          <a:lstStyle>
-            <a:lvl1pPr algn="ctr">
-              <a:defRPr sz="1200">
-                <a:solidFill>
-                  <a:schemeClr val="tx1">
-                    <a:tint val="82000"/>
-                  </a:schemeClr>
-                </a:solidFill>
-              </a:defRPr>
-            </a:lvl1pPr>
-          </a:lstStyle>
-          <a:p>
-            <a:endParaRPr lang="en-AU"/>
+            <a:endParaRPr lang="en-AU" dirty="0"/>
           </a:p>
         </p:txBody>
       </p:sp>
@@ -3578,6 +3975,136 @@
               <a:t>‹#›</a:t>
             </a:fld>
             <a:endParaRPr lang="en-AU"/>
+          </a:p>
+        </p:txBody>
+      </p:sp>
+      <p:pic>
+        <p:nvPicPr>
+          <p:cNvPr id="8" name="Picture 7">
+            <a:extLst>
+              <a:ext uri="{FF2B5EF4-FFF2-40B4-BE49-F238E27FC236}">
+                <a16:creationId xmlns:a16="http://schemas.microsoft.com/office/drawing/2014/main" id="{DADA0395-9ED2-78C5-484A-4FCF105B3ABC}"/>
+              </a:ext>
+            </a:extLst>
+          </p:cNvPr>
+          <p:cNvPicPr>
+            <a:picLocks noChangeAspect="1"/>
+          </p:cNvPicPr>
+          <p:nvPr userDrawn="1"/>
+        </p:nvPicPr>
+        <p:blipFill>
+          <a:blip r:embed="rId15">
+            <a:alphaModFix amt="33000"/>
+            <a:extLst>
+              <a:ext uri="{28A0092B-C50C-407E-A947-70E740481C1C}">
+                <a14:useLocalDpi xmlns:a14="http://schemas.microsoft.com/office/drawing/2010/main" val="0"/>
+              </a:ext>
+            </a:extLst>
+          </a:blip>
+          <a:stretch>
+            <a:fillRect/>
+          </a:stretch>
+        </p:blipFill>
+        <p:spPr>
+          <a:xfrm>
+            <a:off x="0" y="6176963"/>
+            <a:ext cx="712122" cy="681037"/>
+          </a:xfrm>
+          <a:prstGeom prst="rect">
+            <a:avLst/>
+          </a:prstGeom>
+        </p:spPr>
+      </p:pic>
+      <p:sp>
+        <p:nvSpPr>
+          <p:cNvPr id="9" name="TextBox 8">
+            <a:extLst>
+              <a:ext uri="{FF2B5EF4-FFF2-40B4-BE49-F238E27FC236}">
+                <a16:creationId xmlns:a16="http://schemas.microsoft.com/office/drawing/2014/main" id="{F929FC86-91F7-F285-BD91-1C32C5361404}"/>
+              </a:ext>
+            </a:extLst>
+          </p:cNvPr>
+          <p:cNvSpPr txBox="1"/>
+          <p:nvPr userDrawn="1"/>
+        </p:nvSpPr>
+        <p:spPr>
+          <a:xfrm>
+            <a:off x="838200" y="6332815"/>
+            <a:ext cx="1707776" cy="369332"/>
+          </a:xfrm>
+          <a:prstGeom prst="rect">
+            <a:avLst/>
+          </a:prstGeom>
+          <a:noFill/>
+        </p:spPr>
+        <p:txBody>
+          <a:bodyPr wrap="square" rtlCol="0">
+            <a:spAutoFit/>
+          </a:bodyPr>
+          <a:lstStyle/>
+          <a:p>
+            <a:r>
+              <a:rPr lang="en-AU" dirty="0">
+                <a:solidFill>
+                  <a:schemeClr val="tx1">
+                    <a:alpha val="50000"/>
+                  </a:schemeClr>
+                </a:solidFill>
+              </a:rPr>
+              <a:t>Kael Larkin</a:t>
+            </a:r>
+          </a:p>
+        </p:txBody>
+      </p:sp>
+      <p:sp>
+        <p:nvSpPr>
+          <p:cNvPr id="10" name="TextBox 9">
+            <a:extLst>
+              <a:ext uri="{FF2B5EF4-FFF2-40B4-BE49-F238E27FC236}">
+                <a16:creationId xmlns:a16="http://schemas.microsoft.com/office/drawing/2014/main" id="{861674B6-54EC-429E-BE29-E2761FAA9D43}"/>
+              </a:ext>
+            </a:extLst>
+          </p:cNvPr>
+          <p:cNvSpPr txBox="1"/>
+          <p:nvPr userDrawn="1"/>
+        </p:nvSpPr>
+        <p:spPr>
+          <a:xfrm>
+            <a:off x="4881568" y="6332815"/>
+            <a:ext cx="2428863" cy="369332"/>
+          </a:xfrm>
+          <a:prstGeom prst="rect">
+            <a:avLst/>
+          </a:prstGeom>
+          <a:noFill/>
+        </p:spPr>
+        <p:txBody>
+          <a:bodyPr wrap="square" rtlCol="0">
+            <a:spAutoFit/>
+          </a:bodyPr>
+          <a:lstStyle/>
+          <a:p>
+            <a:r>
+              <a:rPr lang="en-AU" sz="1800" kern="1200" dirty="0">
+                <a:solidFill>
+                  <a:schemeClr val="tx1">
+                    <a:alpha val="50000"/>
+                  </a:schemeClr>
+                </a:solidFill>
+                <a:effectLst/>
+                <a:latin typeface="+mn-lt"/>
+                <a:ea typeface="+mn-ea"/>
+                <a:cs typeface="+mn-cs"/>
+              </a:rPr>
+              <a:t>kaels-kabbage.com</a:t>
+            </a:r>
+            <a:endParaRPr lang="en-AU" dirty="0">
+              <a:solidFill>
+                <a:schemeClr val="tx1">
+                  <a:alpha val="50000"/>
+                </a:schemeClr>
+              </a:solidFill>
+            </a:endParaRPr>
           </a:p>
         </p:txBody>
       </p:sp>
@@ -3934,10 +4461,10 @@
       </p:sp>
       <p:sp>
         <p:nvSpPr>
-          <p:cNvPr id="3" name="Subtitle 2">
-            <a:extLst>
-              <a:ext uri="{FF2B5EF4-FFF2-40B4-BE49-F238E27FC236}">
-                <a16:creationId xmlns:a16="http://schemas.microsoft.com/office/drawing/2014/main" id="{77871BF3-E623-AD14-0607-D32F4A250241}"/>
+          <p:cNvPr id="5" name="Subtitle 4">
+            <a:extLst>
+              <a:ext uri="{FF2B5EF4-FFF2-40B4-BE49-F238E27FC236}">
+                <a16:creationId xmlns:a16="http://schemas.microsoft.com/office/drawing/2014/main" id="{9A4D73ED-1128-DE84-5808-018C24476EFE}"/>
               </a:ext>
             </a:extLst>
           </p:cNvPr>
@@ -3953,10 +4480,7 @@
           <a:bodyPr/>
           <a:lstStyle/>
           <a:p>
-            <a:r>
-              <a:rPr lang="en-AU" dirty="0"/>
-              <a:t>????</a:t>
-            </a:r>
+            <a:endParaRPr lang="en-AU"/>
           </a:p>
         </p:txBody>
       </p:sp>
@@ -4091,12 +4615,18 @@
 </p:sld>
 </file>
 
-<file path=ppt/slides/slide2.xml><?xml version="1.0" encoding="utf-8"?>
+<file path=ppt/slides/slide11.xml><?xml version="1.0" encoding="utf-8"?>
 <p:sld xmlns:a="http://schemas.openxmlformats.org/drawingml/2006/main" xmlns:r="http://schemas.openxmlformats.org/officeDocument/2006/relationships" xmlns:p="http://schemas.openxmlformats.org/presentationml/2006/main">
   <p:cSld>
     <p:spTree>
       <p:nvGrpSpPr>
-        <p:cNvPr id="1" name=""/>
+        <p:cNvPr id="1" name="">
+          <a:extLst>
+            <a:ext uri="{FF2B5EF4-FFF2-40B4-BE49-F238E27FC236}">
+              <a16:creationId xmlns:a16="http://schemas.microsoft.com/office/drawing/2014/main" id="{37484902-8920-11A0-FF3C-40DC2F58FA07}"/>
+            </a:ext>
+          </a:extLst>
+        </p:cNvPr>
         <p:cNvGrpSpPr/>
         <p:nvPr/>
       </p:nvGrpSpPr>
@@ -4110,10 +4640,10 @@
       </p:grpSpPr>
       <p:sp>
         <p:nvSpPr>
-          <p:cNvPr id="2" name="Title 1">
-            <a:extLst>
-              <a:ext uri="{FF2B5EF4-FFF2-40B4-BE49-F238E27FC236}">
-                <a16:creationId xmlns:a16="http://schemas.microsoft.com/office/drawing/2014/main" id="{CD3F7941-789A-D1D4-07FB-058A1994A5F7}"/>
+          <p:cNvPr id="4" name="Title 3">
+            <a:extLst>
+              <a:ext uri="{FF2B5EF4-FFF2-40B4-BE49-F238E27FC236}">
+                <a16:creationId xmlns:a16="http://schemas.microsoft.com/office/drawing/2014/main" id="{E1E9EBC8-47E3-6708-6DCF-73C088D2C41D}"/>
               </a:ext>
             </a:extLst>
           </p:cNvPr>
@@ -4121,7 +4651,7 @@
             <a:spLocks noGrp="1"/>
           </p:cNvSpPr>
           <p:nvPr>
-            <p:ph type="title"/>
+            <p:ph type="ctrTitle"/>
           </p:nvPr>
         </p:nvSpPr>
         <p:spPr/>
@@ -4131,17 +4661,24 @@
           <a:p>
             <a:r>
               <a:rPr lang="en-AU" dirty="0"/>
-              <a:t>Onboarding: Past and future?</a:t>
-            </a:r>
-          </a:p>
-        </p:txBody>
-      </p:sp>
-      <p:sp>
-        <p:nvSpPr>
-          <p:cNvPr id="3" name="Content Placeholder 2">
-            <a:extLst>
-              <a:ext uri="{FF2B5EF4-FFF2-40B4-BE49-F238E27FC236}">
-                <a16:creationId xmlns:a16="http://schemas.microsoft.com/office/drawing/2014/main" id="{4F6DDED4-13CE-6445-8833-E8B7E053405C}"/>
+              <a:t>Give it a go </a:t>
+            </a:r>
+            <a:r>
+              <a:rPr lang="en-AU" dirty="0">
+                <a:sym typeface="Wingdings" panose="05000000000000000000" pitchFamily="2" charset="2"/>
+              </a:rPr>
+              <a:t></a:t>
+            </a:r>
+            <a:endParaRPr lang="en-AU" dirty="0"/>
+          </a:p>
+        </p:txBody>
+      </p:sp>
+      <p:sp>
+        <p:nvSpPr>
+          <p:cNvPr id="5" name="Subtitle 4">
+            <a:extLst>
+              <a:ext uri="{FF2B5EF4-FFF2-40B4-BE49-F238E27FC236}">
+                <a16:creationId xmlns:a16="http://schemas.microsoft.com/office/drawing/2014/main" id="{29CF4B11-C11F-F96A-36AE-1387B69F3A18}"/>
               </a:ext>
             </a:extLst>
           </p:cNvPr>
@@ -4149,260 +4686,22 @@
             <a:spLocks noGrp="1"/>
           </p:cNvSpPr>
           <p:nvPr>
-            <p:ph idx="1"/>
+            <p:ph type="subTitle" idx="1"/>
           </p:nvPr>
         </p:nvSpPr>
-        <p:spPr>
-          <a:xfrm>
-            <a:off x="838200" y="1825625"/>
-            <a:ext cx="4728882" cy="4351338"/>
-          </a:xfrm>
-        </p:spPr>
+        <p:spPr/>
         <p:txBody>
           <a:bodyPr/>
           <a:lstStyle/>
           <a:p>
-            <a:pPr marL="0" indent="0">
-              <a:buNone/>
-            </a:pPr>
-            <a:r>
-              <a:rPr lang="en-AU" b="1" dirty="0"/>
-              <a:t>Past</a:t>
-            </a:r>
-          </a:p>
-          <a:p>
-            <a:r>
-              <a:rPr lang="en-AU" dirty="0"/>
-              <a:t>ResetTheWorld.ps1</a:t>
-            </a:r>
-          </a:p>
-          <a:p>
-            <a:r>
-              <a:rPr lang="en-AU" dirty="0"/>
-              <a:t>Detailed Readme</a:t>
-            </a:r>
-          </a:p>
-          <a:p>
-            <a:r>
-              <a:rPr lang="en-AU" dirty="0"/>
-              <a:t>Startup profiles in VS/Rider</a:t>
-            </a:r>
-          </a:p>
-        </p:txBody>
-      </p:sp>
-      <p:sp>
-        <p:nvSpPr>
-          <p:cNvPr id="4" name="Content Placeholder 2">
-            <a:extLst>
-              <a:ext uri="{FF2B5EF4-FFF2-40B4-BE49-F238E27FC236}">
-                <a16:creationId xmlns:a16="http://schemas.microsoft.com/office/drawing/2014/main" id="{D57DF8E3-EBFE-A882-9A5A-A9592599BBEB}"/>
-              </a:ext>
-            </a:extLst>
-          </p:cNvPr>
-          <p:cNvSpPr txBox="1">
-            <a:spLocks/>
-          </p:cNvSpPr>
-          <p:nvPr/>
-        </p:nvSpPr>
-        <p:spPr>
-          <a:xfrm>
-            <a:off x="6624920" y="1825625"/>
-            <a:ext cx="4728882" cy="4351338"/>
-          </a:xfrm>
-          <a:prstGeom prst="rect">
-            <a:avLst/>
-          </a:prstGeom>
-        </p:spPr>
-        <p:txBody>
-          <a:bodyPr vert="horz" lIns="91440" tIns="45720" rIns="91440" bIns="45720" rtlCol="0">
-            <a:normAutofit/>
-          </a:bodyPr>
-          <a:lstStyle>
-            <a:lvl1pPr marL="228600" indent="-228600" algn="l" defTabSz="914400" rtl="0" eaLnBrk="1" latinLnBrk="0" hangingPunct="1">
-              <a:lnSpc>
-                <a:spcPct val="90000"/>
-              </a:lnSpc>
-              <a:spcBef>
-                <a:spcPts val="1000"/>
-              </a:spcBef>
-              <a:buFont typeface="Arial" panose="020B0604020202020204" pitchFamily="34" charset="0"/>
-              <a:buChar char="•"/>
-              <a:defRPr sz="2800" kern="1200">
-                <a:solidFill>
-                  <a:schemeClr val="tx1"/>
-                </a:solidFill>
-                <a:latin typeface="+mn-lt"/>
-                <a:ea typeface="+mn-ea"/>
-                <a:cs typeface="+mn-cs"/>
-              </a:defRPr>
-            </a:lvl1pPr>
-            <a:lvl2pPr marL="685800" indent="-228600" algn="l" defTabSz="914400" rtl="0" eaLnBrk="1" latinLnBrk="0" hangingPunct="1">
-              <a:lnSpc>
-                <a:spcPct val="90000"/>
-              </a:lnSpc>
-              <a:spcBef>
-                <a:spcPts val="500"/>
-              </a:spcBef>
-              <a:buFont typeface="Arial" panose="020B0604020202020204" pitchFamily="34" charset="0"/>
-              <a:buChar char="•"/>
-              <a:defRPr sz="2400" kern="1200">
-                <a:solidFill>
-                  <a:schemeClr val="tx1"/>
-                </a:solidFill>
-                <a:latin typeface="+mn-lt"/>
-                <a:ea typeface="+mn-ea"/>
-                <a:cs typeface="+mn-cs"/>
-              </a:defRPr>
-            </a:lvl2pPr>
-            <a:lvl3pPr marL="1143000" indent="-228600" algn="l" defTabSz="914400" rtl="0" eaLnBrk="1" latinLnBrk="0" hangingPunct="1">
-              <a:lnSpc>
-                <a:spcPct val="90000"/>
-              </a:lnSpc>
-              <a:spcBef>
-                <a:spcPts val="500"/>
-              </a:spcBef>
-              <a:buFont typeface="Arial" panose="020B0604020202020204" pitchFamily="34" charset="0"/>
-              <a:buChar char="•"/>
-              <a:defRPr sz="2000" kern="1200">
-                <a:solidFill>
-                  <a:schemeClr val="tx1"/>
-                </a:solidFill>
-                <a:latin typeface="+mn-lt"/>
-                <a:ea typeface="+mn-ea"/>
-                <a:cs typeface="+mn-cs"/>
-              </a:defRPr>
-            </a:lvl3pPr>
-            <a:lvl4pPr marL="1600200" indent="-228600" algn="l" defTabSz="914400" rtl="0" eaLnBrk="1" latinLnBrk="0" hangingPunct="1">
-              <a:lnSpc>
-                <a:spcPct val="90000"/>
-              </a:lnSpc>
-              <a:spcBef>
-                <a:spcPts val="500"/>
-              </a:spcBef>
-              <a:buFont typeface="Arial" panose="020B0604020202020204" pitchFamily="34" charset="0"/>
-              <a:buChar char="•"/>
-              <a:defRPr sz="1800" kern="1200">
-                <a:solidFill>
-                  <a:schemeClr val="tx1"/>
-                </a:solidFill>
-                <a:latin typeface="+mn-lt"/>
-                <a:ea typeface="+mn-ea"/>
-                <a:cs typeface="+mn-cs"/>
-              </a:defRPr>
-            </a:lvl4pPr>
-            <a:lvl5pPr marL="2057400" indent="-228600" algn="l" defTabSz="914400" rtl="0" eaLnBrk="1" latinLnBrk="0" hangingPunct="1">
-              <a:lnSpc>
-                <a:spcPct val="90000"/>
-              </a:lnSpc>
-              <a:spcBef>
-                <a:spcPts val="500"/>
-              </a:spcBef>
-              <a:buFont typeface="Arial" panose="020B0604020202020204" pitchFamily="34" charset="0"/>
-              <a:buChar char="•"/>
-              <a:defRPr sz="1800" kern="1200">
-                <a:solidFill>
-                  <a:schemeClr val="tx1"/>
-                </a:solidFill>
-                <a:latin typeface="+mn-lt"/>
-                <a:ea typeface="+mn-ea"/>
-                <a:cs typeface="+mn-cs"/>
-              </a:defRPr>
-            </a:lvl5pPr>
-            <a:lvl6pPr marL="2514600" indent="-228600" algn="l" defTabSz="914400" rtl="0" eaLnBrk="1" latinLnBrk="0" hangingPunct="1">
-              <a:lnSpc>
-                <a:spcPct val="90000"/>
-              </a:lnSpc>
-              <a:spcBef>
-                <a:spcPts val="500"/>
-              </a:spcBef>
-              <a:buFont typeface="Arial" panose="020B0604020202020204" pitchFamily="34" charset="0"/>
-              <a:buChar char="•"/>
-              <a:defRPr sz="1800" kern="1200">
-                <a:solidFill>
-                  <a:schemeClr val="tx1"/>
-                </a:solidFill>
-                <a:latin typeface="+mn-lt"/>
-                <a:ea typeface="+mn-ea"/>
-                <a:cs typeface="+mn-cs"/>
-              </a:defRPr>
-            </a:lvl6pPr>
-            <a:lvl7pPr marL="2971800" indent="-228600" algn="l" defTabSz="914400" rtl="0" eaLnBrk="1" latinLnBrk="0" hangingPunct="1">
-              <a:lnSpc>
-                <a:spcPct val="90000"/>
-              </a:lnSpc>
-              <a:spcBef>
-                <a:spcPts val="500"/>
-              </a:spcBef>
-              <a:buFont typeface="Arial" panose="020B0604020202020204" pitchFamily="34" charset="0"/>
-              <a:buChar char="•"/>
-              <a:defRPr sz="1800" kern="1200">
-                <a:solidFill>
-                  <a:schemeClr val="tx1"/>
-                </a:solidFill>
-                <a:latin typeface="+mn-lt"/>
-                <a:ea typeface="+mn-ea"/>
-                <a:cs typeface="+mn-cs"/>
-              </a:defRPr>
-            </a:lvl7pPr>
-            <a:lvl8pPr marL="3429000" indent="-228600" algn="l" defTabSz="914400" rtl="0" eaLnBrk="1" latinLnBrk="0" hangingPunct="1">
-              <a:lnSpc>
-                <a:spcPct val="90000"/>
-              </a:lnSpc>
-              <a:spcBef>
-                <a:spcPts val="500"/>
-              </a:spcBef>
-              <a:buFont typeface="Arial" panose="020B0604020202020204" pitchFamily="34" charset="0"/>
-              <a:buChar char="•"/>
-              <a:defRPr sz="1800" kern="1200">
-                <a:solidFill>
-                  <a:schemeClr val="tx1"/>
-                </a:solidFill>
-                <a:latin typeface="+mn-lt"/>
-                <a:ea typeface="+mn-ea"/>
-                <a:cs typeface="+mn-cs"/>
-              </a:defRPr>
-            </a:lvl8pPr>
-            <a:lvl9pPr marL="3886200" indent="-228600" algn="l" defTabSz="914400" rtl="0" eaLnBrk="1" latinLnBrk="0" hangingPunct="1">
-              <a:lnSpc>
-                <a:spcPct val="90000"/>
-              </a:lnSpc>
-              <a:spcBef>
-                <a:spcPts val="500"/>
-              </a:spcBef>
-              <a:buFont typeface="Arial" panose="020B0604020202020204" pitchFamily="34" charset="0"/>
-              <a:buChar char="•"/>
-              <a:defRPr sz="1800" kern="1200">
-                <a:solidFill>
-                  <a:schemeClr val="tx1"/>
-                </a:solidFill>
-                <a:latin typeface="+mn-lt"/>
-                <a:ea typeface="+mn-ea"/>
-                <a:cs typeface="+mn-cs"/>
-              </a:defRPr>
-            </a:lvl9pPr>
-          </a:lstStyle>
-          <a:p>
-            <a:pPr marL="0" indent="0">
-              <a:buFont typeface="Arial" panose="020B0604020202020204" pitchFamily="34" charset="0"/>
-              <a:buNone/>
-            </a:pPr>
-            <a:r>
-              <a:rPr lang="en-AU" b="1" dirty="0"/>
-              <a:t>Future?</a:t>
-            </a:r>
-          </a:p>
-          <a:p>
-            <a:r>
-              <a:rPr lang="en-AU" dirty="0"/>
-              <a:t>Aspire ✨</a:t>
-            </a:r>
+            <a:endParaRPr lang="en-AU" dirty="0"/>
           </a:p>
         </p:txBody>
       </p:sp>
     </p:spTree>
     <p:extLst>
       <p:ext uri="{BB962C8B-B14F-4D97-AF65-F5344CB8AC3E}">
-        <p14:creationId xmlns:p14="http://schemas.microsoft.com/office/powerpoint/2010/main" val="2902774191"/>
+        <p14:creationId xmlns:p14="http://schemas.microsoft.com/office/powerpoint/2010/main" val="1243151798"/>
       </p:ext>
     </p:extLst>
   </p:cSld>
@@ -4412,7 +4711,7 @@
 </p:sld>
 </file>
 
-<file path=ppt/slides/slide3.xml><?xml version="1.0" encoding="utf-8"?>
+<file path=ppt/slides/slide2.xml><?xml version="1.0" encoding="utf-8"?>
 <p:sld xmlns:a="http://schemas.openxmlformats.org/drawingml/2006/main" xmlns:r="http://schemas.openxmlformats.org/officeDocument/2006/relationships" xmlns:p="http://schemas.openxmlformats.org/presentationml/2006/main">
   <p:cSld>
     <p:bg>
@@ -4542,7 +4841,7 @@
         </p:nvSpPr>
         <p:spPr>
           <a:xfrm>
-            <a:off x="3034553" y="3258185"/>
+            <a:off x="838199" y="3417832"/>
             <a:ext cx="3959711" cy="616361"/>
           </a:xfrm>
           <a:prstGeom prst="rect">
@@ -4740,8 +5039,8 @@
           <p:nvPr/>
         </p:nvSpPr>
         <p:spPr>
-          <a:xfrm rot="19654451">
-            <a:off x="7139044" y="1696029"/>
+          <a:xfrm rot="20103001">
+            <a:off x="7668286" y="2077552"/>
             <a:ext cx="3959711" cy="616361"/>
           </a:xfrm>
           <a:prstGeom prst="rect">
@@ -4939,9 +5238,9 @@
           <p:nvPr/>
         </p:nvSpPr>
         <p:spPr>
-          <a:xfrm>
-            <a:off x="5919394" y="4238924"/>
-            <a:ext cx="3959711" cy="616361"/>
+          <a:xfrm rot="21040663">
+            <a:off x="6288773" y="4470532"/>
+            <a:ext cx="4060338" cy="676776"/>
           </a:xfrm>
           <a:prstGeom prst="rect">
             <a:avLst/>
@@ -5138,8 +5437,8 @@
           <p:nvPr/>
         </p:nvSpPr>
         <p:spPr>
-          <a:xfrm>
-            <a:off x="1054697" y="4690745"/>
+          <a:xfrm rot="953687">
+            <a:off x="592973" y="4824141"/>
             <a:ext cx="3959711" cy="616361"/>
           </a:xfrm>
           <a:prstGeom prst="rect">
@@ -5337,8 +5636,207 @@
           <p:nvPr/>
         </p:nvSpPr>
         <p:spPr>
-          <a:xfrm rot="685514">
-            <a:off x="6038626" y="2850085"/>
+          <a:xfrm rot="20857800">
+            <a:off x="2388402" y="3936806"/>
+            <a:ext cx="3959711" cy="513241"/>
+          </a:xfrm>
+          <a:prstGeom prst="rect">
+            <a:avLst/>
+          </a:prstGeom>
+        </p:spPr>
+        <p:txBody>
+          <a:bodyPr vert="horz" lIns="91440" tIns="45720" rIns="91440" bIns="45720" rtlCol="0">
+            <a:normAutofit fontScale="92500"/>
+          </a:bodyPr>
+          <a:lstStyle>
+            <a:lvl1pPr marL="228600" indent="-228600" algn="l" defTabSz="914400" rtl="0" eaLnBrk="1" latinLnBrk="0" hangingPunct="1">
+              <a:lnSpc>
+                <a:spcPct val="90000"/>
+              </a:lnSpc>
+              <a:spcBef>
+                <a:spcPts val="1000"/>
+              </a:spcBef>
+              <a:buFont typeface="Arial" panose="020B0604020202020204" pitchFamily="34" charset="0"/>
+              <a:buChar char="•"/>
+              <a:defRPr sz="2800" kern="1200">
+                <a:solidFill>
+                  <a:schemeClr val="tx1"/>
+                </a:solidFill>
+                <a:latin typeface="+mn-lt"/>
+                <a:ea typeface="+mn-ea"/>
+                <a:cs typeface="+mn-cs"/>
+              </a:defRPr>
+            </a:lvl1pPr>
+            <a:lvl2pPr marL="685800" indent="-228600" algn="l" defTabSz="914400" rtl="0" eaLnBrk="1" latinLnBrk="0" hangingPunct="1">
+              <a:lnSpc>
+                <a:spcPct val="90000"/>
+              </a:lnSpc>
+              <a:spcBef>
+                <a:spcPts val="500"/>
+              </a:spcBef>
+              <a:buFont typeface="Arial" panose="020B0604020202020204" pitchFamily="34" charset="0"/>
+              <a:buChar char="•"/>
+              <a:defRPr sz="2400" kern="1200">
+                <a:solidFill>
+                  <a:schemeClr val="tx1"/>
+                </a:solidFill>
+                <a:latin typeface="+mn-lt"/>
+                <a:ea typeface="+mn-ea"/>
+                <a:cs typeface="+mn-cs"/>
+              </a:defRPr>
+            </a:lvl2pPr>
+            <a:lvl3pPr marL="1143000" indent="-228600" algn="l" defTabSz="914400" rtl="0" eaLnBrk="1" latinLnBrk="0" hangingPunct="1">
+              <a:lnSpc>
+                <a:spcPct val="90000"/>
+              </a:lnSpc>
+              <a:spcBef>
+                <a:spcPts val="500"/>
+              </a:spcBef>
+              <a:buFont typeface="Arial" panose="020B0604020202020204" pitchFamily="34" charset="0"/>
+              <a:buChar char="•"/>
+              <a:defRPr sz="2000" kern="1200">
+                <a:solidFill>
+                  <a:schemeClr val="tx1"/>
+                </a:solidFill>
+                <a:latin typeface="+mn-lt"/>
+                <a:ea typeface="+mn-ea"/>
+                <a:cs typeface="+mn-cs"/>
+              </a:defRPr>
+            </a:lvl3pPr>
+            <a:lvl4pPr marL="1600200" indent="-228600" algn="l" defTabSz="914400" rtl="0" eaLnBrk="1" latinLnBrk="0" hangingPunct="1">
+              <a:lnSpc>
+                <a:spcPct val="90000"/>
+              </a:lnSpc>
+              <a:spcBef>
+                <a:spcPts val="500"/>
+              </a:spcBef>
+              <a:buFont typeface="Arial" panose="020B0604020202020204" pitchFamily="34" charset="0"/>
+              <a:buChar char="•"/>
+              <a:defRPr sz="1800" kern="1200">
+                <a:solidFill>
+                  <a:schemeClr val="tx1"/>
+                </a:solidFill>
+                <a:latin typeface="+mn-lt"/>
+                <a:ea typeface="+mn-ea"/>
+                <a:cs typeface="+mn-cs"/>
+              </a:defRPr>
+            </a:lvl4pPr>
+            <a:lvl5pPr marL="2057400" indent="-228600" algn="l" defTabSz="914400" rtl="0" eaLnBrk="1" latinLnBrk="0" hangingPunct="1">
+              <a:lnSpc>
+                <a:spcPct val="90000"/>
+              </a:lnSpc>
+              <a:spcBef>
+                <a:spcPts val="500"/>
+              </a:spcBef>
+              <a:buFont typeface="Arial" panose="020B0604020202020204" pitchFamily="34" charset="0"/>
+              <a:buChar char="•"/>
+              <a:defRPr sz="1800" kern="1200">
+                <a:solidFill>
+                  <a:schemeClr val="tx1"/>
+                </a:solidFill>
+                <a:latin typeface="+mn-lt"/>
+                <a:ea typeface="+mn-ea"/>
+                <a:cs typeface="+mn-cs"/>
+              </a:defRPr>
+            </a:lvl5pPr>
+            <a:lvl6pPr marL="2514600" indent="-228600" algn="l" defTabSz="914400" rtl="0" eaLnBrk="1" latinLnBrk="0" hangingPunct="1">
+              <a:lnSpc>
+                <a:spcPct val="90000"/>
+              </a:lnSpc>
+              <a:spcBef>
+                <a:spcPts val="500"/>
+              </a:spcBef>
+              <a:buFont typeface="Arial" panose="020B0604020202020204" pitchFamily="34" charset="0"/>
+              <a:buChar char="•"/>
+              <a:defRPr sz="1800" kern="1200">
+                <a:solidFill>
+                  <a:schemeClr val="tx1"/>
+                </a:solidFill>
+                <a:latin typeface="+mn-lt"/>
+                <a:ea typeface="+mn-ea"/>
+                <a:cs typeface="+mn-cs"/>
+              </a:defRPr>
+            </a:lvl6pPr>
+            <a:lvl7pPr marL="2971800" indent="-228600" algn="l" defTabSz="914400" rtl="0" eaLnBrk="1" latinLnBrk="0" hangingPunct="1">
+              <a:lnSpc>
+                <a:spcPct val="90000"/>
+              </a:lnSpc>
+              <a:spcBef>
+                <a:spcPts val="500"/>
+              </a:spcBef>
+              <a:buFont typeface="Arial" panose="020B0604020202020204" pitchFamily="34" charset="0"/>
+              <a:buChar char="•"/>
+              <a:defRPr sz="1800" kern="1200">
+                <a:solidFill>
+                  <a:schemeClr val="tx1"/>
+                </a:solidFill>
+                <a:latin typeface="+mn-lt"/>
+                <a:ea typeface="+mn-ea"/>
+                <a:cs typeface="+mn-cs"/>
+              </a:defRPr>
+            </a:lvl7pPr>
+            <a:lvl8pPr marL="3429000" indent="-228600" algn="l" defTabSz="914400" rtl="0" eaLnBrk="1" latinLnBrk="0" hangingPunct="1">
+              <a:lnSpc>
+                <a:spcPct val="90000"/>
+              </a:lnSpc>
+              <a:spcBef>
+                <a:spcPts val="500"/>
+              </a:spcBef>
+              <a:buFont typeface="Arial" panose="020B0604020202020204" pitchFamily="34" charset="0"/>
+              <a:buChar char="•"/>
+              <a:defRPr sz="1800" kern="1200">
+                <a:solidFill>
+                  <a:schemeClr val="tx1"/>
+                </a:solidFill>
+                <a:latin typeface="+mn-lt"/>
+                <a:ea typeface="+mn-ea"/>
+                <a:cs typeface="+mn-cs"/>
+              </a:defRPr>
+            </a:lvl8pPr>
+            <a:lvl9pPr marL="3886200" indent="-228600" algn="l" defTabSz="914400" rtl="0" eaLnBrk="1" latinLnBrk="0" hangingPunct="1">
+              <a:lnSpc>
+                <a:spcPct val="90000"/>
+              </a:lnSpc>
+              <a:spcBef>
+                <a:spcPts val="500"/>
+              </a:spcBef>
+              <a:buFont typeface="Arial" panose="020B0604020202020204" pitchFamily="34" charset="0"/>
+              <a:buChar char="•"/>
+              <a:defRPr sz="1800" kern="1200">
+                <a:solidFill>
+                  <a:schemeClr val="tx1"/>
+                </a:solidFill>
+                <a:latin typeface="+mn-lt"/>
+                <a:ea typeface="+mn-ea"/>
+                <a:cs typeface="+mn-cs"/>
+              </a:defRPr>
+            </a:lvl9pPr>
+          </a:lstStyle>
+          <a:p>
+            <a:r>
+              <a:rPr lang="en-AU" dirty="0"/>
+              <a:t>Where does logging go?</a:t>
+            </a:r>
+          </a:p>
+        </p:txBody>
+      </p:sp>
+      <p:sp>
+        <p:nvSpPr>
+          <p:cNvPr id="11" name="Content Placeholder 2">
+            <a:extLst>
+              <a:ext uri="{FF2B5EF4-FFF2-40B4-BE49-F238E27FC236}">
+                <a16:creationId xmlns:a16="http://schemas.microsoft.com/office/drawing/2014/main" id="{160FA0AE-60C5-CE8D-D461-2C3057D62FE7}"/>
+              </a:ext>
+            </a:extLst>
+          </p:cNvPr>
+          <p:cNvSpPr txBox="1">
+            <a:spLocks/>
+          </p:cNvSpPr>
+          <p:nvPr/>
+        </p:nvSpPr>
+        <p:spPr>
+          <a:xfrm>
+            <a:off x="838198" y="2946428"/>
             <a:ext cx="3959711" cy="616361"/>
           </a:xfrm>
           <a:prstGeom prst="rect">
@@ -5516,17 +6014,17 @@
           <a:p>
             <a:r>
               <a:rPr lang="en-AU" dirty="0"/>
-              <a:t>Logging</a:t>
-            </a:r>
-          </a:p>
-        </p:txBody>
-      </p:sp>
-      <p:sp>
-        <p:nvSpPr>
-          <p:cNvPr id="11" name="Content Placeholder 2">
-            <a:extLst>
-              <a:ext uri="{FF2B5EF4-FFF2-40B4-BE49-F238E27FC236}">
-                <a16:creationId xmlns:a16="http://schemas.microsoft.com/office/drawing/2014/main" id="{160FA0AE-60C5-CE8D-D461-2C3057D62FE7}"/>
+              <a:t>Database setup?</a:t>
+            </a:r>
+          </a:p>
+        </p:txBody>
+      </p:sp>
+      <p:sp>
+        <p:nvSpPr>
+          <p:cNvPr id="12" name="Content Placeholder 2">
+            <a:extLst>
+              <a:ext uri="{FF2B5EF4-FFF2-40B4-BE49-F238E27FC236}">
+                <a16:creationId xmlns:a16="http://schemas.microsoft.com/office/drawing/2014/main" id="{CEE9849C-F93C-AC20-76A0-3E6006002AE5}"/>
               </a:ext>
             </a:extLst>
           </p:cNvPr>
@@ -5537,7 +6035,7 @@
         </p:nvSpPr>
         <p:spPr>
           <a:xfrm>
-            <a:off x="1250577" y="2441985"/>
+            <a:off x="1084043" y="5471701"/>
             <a:ext cx="3959711" cy="616361"/>
           </a:xfrm>
           <a:prstGeom prst="rect">
@@ -5715,17 +6213,17 @@
           <a:p>
             <a:r>
               <a:rPr lang="en-AU" dirty="0"/>
-              <a:t>Database setup</a:t>
-            </a:r>
-          </a:p>
-        </p:txBody>
-      </p:sp>
-      <p:sp>
-        <p:nvSpPr>
-          <p:cNvPr id="12" name="Content Placeholder 2">
-            <a:extLst>
-              <a:ext uri="{FF2B5EF4-FFF2-40B4-BE49-F238E27FC236}">
-                <a16:creationId xmlns:a16="http://schemas.microsoft.com/office/drawing/2014/main" id="{CEE9849C-F93C-AC20-76A0-3E6006002AE5}"/>
+              <a:t>Run the things</a:t>
+            </a:r>
+          </a:p>
+        </p:txBody>
+      </p:sp>
+      <p:sp>
+        <p:nvSpPr>
+          <p:cNvPr id="13" name="Content Placeholder 2">
+            <a:extLst>
+              <a:ext uri="{FF2B5EF4-FFF2-40B4-BE49-F238E27FC236}">
+                <a16:creationId xmlns:a16="http://schemas.microsoft.com/office/drawing/2014/main" id="{14E4B71E-5219-7D0F-6F58-5B3B171EA550}"/>
               </a:ext>
             </a:extLst>
           </p:cNvPr>
@@ -5735,8 +6233,8 @@
           <p:nvPr/>
         </p:nvSpPr>
         <p:spPr>
-          <a:xfrm>
-            <a:off x="870024" y="3874545"/>
+          <a:xfrm rot="897683">
+            <a:off x="5543183" y="3458632"/>
             <a:ext cx="3959711" cy="616361"/>
           </a:xfrm>
           <a:prstGeom prst="rect">
@@ -5914,17 +6412,17 @@
           <a:p>
             <a:r>
               <a:rPr lang="en-AU" dirty="0"/>
-              <a:t>Run the things</a:t>
-            </a:r>
-          </a:p>
-        </p:txBody>
-      </p:sp>
-      <p:sp>
-        <p:nvSpPr>
-          <p:cNvPr id="13" name="Content Placeholder 2">
-            <a:extLst>
-              <a:ext uri="{FF2B5EF4-FFF2-40B4-BE49-F238E27FC236}">
-                <a16:creationId xmlns:a16="http://schemas.microsoft.com/office/drawing/2014/main" id="{14E4B71E-5219-7D0F-6F58-5B3B171EA550}"/>
+              <a:t>Debug the things</a:t>
+            </a:r>
+          </a:p>
+        </p:txBody>
+      </p:sp>
+      <p:sp>
+        <p:nvSpPr>
+          <p:cNvPr id="4" name="Content Placeholder 2">
+            <a:extLst>
+              <a:ext uri="{FF2B5EF4-FFF2-40B4-BE49-F238E27FC236}">
+                <a16:creationId xmlns:a16="http://schemas.microsoft.com/office/drawing/2014/main" id="{6AF40EB4-DE9D-E03F-A064-0AD884D0B886}"/>
               </a:ext>
             </a:extLst>
           </p:cNvPr>
@@ -5934,8 +6432,215 @@
           <p:nvPr/>
         </p:nvSpPr>
         <p:spPr>
+          <a:xfrm rot="439671">
+            <a:off x="3998417" y="2050929"/>
+            <a:ext cx="4195163" cy="748132"/>
+          </a:xfrm>
+          <a:prstGeom prst="rect">
+            <a:avLst/>
+          </a:prstGeom>
+        </p:spPr>
+        <p:txBody>
+          <a:bodyPr vert="horz" lIns="91440" tIns="45720" rIns="91440" bIns="45720" rtlCol="0">
+            <a:normAutofit fontScale="77500" lnSpcReduction="20000"/>
+          </a:bodyPr>
+          <a:lstStyle>
+            <a:lvl1pPr marL="228600" indent="-228600" algn="l" defTabSz="914400" rtl="0" eaLnBrk="1" latinLnBrk="0" hangingPunct="1">
+              <a:lnSpc>
+                <a:spcPct val="90000"/>
+              </a:lnSpc>
+              <a:spcBef>
+                <a:spcPts val="1000"/>
+              </a:spcBef>
+              <a:buFont typeface="Arial" panose="020B0604020202020204" pitchFamily="34" charset="0"/>
+              <a:buChar char="•"/>
+              <a:defRPr sz="2800" kern="1200">
+                <a:solidFill>
+                  <a:schemeClr val="tx1"/>
+                </a:solidFill>
+                <a:latin typeface="+mn-lt"/>
+                <a:ea typeface="+mn-ea"/>
+                <a:cs typeface="+mn-cs"/>
+              </a:defRPr>
+            </a:lvl1pPr>
+            <a:lvl2pPr marL="685800" indent="-228600" algn="l" defTabSz="914400" rtl="0" eaLnBrk="1" latinLnBrk="0" hangingPunct="1">
+              <a:lnSpc>
+                <a:spcPct val="90000"/>
+              </a:lnSpc>
+              <a:spcBef>
+                <a:spcPts val="500"/>
+              </a:spcBef>
+              <a:buFont typeface="Arial" panose="020B0604020202020204" pitchFamily="34" charset="0"/>
+              <a:buChar char="•"/>
+              <a:defRPr sz="2400" kern="1200">
+                <a:solidFill>
+                  <a:schemeClr val="tx1"/>
+                </a:solidFill>
+                <a:latin typeface="+mn-lt"/>
+                <a:ea typeface="+mn-ea"/>
+                <a:cs typeface="+mn-cs"/>
+              </a:defRPr>
+            </a:lvl2pPr>
+            <a:lvl3pPr marL="1143000" indent="-228600" algn="l" defTabSz="914400" rtl="0" eaLnBrk="1" latinLnBrk="0" hangingPunct="1">
+              <a:lnSpc>
+                <a:spcPct val="90000"/>
+              </a:lnSpc>
+              <a:spcBef>
+                <a:spcPts val="500"/>
+              </a:spcBef>
+              <a:buFont typeface="Arial" panose="020B0604020202020204" pitchFamily="34" charset="0"/>
+              <a:buChar char="•"/>
+              <a:defRPr sz="2000" kern="1200">
+                <a:solidFill>
+                  <a:schemeClr val="tx1"/>
+                </a:solidFill>
+                <a:latin typeface="+mn-lt"/>
+                <a:ea typeface="+mn-ea"/>
+                <a:cs typeface="+mn-cs"/>
+              </a:defRPr>
+            </a:lvl3pPr>
+            <a:lvl4pPr marL="1600200" indent="-228600" algn="l" defTabSz="914400" rtl="0" eaLnBrk="1" latinLnBrk="0" hangingPunct="1">
+              <a:lnSpc>
+                <a:spcPct val="90000"/>
+              </a:lnSpc>
+              <a:spcBef>
+                <a:spcPts val="500"/>
+              </a:spcBef>
+              <a:buFont typeface="Arial" panose="020B0604020202020204" pitchFamily="34" charset="0"/>
+              <a:buChar char="•"/>
+              <a:defRPr sz="1800" kern="1200">
+                <a:solidFill>
+                  <a:schemeClr val="tx1"/>
+                </a:solidFill>
+                <a:latin typeface="+mn-lt"/>
+                <a:ea typeface="+mn-ea"/>
+                <a:cs typeface="+mn-cs"/>
+              </a:defRPr>
+            </a:lvl4pPr>
+            <a:lvl5pPr marL="2057400" indent="-228600" algn="l" defTabSz="914400" rtl="0" eaLnBrk="1" latinLnBrk="0" hangingPunct="1">
+              <a:lnSpc>
+                <a:spcPct val="90000"/>
+              </a:lnSpc>
+              <a:spcBef>
+                <a:spcPts val="500"/>
+              </a:spcBef>
+              <a:buFont typeface="Arial" panose="020B0604020202020204" pitchFamily="34" charset="0"/>
+              <a:buChar char="•"/>
+              <a:defRPr sz="1800" kern="1200">
+                <a:solidFill>
+                  <a:schemeClr val="tx1"/>
+                </a:solidFill>
+                <a:latin typeface="+mn-lt"/>
+                <a:ea typeface="+mn-ea"/>
+                <a:cs typeface="+mn-cs"/>
+              </a:defRPr>
+            </a:lvl5pPr>
+            <a:lvl6pPr marL="2514600" indent="-228600" algn="l" defTabSz="914400" rtl="0" eaLnBrk="1" latinLnBrk="0" hangingPunct="1">
+              <a:lnSpc>
+                <a:spcPct val="90000"/>
+              </a:lnSpc>
+              <a:spcBef>
+                <a:spcPts val="500"/>
+              </a:spcBef>
+              <a:buFont typeface="Arial" panose="020B0604020202020204" pitchFamily="34" charset="0"/>
+              <a:buChar char="•"/>
+              <a:defRPr sz="1800" kern="1200">
+                <a:solidFill>
+                  <a:schemeClr val="tx1"/>
+                </a:solidFill>
+                <a:latin typeface="+mn-lt"/>
+                <a:ea typeface="+mn-ea"/>
+                <a:cs typeface="+mn-cs"/>
+              </a:defRPr>
+            </a:lvl6pPr>
+            <a:lvl7pPr marL="2971800" indent="-228600" algn="l" defTabSz="914400" rtl="0" eaLnBrk="1" latinLnBrk="0" hangingPunct="1">
+              <a:lnSpc>
+                <a:spcPct val="90000"/>
+              </a:lnSpc>
+              <a:spcBef>
+                <a:spcPts val="500"/>
+              </a:spcBef>
+              <a:buFont typeface="Arial" panose="020B0604020202020204" pitchFamily="34" charset="0"/>
+              <a:buChar char="•"/>
+              <a:defRPr sz="1800" kern="1200">
+                <a:solidFill>
+                  <a:schemeClr val="tx1"/>
+                </a:solidFill>
+                <a:latin typeface="+mn-lt"/>
+                <a:ea typeface="+mn-ea"/>
+                <a:cs typeface="+mn-cs"/>
+              </a:defRPr>
+            </a:lvl7pPr>
+            <a:lvl8pPr marL="3429000" indent="-228600" algn="l" defTabSz="914400" rtl="0" eaLnBrk="1" latinLnBrk="0" hangingPunct="1">
+              <a:lnSpc>
+                <a:spcPct val="90000"/>
+              </a:lnSpc>
+              <a:spcBef>
+                <a:spcPts val="500"/>
+              </a:spcBef>
+              <a:buFont typeface="Arial" panose="020B0604020202020204" pitchFamily="34" charset="0"/>
+              <a:buChar char="•"/>
+              <a:defRPr sz="1800" kern="1200">
+                <a:solidFill>
+                  <a:schemeClr val="tx1"/>
+                </a:solidFill>
+                <a:latin typeface="+mn-lt"/>
+                <a:ea typeface="+mn-ea"/>
+                <a:cs typeface="+mn-cs"/>
+              </a:defRPr>
+            </a:lvl8pPr>
+            <a:lvl9pPr marL="3886200" indent="-228600" algn="l" defTabSz="914400" rtl="0" eaLnBrk="1" latinLnBrk="0" hangingPunct="1">
+              <a:lnSpc>
+                <a:spcPct val="90000"/>
+              </a:lnSpc>
+              <a:spcBef>
+                <a:spcPts val="500"/>
+              </a:spcBef>
+              <a:buFont typeface="Arial" panose="020B0604020202020204" pitchFamily="34" charset="0"/>
+              <a:buChar char="•"/>
+              <a:defRPr sz="1800" kern="1200">
+                <a:solidFill>
+                  <a:schemeClr val="tx1"/>
+                </a:solidFill>
+                <a:latin typeface="+mn-lt"/>
+                <a:ea typeface="+mn-ea"/>
+                <a:cs typeface="+mn-cs"/>
+              </a:defRPr>
+            </a:lvl9pPr>
+          </a:lstStyle>
+          <a:p>
+            <a:r>
+              <a:rPr lang="en-US" dirty="0"/>
+              <a:t>Oops wrong connection string in </a:t>
+            </a:r>
+            <a:r>
+              <a:rPr lang="en-US" dirty="0" err="1"/>
+              <a:t>dbup</a:t>
+            </a:r>
+            <a:r>
+              <a:rPr lang="en-US" dirty="0"/>
+              <a:t>, wiped wrong database</a:t>
+            </a:r>
+          </a:p>
+        </p:txBody>
+      </p:sp>
+      <p:sp>
+        <p:nvSpPr>
+          <p:cNvPr id="5" name="Content Placeholder 2">
+            <a:extLst>
+              <a:ext uri="{FF2B5EF4-FFF2-40B4-BE49-F238E27FC236}">
+                <a16:creationId xmlns:a16="http://schemas.microsoft.com/office/drawing/2014/main" id="{A0729745-700A-BCB2-05F4-9FF0F5D92D19}"/>
+              </a:ext>
+            </a:extLst>
+          </p:cNvPr>
+          <p:cNvSpPr txBox="1">
+            <a:spLocks/>
+          </p:cNvSpPr>
+          <p:nvPr/>
+        </p:nvSpPr>
+        <p:spPr>
           <a:xfrm>
-            <a:off x="6771939" y="3340455"/>
+            <a:off x="838198" y="2287318"/>
             <a:ext cx="3959711" cy="616361"/>
           </a:xfrm>
           <a:prstGeom prst="rect">
@@ -6113,7 +6818,7 @@
           <a:p>
             <a:r>
               <a:rPr lang="en-AU" dirty="0"/>
-              <a:t>Debug the things</a:t>
+              <a:t>Wrong node version</a:t>
             </a:r>
           </a:p>
         </p:txBody>
@@ -6128,10 +6833,1415 @@
   <p:clrMapOvr>
     <a:masterClrMapping/>
   </p:clrMapOvr>
+  <p:timing>
+    <p:tnLst>
+      <p:par>
+        <p:cTn id="1" dur="indefinite" restart="never" nodeType="tmRoot">
+          <p:childTnLst>
+            <p:seq concurrent="1" nextAc="seek">
+              <p:cTn id="2" dur="indefinite" nodeType="mainSeq">
+                <p:childTnLst>
+                  <p:par>
+                    <p:cTn id="3" fill="hold">
+                      <p:stCondLst>
+                        <p:cond delay="indefinite"/>
+                      </p:stCondLst>
+                      <p:childTnLst>
+                        <p:par>
+                          <p:cTn id="4" fill="hold">
+                            <p:stCondLst>
+                              <p:cond delay="0"/>
+                            </p:stCondLst>
+                            <p:childTnLst>
+                              <p:par>
+                                <p:cTn id="5" presetID="31" presetClass="entr" presetSubtype="0" fill="hold" grpId="0" nodeType="clickEffect">
+                                  <p:stCondLst>
+                                    <p:cond delay="0"/>
+                                  </p:stCondLst>
+                                  <p:childTnLst>
+                                    <p:set>
+                                      <p:cBhvr>
+                                        <p:cTn id="6" dur="1" fill="hold">
+                                          <p:stCondLst>
+                                            <p:cond delay="0"/>
+                                          </p:stCondLst>
+                                        </p:cTn>
+                                        <p:tgtEl>
+                                          <p:spTgt spid="3">
+                                            <p:txEl>
+                                              <p:pRg st="0" end="0"/>
+                                            </p:txEl>
+                                          </p:spTgt>
+                                        </p:tgtEl>
+                                        <p:attrNameLst>
+                                          <p:attrName>style.visibility</p:attrName>
+                                        </p:attrNameLst>
+                                      </p:cBhvr>
+                                      <p:to>
+                                        <p:strVal val="visible"/>
+                                      </p:to>
+                                    </p:set>
+                                    <p:anim calcmode="lin" valueType="num">
+                                      <p:cBhvr>
+                                        <p:cTn id="7" dur="1000" fill="hold"/>
+                                        <p:tgtEl>
+                                          <p:spTgt spid="3">
+                                            <p:txEl>
+                                              <p:pRg st="0" end="0"/>
+                                            </p:txEl>
+                                          </p:spTgt>
+                                        </p:tgtEl>
+                                        <p:attrNameLst>
+                                          <p:attrName>ppt_w</p:attrName>
+                                        </p:attrNameLst>
+                                      </p:cBhvr>
+                                      <p:tavLst>
+                                        <p:tav tm="0">
+                                          <p:val>
+                                            <p:fltVal val="0"/>
+                                          </p:val>
+                                        </p:tav>
+                                        <p:tav tm="100000">
+                                          <p:val>
+                                            <p:strVal val="#ppt_w"/>
+                                          </p:val>
+                                        </p:tav>
+                                      </p:tavLst>
+                                    </p:anim>
+                                    <p:anim calcmode="lin" valueType="num">
+                                      <p:cBhvr>
+                                        <p:cTn id="8" dur="1000" fill="hold"/>
+                                        <p:tgtEl>
+                                          <p:spTgt spid="3">
+                                            <p:txEl>
+                                              <p:pRg st="0" end="0"/>
+                                            </p:txEl>
+                                          </p:spTgt>
+                                        </p:tgtEl>
+                                        <p:attrNameLst>
+                                          <p:attrName>ppt_h</p:attrName>
+                                        </p:attrNameLst>
+                                      </p:cBhvr>
+                                      <p:tavLst>
+                                        <p:tav tm="0">
+                                          <p:val>
+                                            <p:fltVal val="0"/>
+                                          </p:val>
+                                        </p:tav>
+                                        <p:tav tm="100000">
+                                          <p:val>
+                                            <p:strVal val="#ppt_h"/>
+                                          </p:val>
+                                        </p:tav>
+                                      </p:tavLst>
+                                    </p:anim>
+                                    <p:anim calcmode="lin" valueType="num">
+                                      <p:cBhvr>
+                                        <p:cTn id="9" dur="1000" fill="hold"/>
+                                        <p:tgtEl>
+                                          <p:spTgt spid="3">
+                                            <p:txEl>
+                                              <p:pRg st="0" end="0"/>
+                                            </p:txEl>
+                                          </p:spTgt>
+                                        </p:tgtEl>
+                                        <p:attrNameLst>
+                                          <p:attrName>style.rotation</p:attrName>
+                                        </p:attrNameLst>
+                                      </p:cBhvr>
+                                      <p:tavLst>
+                                        <p:tav tm="0">
+                                          <p:val>
+                                            <p:fltVal val="90"/>
+                                          </p:val>
+                                        </p:tav>
+                                        <p:tav tm="100000">
+                                          <p:val>
+                                            <p:fltVal val="0"/>
+                                          </p:val>
+                                        </p:tav>
+                                      </p:tavLst>
+                                    </p:anim>
+                                    <p:animEffect transition="in" filter="fade">
+                                      <p:cBhvr>
+                                        <p:cTn id="10" dur="1000"/>
+                                        <p:tgtEl>
+                                          <p:spTgt spid="3">
+                                            <p:txEl>
+                                              <p:pRg st="0" end="0"/>
+                                            </p:txEl>
+                                          </p:spTgt>
+                                        </p:tgtEl>
+                                      </p:cBhvr>
+                                    </p:animEffect>
+                                  </p:childTnLst>
+                                </p:cTn>
+                              </p:par>
+                            </p:childTnLst>
+                          </p:cTn>
+                        </p:par>
+                      </p:childTnLst>
+                    </p:cTn>
+                  </p:par>
+                  <p:par>
+                    <p:cTn id="11" fill="hold">
+                      <p:stCondLst>
+                        <p:cond delay="indefinite"/>
+                      </p:stCondLst>
+                      <p:childTnLst>
+                        <p:par>
+                          <p:cTn id="12" fill="hold">
+                            <p:stCondLst>
+                              <p:cond delay="0"/>
+                            </p:stCondLst>
+                            <p:childTnLst>
+                              <p:par>
+                                <p:cTn id="13" presetID="31" presetClass="entr" presetSubtype="0" fill="hold" grpId="0" nodeType="clickEffect">
+                                  <p:stCondLst>
+                                    <p:cond delay="0"/>
+                                  </p:stCondLst>
+                                  <p:childTnLst>
+                                    <p:set>
+                                      <p:cBhvr>
+                                        <p:cTn id="14" dur="1" fill="hold">
+                                          <p:stCondLst>
+                                            <p:cond delay="0"/>
+                                          </p:stCondLst>
+                                        </p:cTn>
+                                        <p:tgtEl>
+                                          <p:spTgt spid="5"/>
+                                        </p:tgtEl>
+                                        <p:attrNameLst>
+                                          <p:attrName>style.visibility</p:attrName>
+                                        </p:attrNameLst>
+                                      </p:cBhvr>
+                                      <p:to>
+                                        <p:strVal val="visible"/>
+                                      </p:to>
+                                    </p:set>
+                                    <p:anim calcmode="lin" valueType="num">
+                                      <p:cBhvr>
+                                        <p:cTn id="15" dur="1000" fill="hold"/>
+                                        <p:tgtEl>
+                                          <p:spTgt spid="5"/>
+                                        </p:tgtEl>
+                                        <p:attrNameLst>
+                                          <p:attrName>ppt_w</p:attrName>
+                                        </p:attrNameLst>
+                                      </p:cBhvr>
+                                      <p:tavLst>
+                                        <p:tav tm="0">
+                                          <p:val>
+                                            <p:fltVal val="0"/>
+                                          </p:val>
+                                        </p:tav>
+                                        <p:tav tm="100000">
+                                          <p:val>
+                                            <p:strVal val="#ppt_w"/>
+                                          </p:val>
+                                        </p:tav>
+                                      </p:tavLst>
+                                    </p:anim>
+                                    <p:anim calcmode="lin" valueType="num">
+                                      <p:cBhvr>
+                                        <p:cTn id="16" dur="1000" fill="hold"/>
+                                        <p:tgtEl>
+                                          <p:spTgt spid="5"/>
+                                        </p:tgtEl>
+                                        <p:attrNameLst>
+                                          <p:attrName>ppt_h</p:attrName>
+                                        </p:attrNameLst>
+                                      </p:cBhvr>
+                                      <p:tavLst>
+                                        <p:tav tm="0">
+                                          <p:val>
+                                            <p:fltVal val="0"/>
+                                          </p:val>
+                                        </p:tav>
+                                        <p:tav tm="100000">
+                                          <p:val>
+                                            <p:strVal val="#ppt_h"/>
+                                          </p:val>
+                                        </p:tav>
+                                      </p:tavLst>
+                                    </p:anim>
+                                    <p:anim calcmode="lin" valueType="num">
+                                      <p:cBhvr>
+                                        <p:cTn id="17" dur="1000" fill="hold"/>
+                                        <p:tgtEl>
+                                          <p:spTgt spid="5"/>
+                                        </p:tgtEl>
+                                        <p:attrNameLst>
+                                          <p:attrName>style.rotation</p:attrName>
+                                        </p:attrNameLst>
+                                      </p:cBhvr>
+                                      <p:tavLst>
+                                        <p:tav tm="0">
+                                          <p:val>
+                                            <p:fltVal val="90"/>
+                                          </p:val>
+                                        </p:tav>
+                                        <p:tav tm="100000">
+                                          <p:val>
+                                            <p:fltVal val="0"/>
+                                          </p:val>
+                                        </p:tav>
+                                      </p:tavLst>
+                                    </p:anim>
+                                    <p:animEffect transition="in" filter="fade">
+                                      <p:cBhvr>
+                                        <p:cTn id="18" dur="1000"/>
+                                        <p:tgtEl>
+                                          <p:spTgt spid="5"/>
+                                        </p:tgtEl>
+                                      </p:cBhvr>
+                                    </p:animEffect>
+                                  </p:childTnLst>
+                                </p:cTn>
+                              </p:par>
+                            </p:childTnLst>
+                          </p:cTn>
+                        </p:par>
+                      </p:childTnLst>
+                    </p:cTn>
+                  </p:par>
+                  <p:par>
+                    <p:cTn id="19" fill="hold">
+                      <p:stCondLst>
+                        <p:cond delay="indefinite"/>
+                      </p:stCondLst>
+                      <p:childTnLst>
+                        <p:par>
+                          <p:cTn id="20" fill="hold">
+                            <p:stCondLst>
+                              <p:cond delay="0"/>
+                            </p:stCondLst>
+                            <p:childTnLst>
+                              <p:par>
+                                <p:cTn id="21" presetID="31" presetClass="entr" presetSubtype="0" fill="hold" grpId="0" nodeType="clickEffect">
+                                  <p:stCondLst>
+                                    <p:cond delay="0"/>
+                                  </p:stCondLst>
+                                  <p:childTnLst>
+                                    <p:set>
+                                      <p:cBhvr>
+                                        <p:cTn id="22" dur="1" fill="hold">
+                                          <p:stCondLst>
+                                            <p:cond delay="0"/>
+                                          </p:stCondLst>
+                                        </p:cTn>
+                                        <p:tgtEl>
+                                          <p:spTgt spid="11"/>
+                                        </p:tgtEl>
+                                        <p:attrNameLst>
+                                          <p:attrName>style.visibility</p:attrName>
+                                        </p:attrNameLst>
+                                      </p:cBhvr>
+                                      <p:to>
+                                        <p:strVal val="visible"/>
+                                      </p:to>
+                                    </p:set>
+                                    <p:anim calcmode="lin" valueType="num">
+                                      <p:cBhvr>
+                                        <p:cTn id="23" dur="1000" fill="hold"/>
+                                        <p:tgtEl>
+                                          <p:spTgt spid="11"/>
+                                        </p:tgtEl>
+                                        <p:attrNameLst>
+                                          <p:attrName>ppt_w</p:attrName>
+                                        </p:attrNameLst>
+                                      </p:cBhvr>
+                                      <p:tavLst>
+                                        <p:tav tm="0">
+                                          <p:val>
+                                            <p:fltVal val="0"/>
+                                          </p:val>
+                                        </p:tav>
+                                        <p:tav tm="100000">
+                                          <p:val>
+                                            <p:strVal val="#ppt_w"/>
+                                          </p:val>
+                                        </p:tav>
+                                      </p:tavLst>
+                                    </p:anim>
+                                    <p:anim calcmode="lin" valueType="num">
+                                      <p:cBhvr>
+                                        <p:cTn id="24" dur="1000" fill="hold"/>
+                                        <p:tgtEl>
+                                          <p:spTgt spid="11"/>
+                                        </p:tgtEl>
+                                        <p:attrNameLst>
+                                          <p:attrName>ppt_h</p:attrName>
+                                        </p:attrNameLst>
+                                      </p:cBhvr>
+                                      <p:tavLst>
+                                        <p:tav tm="0">
+                                          <p:val>
+                                            <p:fltVal val="0"/>
+                                          </p:val>
+                                        </p:tav>
+                                        <p:tav tm="100000">
+                                          <p:val>
+                                            <p:strVal val="#ppt_h"/>
+                                          </p:val>
+                                        </p:tav>
+                                      </p:tavLst>
+                                    </p:anim>
+                                    <p:anim calcmode="lin" valueType="num">
+                                      <p:cBhvr>
+                                        <p:cTn id="25" dur="1000" fill="hold"/>
+                                        <p:tgtEl>
+                                          <p:spTgt spid="11"/>
+                                        </p:tgtEl>
+                                        <p:attrNameLst>
+                                          <p:attrName>style.rotation</p:attrName>
+                                        </p:attrNameLst>
+                                      </p:cBhvr>
+                                      <p:tavLst>
+                                        <p:tav tm="0">
+                                          <p:val>
+                                            <p:fltVal val="90"/>
+                                          </p:val>
+                                        </p:tav>
+                                        <p:tav tm="100000">
+                                          <p:val>
+                                            <p:fltVal val="0"/>
+                                          </p:val>
+                                        </p:tav>
+                                      </p:tavLst>
+                                    </p:anim>
+                                    <p:animEffect transition="in" filter="fade">
+                                      <p:cBhvr>
+                                        <p:cTn id="26" dur="1000"/>
+                                        <p:tgtEl>
+                                          <p:spTgt spid="11"/>
+                                        </p:tgtEl>
+                                      </p:cBhvr>
+                                    </p:animEffect>
+                                  </p:childTnLst>
+                                </p:cTn>
+                              </p:par>
+                            </p:childTnLst>
+                          </p:cTn>
+                        </p:par>
+                      </p:childTnLst>
+                    </p:cTn>
+                  </p:par>
+                  <p:par>
+                    <p:cTn id="27" fill="hold">
+                      <p:stCondLst>
+                        <p:cond delay="indefinite"/>
+                      </p:stCondLst>
+                      <p:childTnLst>
+                        <p:par>
+                          <p:cTn id="28" fill="hold">
+                            <p:stCondLst>
+                              <p:cond delay="0"/>
+                            </p:stCondLst>
+                            <p:childTnLst>
+                              <p:par>
+                                <p:cTn id="29" presetID="31" presetClass="entr" presetSubtype="0" fill="hold" grpId="0" nodeType="clickEffect">
+                                  <p:stCondLst>
+                                    <p:cond delay="0"/>
+                                  </p:stCondLst>
+                                  <p:childTnLst>
+                                    <p:set>
+                                      <p:cBhvr>
+                                        <p:cTn id="30" dur="1" fill="hold">
+                                          <p:stCondLst>
+                                            <p:cond delay="0"/>
+                                          </p:stCondLst>
+                                        </p:cTn>
+                                        <p:tgtEl>
+                                          <p:spTgt spid="6"/>
+                                        </p:tgtEl>
+                                        <p:attrNameLst>
+                                          <p:attrName>style.visibility</p:attrName>
+                                        </p:attrNameLst>
+                                      </p:cBhvr>
+                                      <p:to>
+                                        <p:strVal val="visible"/>
+                                      </p:to>
+                                    </p:set>
+                                    <p:anim calcmode="lin" valueType="num">
+                                      <p:cBhvr>
+                                        <p:cTn id="31" dur="1000" fill="hold"/>
+                                        <p:tgtEl>
+                                          <p:spTgt spid="6"/>
+                                        </p:tgtEl>
+                                        <p:attrNameLst>
+                                          <p:attrName>ppt_w</p:attrName>
+                                        </p:attrNameLst>
+                                      </p:cBhvr>
+                                      <p:tavLst>
+                                        <p:tav tm="0">
+                                          <p:val>
+                                            <p:fltVal val="0"/>
+                                          </p:val>
+                                        </p:tav>
+                                        <p:tav tm="100000">
+                                          <p:val>
+                                            <p:strVal val="#ppt_w"/>
+                                          </p:val>
+                                        </p:tav>
+                                      </p:tavLst>
+                                    </p:anim>
+                                    <p:anim calcmode="lin" valueType="num">
+                                      <p:cBhvr>
+                                        <p:cTn id="32" dur="1000" fill="hold"/>
+                                        <p:tgtEl>
+                                          <p:spTgt spid="6"/>
+                                        </p:tgtEl>
+                                        <p:attrNameLst>
+                                          <p:attrName>ppt_h</p:attrName>
+                                        </p:attrNameLst>
+                                      </p:cBhvr>
+                                      <p:tavLst>
+                                        <p:tav tm="0">
+                                          <p:val>
+                                            <p:fltVal val="0"/>
+                                          </p:val>
+                                        </p:tav>
+                                        <p:tav tm="100000">
+                                          <p:val>
+                                            <p:strVal val="#ppt_h"/>
+                                          </p:val>
+                                        </p:tav>
+                                      </p:tavLst>
+                                    </p:anim>
+                                    <p:anim calcmode="lin" valueType="num">
+                                      <p:cBhvr>
+                                        <p:cTn id="33" dur="1000" fill="hold"/>
+                                        <p:tgtEl>
+                                          <p:spTgt spid="6"/>
+                                        </p:tgtEl>
+                                        <p:attrNameLst>
+                                          <p:attrName>style.rotation</p:attrName>
+                                        </p:attrNameLst>
+                                      </p:cBhvr>
+                                      <p:tavLst>
+                                        <p:tav tm="0">
+                                          <p:val>
+                                            <p:fltVal val="90"/>
+                                          </p:val>
+                                        </p:tav>
+                                        <p:tav tm="100000">
+                                          <p:val>
+                                            <p:fltVal val="0"/>
+                                          </p:val>
+                                        </p:tav>
+                                      </p:tavLst>
+                                    </p:anim>
+                                    <p:animEffect transition="in" filter="fade">
+                                      <p:cBhvr>
+                                        <p:cTn id="34" dur="1000"/>
+                                        <p:tgtEl>
+                                          <p:spTgt spid="6"/>
+                                        </p:tgtEl>
+                                      </p:cBhvr>
+                                    </p:animEffect>
+                                  </p:childTnLst>
+                                </p:cTn>
+                              </p:par>
+                            </p:childTnLst>
+                          </p:cTn>
+                        </p:par>
+                      </p:childTnLst>
+                    </p:cTn>
+                  </p:par>
+                  <p:par>
+                    <p:cTn id="35" fill="hold">
+                      <p:stCondLst>
+                        <p:cond delay="indefinite"/>
+                      </p:stCondLst>
+                      <p:childTnLst>
+                        <p:par>
+                          <p:cTn id="36" fill="hold">
+                            <p:stCondLst>
+                              <p:cond delay="0"/>
+                            </p:stCondLst>
+                            <p:childTnLst>
+                              <p:par>
+                                <p:cTn id="37" presetID="31" presetClass="entr" presetSubtype="0" fill="hold" grpId="0" nodeType="clickEffect">
+                                  <p:stCondLst>
+                                    <p:cond delay="0"/>
+                                  </p:stCondLst>
+                                  <p:childTnLst>
+                                    <p:set>
+                                      <p:cBhvr>
+                                        <p:cTn id="38" dur="1" fill="hold">
+                                          <p:stCondLst>
+                                            <p:cond delay="0"/>
+                                          </p:stCondLst>
+                                        </p:cTn>
+                                        <p:tgtEl>
+                                          <p:spTgt spid="7"/>
+                                        </p:tgtEl>
+                                        <p:attrNameLst>
+                                          <p:attrName>style.visibility</p:attrName>
+                                        </p:attrNameLst>
+                                      </p:cBhvr>
+                                      <p:to>
+                                        <p:strVal val="visible"/>
+                                      </p:to>
+                                    </p:set>
+                                    <p:anim calcmode="lin" valueType="num">
+                                      <p:cBhvr>
+                                        <p:cTn id="39" dur="1000" fill="hold"/>
+                                        <p:tgtEl>
+                                          <p:spTgt spid="7"/>
+                                        </p:tgtEl>
+                                        <p:attrNameLst>
+                                          <p:attrName>ppt_w</p:attrName>
+                                        </p:attrNameLst>
+                                      </p:cBhvr>
+                                      <p:tavLst>
+                                        <p:tav tm="0">
+                                          <p:val>
+                                            <p:fltVal val="0"/>
+                                          </p:val>
+                                        </p:tav>
+                                        <p:tav tm="100000">
+                                          <p:val>
+                                            <p:strVal val="#ppt_w"/>
+                                          </p:val>
+                                        </p:tav>
+                                      </p:tavLst>
+                                    </p:anim>
+                                    <p:anim calcmode="lin" valueType="num">
+                                      <p:cBhvr>
+                                        <p:cTn id="40" dur="1000" fill="hold"/>
+                                        <p:tgtEl>
+                                          <p:spTgt spid="7"/>
+                                        </p:tgtEl>
+                                        <p:attrNameLst>
+                                          <p:attrName>ppt_h</p:attrName>
+                                        </p:attrNameLst>
+                                      </p:cBhvr>
+                                      <p:tavLst>
+                                        <p:tav tm="0">
+                                          <p:val>
+                                            <p:fltVal val="0"/>
+                                          </p:val>
+                                        </p:tav>
+                                        <p:tav tm="100000">
+                                          <p:val>
+                                            <p:strVal val="#ppt_h"/>
+                                          </p:val>
+                                        </p:tav>
+                                      </p:tavLst>
+                                    </p:anim>
+                                    <p:anim calcmode="lin" valueType="num">
+                                      <p:cBhvr>
+                                        <p:cTn id="41" dur="1000" fill="hold"/>
+                                        <p:tgtEl>
+                                          <p:spTgt spid="7"/>
+                                        </p:tgtEl>
+                                        <p:attrNameLst>
+                                          <p:attrName>style.rotation</p:attrName>
+                                        </p:attrNameLst>
+                                      </p:cBhvr>
+                                      <p:tavLst>
+                                        <p:tav tm="0">
+                                          <p:val>
+                                            <p:fltVal val="90"/>
+                                          </p:val>
+                                        </p:tav>
+                                        <p:tav tm="100000">
+                                          <p:val>
+                                            <p:fltVal val="0"/>
+                                          </p:val>
+                                        </p:tav>
+                                      </p:tavLst>
+                                    </p:anim>
+                                    <p:animEffect transition="in" filter="fade">
+                                      <p:cBhvr>
+                                        <p:cTn id="42" dur="1000"/>
+                                        <p:tgtEl>
+                                          <p:spTgt spid="7"/>
+                                        </p:tgtEl>
+                                      </p:cBhvr>
+                                    </p:animEffect>
+                                  </p:childTnLst>
+                                </p:cTn>
+                              </p:par>
+                            </p:childTnLst>
+                          </p:cTn>
+                        </p:par>
+                      </p:childTnLst>
+                    </p:cTn>
+                  </p:par>
+                  <p:par>
+                    <p:cTn id="43" fill="hold">
+                      <p:stCondLst>
+                        <p:cond delay="indefinite"/>
+                      </p:stCondLst>
+                      <p:childTnLst>
+                        <p:par>
+                          <p:cTn id="44" fill="hold">
+                            <p:stCondLst>
+                              <p:cond delay="0"/>
+                            </p:stCondLst>
+                            <p:childTnLst>
+                              <p:par>
+                                <p:cTn id="45" presetID="31" presetClass="entr" presetSubtype="0" fill="hold" grpId="0" nodeType="clickEffect">
+                                  <p:stCondLst>
+                                    <p:cond delay="0"/>
+                                  </p:stCondLst>
+                                  <p:childTnLst>
+                                    <p:set>
+                                      <p:cBhvr>
+                                        <p:cTn id="46" dur="1" fill="hold">
+                                          <p:stCondLst>
+                                            <p:cond delay="0"/>
+                                          </p:stCondLst>
+                                        </p:cTn>
+                                        <p:tgtEl>
+                                          <p:spTgt spid="9"/>
+                                        </p:tgtEl>
+                                        <p:attrNameLst>
+                                          <p:attrName>style.visibility</p:attrName>
+                                        </p:attrNameLst>
+                                      </p:cBhvr>
+                                      <p:to>
+                                        <p:strVal val="visible"/>
+                                      </p:to>
+                                    </p:set>
+                                    <p:anim calcmode="lin" valueType="num">
+                                      <p:cBhvr>
+                                        <p:cTn id="47" dur="1000" fill="hold"/>
+                                        <p:tgtEl>
+                                          <p:spTgt spid="9"/>
+                                        </p:tgtEl>
+                                        <p:attrNameLst>
+                                          <p:attrName>ppt_w</p:attrName>
+                                        </p:attrNameLst>
+                                      </p:cBhvr>
+                                      <p:tavLst>
+                                        <p:tav tm="0">
+                                          <p:val>
+                                            <p:fltVal val="0"/>
+                                          </p:val>
+                                        </p:tav>
+                                        <p:tav tm="100000">
+                                          <p:val>
+                                            <p:strVal val="#ppt_w"/>
+                                          </p:val>
+                                        </p:tav>
+                                      </p:tavLst>
+                                    </p:anim>
+                                    <p:anim calcmode="lin" valueType="num">
+                                      <p:cBhvr>
+                                        <p:cTn id="48" dur="1000" fill="hold"/>
+                                        <p:tgtEl>
+                                          <p:spTgt spid="9"/>
+                                        </p:tgtEl>
+                                        <p:attrNameLst>
+                                          <p:attrName>ppt_h</p:attrName>
+                                        </p:attrNameLst>
+                                      </p:cBhvr>
+                                      <p:tavLst>
+                                        <p:tav tm="0">
+                                          <p:val>
+                                            <p:fltVal val="0"/>
+                                          </p:val>
+                                        </p:tav>
+                                        <p:tav tm="100000">
+                                          <p:val>
+                                            <p:strVal val="#ppt_h"/>
+                                          </p:val>
+                                        </p:tav>
+                                      </p:tavLst>
+                                    </p:anim>
+                                    <p:anim calcmode="lin" valueType="num">
+                                      <p:cBhvr>
+                                        <p:cTn id="49" dur="1000" fill="hold"/>
+                                        <p:tgtEl>
+                                          <p:spTgt spid="9"/>
+                                        </p:tgtEl>
+                                        <p:attrNameLst>
+                                          <p:attrName>style.rotation</p:attrName>
+                                        </p:attrNameLst>
+                                      </p:cBhvr>
+                                      <p:tavLst>
+                                        <p:tav tm="0">
+                                          <p:val>
+                                            <p:fltVal val="90"/>
+                                          </p:val>
+                                        </p:tav>
+                                        <p:tav tm="100000">
+                                          <p:val>
+                                            <p:fltVal val="0"/>
+                                          </p:val>
+                                        </p:tav>
+                                      </p:tavLst>
+                                    </p:anim>
+                                    <p:animEffect transition="in" filter="fade">
+                                      <p:cBhvr>
+                                        <p:cTn id="50" dur="1000"/>
+                                        <p:tgtEl>
+                                          <p:spTgt spid="9"/>
+                                        </p:tgtEl>
+                                      </p:cBhvr>
+                                    </p:animEffect>
+                                  </p:childTnLst>
+                                </p:cTn>
+                              </p:par>
+                            </p:childTnLst>
+                          </p:cTn>
+                        </p:par>
+                      </p:childTnLst>
+                    </p:cTn>
+                  </p:par>
+                  <p:par>
+                    <p:cTn id="51" fill="hold">
+                      <p:stCondLst>
+                        <p:cond delay="indefinite"/>
+                      </p:stCondLst>
+                      <p:childTnLst>
+                        <p:par>
+                          <p:cTn id="52" fill="hold">
+                            <p:stCondLst>
+                              <p:cond delay="0"/>
+                            </p:stCondLst>
+                            <p:childTnLst>
+                              <p:par>
+                                <p:cTn id="53" presetID="31" presetClass="entr" presetSubtype="0" fill="hold" grpId="0" nodeType="clickEffect">
+                                  <p:stCondLst>
+                                    <p:cond delay="0"/>
+                                  </p:stCondLst>
+                                  <p:childTnLst>
+                                    <p:set>
+                                      <p:cBhvr>
+                                        <p:cTn id="54" dur="1" fill="hold">
+                                          <p:stCondLst>
+                                            <p:cond delay="0"/>
+                                          </p:stCondLst>
+                                        </p:cTn>
+                                        <p:tgtEl>
+                                          <p:spTgt spid="10"/>
+                                        </p:tgtEl>
+                                        <p:attrNameLst>
+                                          <p:attrName>style.visibility</p:attrName>
+                                        </p:attrNameLst>
+                                      </p:cBhvr>
+                                      <p:to>
+                                        <p:strVal val="visible"/>
+                                      </p:to>
+                                    </p:set>
+                                    <p:anim calcmode="lin" valueType="num">
+                                      <p:cBhvr>
+                                        <p:cTn id="55" dur="1000" fill="hold"/>
+                                        <p:tgtEl>
+                                          <p:spTgt spid="10"/>
+                                        </p:tgtEl>
+                                        <p:attrNameLst>
+                                          <p:attrName>ppt_w</p:attrName>
+                                        </p:attrNameLst>
+                                      </p:cBhvr>
+                                      <p:tavLst>
+                                        <p:tav tm="0">
+                                          <p:val>
+                                            <p:fltVal val="0"/>
+                                          </p:val>
+                                        </p:tav>
+                                        <p:tav tm="100000">
+                                          <p:val>
+                                            <p:strVal val="#ppt_w"/>
+                                          </p:val>
+                                        </p:tav>
+                                      </p:tavLst>
+                                    </p:anim>
+                                    <p:anim calcmode="lin" valueType="num">
+                                      <p:cBhvr>
+                                        <p:cTn id="56" dur="1000" fill="hold"/>
+                                        <p:tgtEl>
+                                          <p:spTgt spid="10"/>
+                                        </p:tgtEl>
+                                        <p:attrNameLst>
+                                          <p:attrName>ppt_h</p:attrName>
+                                        </p:attrNameLst>
+                                      </p:cBhvr>
+                                      <p:tavLst>
+                                        <p:tav tm="0">
+                                          <p:val>
+                                            <p:fltVal val="0"/>
+                                          </p:val>
+                                        </p:tav>
+                                        <p:tav tm="100000">
+                                          <p:val>
+                                            <p:strVal val="#ppt_h"/>
+                                          </p:val>
+                                        </p:tav>
+                                      </p:tavLst>
+                                    </p:anim>
+                                    <p:anim calcmode="lin" valueType="num">
+                                      <p:cBhvr>
+                                        <p:cTn id="57" dur="1000" fill="hold"/>
+                                        <p:tgtEl>
+                                          <p:spTgt spid="10"/>
+                                        </p:tgtEl>
+                                        <p:attrNameLst>
+                                          <p:attrName>style.rotation</p:attrName>
+                                        </p:attrNameLst>
+                                      </p:cBhvr>
+                                      <p:tavLst>
+                                        <p:tav tm="0">
+                                          <p:val>
+                                            <p:fltVal val="90"/>
+                                          </p:val>
+                                        </p:tav>
+                                        <p:tav tm="100000">
+                                          <p:val>
+                                            <p:fltVal val="0"/>
+                                          </p:val>
+                                        </p:tav>
+                                      </p:tavLst>
+                                    </p:anim>
+                                    <p:animEffect transition="in" filter="fade">
+                                      <p:cBhvr>
+                                        <p:cTn id="58" dur="1000"/>
+                                        <p:tgtEl>
+                                          <p:spTgt spid="10"/>
+                                        </p:tgtEl>
+                                      </p:cBhvr>
+                                    </p:animEffect>
+                                  </p:childTnLst>
+                                </p:cTn>
+                              </p:par>
+                            </p:childTnLst>
+                          </p:cTn>
+                        </p:par>
+                      </p:childTnLst>
+                    </p:cTn>
+                  </p:par>
+                  <p:par>
+                    <p:cTn id="59" fill="hold">
+                      <p:stCondLst>
+                        <p:cond delay="indefinite"/>
+                      </p:stCondLst>
+                      <p:childTnLst>
+                        <p:par>
+                          <p:cTn id="60" fill="hold">
+                            <p:stCondLst>
+                              <p:cond delay="0"/>
+                            </p:stCondLst>
+                            <p:childTnLst>
+                              <p:par>
+                                <p:cTn id="61" presetID="31" presetClass="entr" presetSubtype="0" fill="hold" grpId="0" nodeType="clickEffect">
+                                  <p:stCondLst>
+                                    <p:cond delay="0"/>
+                                  </p:stCondLst>
+                                  <p:childTnLst>
+                                    <p:set>
+                                      <p:cBhvr>
+                                        <p:cTn id="62" dur="1" fill="hold">
+                                          <p:stCondLst>
+                                            <p:cond delay="0"/>
+                                          </p:stCondLst>
+                                        </p:cTn>
+                                        <p:tgtEl>
+                                          <p:spTgt spid="12"/>
+                                        </p:tgtEl>
+                                        <p:attrNameLst>
+                                          <p:attrName>style.visibility</p:attrName>
+                                        </p:attrNameLst>
+                                      </p:cBhvr>
+                                      <p:to>
+                                        <p:strVal val="visible"/>
+                                      </p:to>
+                                    </p:set>
+                                    <p:anim calcmode="lin" valueType="num">
+                                      <p:cBhvr>
+                                        <p:cTn id="63" dur="1000" fill="hold"/>
+                                        <p:tgtEl>
+                                          <p:spTgt spid="12"/>
+                                        </p:tgtEl>
+                                        <p:attrNameLst>
+                                          <p:attrName>ppt_w</p:attrName>
+                                        </p:attrNameLst>
+                                      </p:cBhvr>
+                                      <p:tavLst>
+                                        <p:tav tm="0">
+                                          <p:val>
+                                            <p:fltVal val="0"/>
+                                          </p:val>
+                                        </p:tav>
+                                        <p:tav tm="100000">
+                                          <p:val>
+                                            <p:strVal val="#ppt_w"/>
+                                          </p:val>
+                                        </p:tav>
+                                      </p:tavLst>
+                                    </p:anim>
+                                    <p:anim calcmode="lin" valueType="num">
+                                      <p:cBhvr>
+                                        <p:cTn id="64" dur="1000" fill="hold"/>
+                                        <p:tgtEl>
+                                          <p:spTgt spid="12"/>
+                                        </p:tgtEl>
+                                        <p:attrNameLst>
+                                          <p:attrName>ppt_h</p:attrName>
+                                        </p:attrNameLst>
+                                      </p:cBhvr>
+                                      <p:tavLst>
+                                        <p:tav tm="0">
+                                          <p:val>
+                                            <p:fltVal val="0"/>
+                                          </p:val>
+                                        </p:tav>
+                                        <p:tav tm="100000">
+                                          <p:val>
+                                            <p:strVal val="#ppt_h"/>
+                                          </p:val>
+                                        </p:tav>
+                                      </p:tavLst>
+                                    </p:anim>
+                                    <p:anim calcmode="lin" valueType="num">
+                                      <p:cBhvr>
+                                        <p:cTn id="65" dur="1000" fill="hold"/>
+                                        <p:tgtEl>
+                                          <p:spTgt spid="12"/>
+                                        </p:tgtEl>
+                                        <p:attrNameLst>
+                                          <p:attrName>style.rotation</p:attrName>
+                                        </p:attrNameLst>
+                                      </p:cBhvr>
+                                      <p:tavLst>
+                                        <p:tav tm="0">
+                                          <p:val>
+                                            <p:fltVal val="90"/>
+                                          </p:val>
+                                        </p:tav>
+                                        <p:tav tm="100000">
+                                          <p:val>
+                                            <p:fltVal val="0"/>
+                                          </p:val>
+                                        </p:tav>
+                                      </p:tavLst>
+                                    </p:anim>
+                                    <p:animEffect transition="in" filter="fade">
+                                      <p:cBhvr>
+                                        <p:cTn id="66" dur="1000"/>
+                                        <p:tgtEl>
+                                          <p:spTgt spid="12"/>
+                                        </p:tgtEl>
+                                      </p:cBhvr>
+                                    </p:animEffect>
+                                  </p:childTnLst>
+                                </p:cTn>
+                              </p:par>
+                            </p:childTnLst>
+                          </p:cTn>
+                        </p:par>
+                      </p:childTnLst>
+                    </p:cTn>
+                  </p:par>
+                  <p:par>
+                    <p:cTn id="67" fill="hold">
+                      <p:stCondLst>
+                        <p:cond delay="indefinite"/>
+                      </p:stCondLst>
+                      <p:childTnLst>
+                        <p:par>
+                          <p:cTn id="68" fill="hold">
+                            <p:stCondLst>
+                              <p:cond delay="0"/>
+                            </p:stCondLst>
+                            <p:childTnLst>
+                              <p:par>
+                                <p:cTn id="69" presetID="31" presetClass="entr" presetSubtype="0" fill="hold" grpId="0" nodeType="clickEffect">
+                                  <p:stCondLst>
+                                    <p:cond delay="0"/>
+                                  </p:stCondLst>
+                                  <p:childTnLst>
+                                    <p:set>
+                                      <p:cBhvr>
+                                        <p:cTn id="70" dur="1" fill="hold">
+                                          <p:stCondLst>
+                                            <p:cond delay="0"/>
+                                          </p:stCondLst>
+                                        </p:cTn>
+                                        <p:tgtEl>
+                                          <p:spTgt spid="13"/>
+                                        </p:tgtEl>
+                                        <p:attrNameLst>
+                                          <p:attrName>style.visibility</p:attrName>
+                                        </p:attrNameLst>
+                                      </p:cBhvr>
+                                      <p:to>
+                                        <p:strVal val="visible"/>
+                                      </p:to>
+                                    </p:set>
+                                    <p:anim calcmode="lin" valueType="num">
+                                      <p:cBhvr>
+                                        <p:cTn id="71" dur="1000" fill="hold"/>
+                                        <p:tgtEl>
+                                          <p:spTgt spid="13"/>
+                                        </p:tgtEl>
+                                        <p:attrNameLst>
+                                          <p:attrName>ppt_w</p:attrName>
+                                        </p:attrNameLst>
+                                      </p:cBhvr>
+                                      <p:tavLst>
+                                        <p:tav tm="0">
+                                          <p:val>
+                                            <p:fltVal val="0"/>
+                                          </p:val>
+                                        </p:tav>
+                                        <p:tav tm="100000">
+                                          <p:val>
+                                            <p:strVal val="#ppt_w"/>
+                                          </p:val>
+                                        </p:tav>
+                                      </p:tavLst>
+                                    </p:anim>
+                                    <p:anim calcmode="lin" valueType="num">
+                                      <p:cBhvr>
+                                        <p:cTn id="72" dur="1000" fill="hold"/>
+                                        <p:tgtEl>
+                                          <p:spTgt spid="13"/>
+                                        </p:tgtEl>
+                                        <p:attrNameLst>
+                                          <p:attrName>ppt_h</p:attrName>
+                                        </p:attrNameLst>
+                                      </p:cBhvr>
+                                      <p:tavLst>
+                                        <p:tav tm="0">
+                                          <p:val>
+                                            <p:fltVal val="0"/>
+                                          </p:val>
+                                        </p:tav>
+                                        <p:tav tm="100000">
+                                          <p:val>
+                                            <p:strVal val="#ppt_h"/>
+                                          </p:val>
+                                        </p:tav>
+                                      </p:tavLst>
+                                    </p:anim>
+                                    <p:anim calcmode="lin" valueType="num">
+                                      <p:cBhvr>
+                                        <p:cTn id="73" dur="1000" fill="hold"/>
+                                        <p:tgtEl>
+                                          <p:spTgt spid="13"/>
+                                        </p:tgtEl>
+                                        <p:attrNameLst>
+                                          <p:attrName>style.rotation</p:attrName>
+                                        </p:attrNameLst>
+                                      </p:cBhvr>
+                                      <p:tavLst>
+                                        <p:tav tm="0">
+                                          <p:val>
+                                            <p:fltVal val="90"/>
+                                          </p:val>
+                                        </p:tav>
+                                        <p:tav tm="100000">
+                                          <p:val>
+                                            <p:fltVal val="0"/>
+                                          </p:val>
+                                        </p:tav>
+                                      </p:tavLst>
+                                    </p:anim>
+                                    <p:animEffect transition="in" filter="fade">
+                                      <p:cBhvr>
+                                        <p:cTn id="74" dur="1000"/>
+                                        <p:tgtEl>
+                                          <p:spTgt spid="13"/>
+                                        </p:tgtEl>
+                                      </p:cBhvr>
+                                    </p:animEffect>
+                                  </p:childTnLst>
+                                </p:cTn>
+                              </p:par>
+                            </p:childTnLst>
+                          </p:cTn>
+                        </p:par>
+                      </p:childTnLst>
+                    </p:cTn>
+                  </p:par>
+                  <p:par>
+                    <p:cTn id="75" fill="hold">
+                      <p:stCondLst>
+                        <p:cond delay="indefinite"/>
+                      </p:stCondLst>
+                      <p:childTnLst>
+                        <p:par>
+                          <p:cTn id="76" fill="hold">
+                            <p:stCondLst>
+                              <p:cond delay="0"/>
+                            </p:stCondLst>
+                            <p:childTnLst>
+                              <p:par>
+                                <p:cTn id="77" presetID="31" presetClass="entr" presetSubtype="0" fill="hold" grpId="0" nodeType="clickEffect">
+                                  <p:stCondLst>
+                                    <p:cond delay="0"/>
+                                  </p:stCondLst>
+                                  <p:childTnLst>
+                                    <p:set>
+                                      <p:cBhvr>
+                                        <p:cTn id="78" dur="1" fill="hold">
+                                          <p:stCondLst>
+                                            <p:cond delay="0"/>
+                                          </p:stCondLst>
+                                        </p:cTn>
+                                        <p:tgtEl>
+                                          <p:spTgt spid="8"/>
+                                        </p:tgtEl>
+                                        <p:attrNameLst>
+                                          <p:attrName>style.visibility</p:attrName>
+                                        </p:attrNameLst>
+                                      </p:cBhvr>
+                                      <p:to>
+                                        <p:strVal val="visible"/>
+                                      </p:to>
+                                    </p:set>
+                                    <p:anim calcmode="lin" valueType="num">
+                                      <p:cBhvr>
+                                        <p:cTn id="79" dur="1000" fill="hold"/>
+                                        <p:tgtEl>
+                                          <p:spTgt spid="8"/>
+                                        </p:tgtEl>
+                                        <p:attrNameLst>
+                                          <p:attrName>ppt_w</p:attrName>
+                                        </p:attrNameLst>
+                                      </p:cBhvr>
+                                      <p:tavLst>
+                                        <p:tav tm="0">
+                                          <p:val>
+                                            <p:fltVal val="0"/>
+                                          </p:val>
+                                        </p:tav>
+                                        <p:tav tm="100000">
+                                          <p:val>
+                                            <p:strVal val="#ppt_w"/>
+                                          </p:val>
+                                        </p:tav>
+                                      </p:tavLst>
+                                    </p:anim>
+                                    <p:anim calcmode="lin" valueType="num">
+                                      <p:cBhvr>
+                                        <p:cTn id="80" dur="1000" fill="hold"/>
+                                        <p:tgtEl>
+                                          <p:spTgt spid="8"/>
+                                        </p:tgtEl>
+                                        <p:attrNameLst>
+                                          <p:attrName>ppt_h</p:attrName>
+                                        </p:attrNameLst>
+                                      </p:cBhvr>
+                                      <p:tavLst>
+                                        <p:tav tm="0">
+                                          <p:val>
+                                            <p:fltVal val="0"/>
+                                          </p:val>
+                                        </p:tav>
+                                        <p:tav tm="100000">
+                                          <p:val>
+                                            <p:strVal val="#ppt_h"/>
+                                          </p:val>
+                                        </p:tav>
+                                      </p:tavLst>
+                                    </p:anim>
+                                    <p:anim calcmode="lin" valueType="num">
+                                      <p:cBhvr>
+                                        <p:cTn id="81" dur="1000" fill="hold"/>
+                                        <p:tgtEl>
+                                          <p:spTgt spid="8"/>
+                                        </p:tgtEl>
+                                        <p:attrNameLst>
+                                          <p:attrName>style.rotation</p:attrName>
+                                        </p:attrNameLst>
+                                      </p:cBhvr>
+                                      <p:tavLst>
+                                        <p:tav tm="0">
+                                          <p:val>
+                                            <p:fltVal val="90"/>
+                                          </p:val>
+                                        </p:tav>
+                                        <p:tav tm="100000">
+                                          <p:val>
+                                            <p:fltVal val="0"/>
+                                          </p:val>
+                                        </p:tav>
+                                      </p:tavLst>
+                                    </p:anim>
+                                    <p:animEffect transition="in" filter="fade">
+                                      <p:cBhvr>
+                                        <p:cTn id="82" dur="1000"/>
+                                        <p:tgtEl>
+                                          <p:spTgt spid="8"/>
+                                        </p:tgtEl>
+                                      </p:cBhvr>
+                                    </p:animEffect>
+                                  </p:childTnLst>
+                                </p:cTn>
+                              </p:par>
+                            </p:childTnLst>
+                          </p:cTn>
+                        </p:par>
+                      </p:childTnLst>
+                    </p:cTn>
+                  </p:par>
+                  <p:par>
+                    <p:cTn id="83" fill="hold">
+                      <p:stCondLst>
+                        <p:cond delay="indefinite"/>
+                      </p:stCondLst>
+                      <p:childTnLst>
+                        <p:par>
+                          <p:cTn id="84" fill="hold">
+                            <p:stCondLst>
+                              <p:cond delay="0"/>
+                            </p:stCondLst>
+                            <p:childTnLst>
+                              <p:par>
+                                <p:cTn id="85" presetID="31" presetClass="entr" presetSubtype="0" fill="hold" grpId="0" nodeType="clickEffect">
+                                  <p:stCondLst>
+                                    <p:cond delay="0"/>
+                                  </p:stCondLst>
+                                  <p:childTnLst>
+                                    <p:set>
+                                      <p:cBhvr>
+                                        <p:cTn id="86" dur="1" fill="hold">
+                                          <p:stCondLst>
+                                            <p:cond delay="0"/>
+                                          </p:stCondLst>
+                                        </p:cTn>
+                                        <p:tgtEl>
+                                          <p:spTgt spid="4"/>
+                                        </p:tgtEl>
+                                        <p:attrNameLst>
+                                          <p:attrName>style.visibility</p:attrName>
+                                        </p:attrNameLst>
+                                      </p:cBhvr>
+                                      <p:to>
+                                        <p:strVal val="visible"/>
+                                      </p:to>
+                                    </p:set>
+                                    <p:anim calcmode="lin" valueType="num">
+                                      <p:cBhvr>
+                                        <p:cTn id="87" dur="1000" fill="hold"/>
+                                        <p:tgtEl>
+                                          <p:spTgt spid="4"/>
+                                        </p:tgtEl>
+                                        <p:attrNameLst>
+                                          <p:attrName>ppt_w</p:attrName>
+                                        </p:attrNameLst>
+                                      </p:cBhvr>
+                                      <p:tavLst>
+                                        <p:tav tm="0">
+                                          <p:val>
+                                            <p:fltVal val="0"/>
+                                          </p:val>
+                                        </p:tav>
+                                        <p:tav tm="100000">
+                                          <p:val>
+                                            <p:strVal val="#ppt_w"/>
+                                          </p:val>
+                                        </p:tav>
+                                      </p:tavLst>
+                                    </p:anim>
+                                    <p:anim calcmode="lin" valueType="num">
+                                      <p:cBhvr>
+                                        <p:cTn id="88" dur="1000" fill="hold"/>
+                                        <p:tgtEl>
+                                          <p:spTgt spid="4"/>
+                                        </p:tgtEl>
+                                        <p:attrNameLst>
+                                          <p:attrName>ppt_h</p:attrName>
+                                        </p:attrNameLst>
+                                      </p:cBhvr>
+                                      <p:tavLst>
+                                        <p:tav tm="0">
+                                          <p:val>
+                                            <p:fltVal val="0"/>
+                                          </p:val>
+                                        </p:tav>
+                                        <p:tav tm="100000">
+                                          <p:val>
+                                            <p:strVal val="#ppt_h"/>
+                                          </p:val>
+                                        </p:tav>
+                                      </p:tavLst>
+                                    </p:anim>
+                                    <p:anim calcmode="lin" valueType="num">
+                                      <p:cBhvr>
+                                        <p:cTn id="89" dur="1000" fill="hold"/>
+                                        <p:tgtEl>
+                                          <p:spTgt spid="4"/>
+                                        </p:tgtEl>
+                                        <p:attrNameLst>
+                                          <p:attrName>style.rotation</p:attrName>
+                                        </p:attrNameLst>
+                                      </p:cBhvr>
+                                      <p:tavLst>
+                                        <p:tav tm="0">
+                                          <p:val>
+                                            <p:fltVal val="90"/>
+                                          </p:val>
+                                        </p:tav>
+                                        <p:tav tm="100000">
+                                          <p:val>
+                                            <p:fltVal val="0"/>
+                                          </p:val>
+                                        </p:tav>
+                                      </p:tavLst>
+                                    </p:anim>
+                                    <p:animEffect transition="in" filter="fade">
+                                      <p:cBhvr>
+                                        <p:cTn id="90" dur="1000"/>
+                                        <p:tgtEl>
+                                          <p:spTgt spid="4"/>
+                                        </p:tgtEl>
+                                      </p:cBhvr>
+                                    </p:animEffect>
+                                  </p:childTnLst>
+                                </p:cTn>
+                              </p:par>
+                            </p:childTnLst>
+                          </p:cTn>
+                        </p:par>
+                      </p:childTnLst>
+                    </p:cTn>
+                  </p:par>
+                </p:childTnLst>
+              </p:cTn>
+              <p:prevCondLst>
+                <p:cond evt="onPrev" delay="0">
+                  <p:tgtEl>
+                    <p:sldTgt/>
+                  </p:tgtEl>
+                </p:cond>
+              </p:prevCondLst>
+              <p:nextCondLst>
+                <p:cond evt="onNext" delay="0">
+                  <p:tgtEl>
+                    <p:sldTgt/>
+                  </p:tgtEl>
+                </p:cond>
+              </p:nextCondLst>
+            </p:seq>
+          </p:childTnLst>
+        </p:cTn>
+      </p:par>
+    </p:tnLst>
+    <p:bldLst>
+      <p:bldP spid="3" grpId="0" build="p"/>
+      <p:bldP spid="6" grpId="0"/>
+      <p:bldP spid="7" grpId="0"/>
+      <p:bldP spid="8" grpId="0"/>
+      <p:bldP spid="9" grpId="0"/>
+      <p:bldP spid="10" grpId="0"/>
+      <p:bldP spid="11" grpId="0"/>
+      <p:bldP spid="12" grpId="0"/>
+      <p:bldP spid="13" grpId="0"/>
+      <p:bldP spid="4" grpId="0"/>
+      <p:bldP spid="5" grpId="0"/>
+    </p:bldLst>
+  </p:timing>
 </p:sld>
 </file>
 
-<file path=ppt/slides/slide4.xml><?xml version="1.0" encoding="utf-8"?>
+<file path=ppt/slides/slide3.xml><?xml version="1.0" encoding="utf-8"?>
 <p:sld xmlns:a="http://schemas.openxmlformats.org/drawingml/2006/main" xmlns:r="http://schemas.openxmlformats.org/officeDocument/2006/relationships" xmlns:p="http://schemas.openxmlformats.org/presentationml/2006/main">
   <p:cSld>
     <p:bg>
@@ -6211,7 +8321,7 @@
           <a:p>
             <a:r>
               <a:rPr lang="en-AU" dirty="0"/>
-              <a:t>Some brownfields onboarding tropes</a:t>
+              <a:t>Some other brownfields onboarding tropes</a:t>
             </a:r>
           </a:p>
         </p:txBody>
@@ -6261,19 +8371,21 @@
           <a:p>
             <a:r>
               <a:rPr lang="en-AU" dirty="0"/>
-              <a:t>Manual overriding shared vars like connection strings</a:t>
-            </a:r>
-          </a:p>
-          <a:p>
+              <a:t>Is database locally creatable and </a:t>
+            </a:r>
+            <a:r>
+              <a:rPr lang="en-AU" dirty="0" err="1"/>
+              <a:t>seedable</a:t>
+            </a:r>
             <a:r>
               <a:rPr lang="en-AU" dirty="0"/>
-              <a:t>How to create/seed database?</a:t>
+              <a:t>, or need real backup?</a:t>
             </a:r>
           </a:p>
           <a:p>
             <a:r>
               <a:rPr lang="en-AU" dirty="0"/>
-              <a:t>What projects need to be run when?</a:t>
+              <a:t>Overriding shared vars like connection strings in all the different projects</a:t>
             </a:r>
           </a:p>
           <a:p>
@@ -6288,6 +8400,340 @@
     <p:extLst>
       <p:ext uri="{BB962C8B-B14F-4D97-AF65-F5344CB8AC3E}">
         <p14:creationId xmlns:p14="http://schemas.microsoft.com/office/powerpoint/2010/main" val="673554225"/>
+      </p:ext>
+    </p:extLst>
+  </p:cSld>
+  <p:clrMapOvr>
+    <a:masterClrMapping/>
+  </p:clrMapOvr>
+</p:sld>
+</file>
+
+<file path=ppt/slides/slide4.xml><?xml version="1.0" encoding="utf-8"?>
+<p:sld xmlns:a="http://schemas.openxmlformats.org/drawingml/2006/main" xmlns:r="http://schemas.openxmlformats.org/officeDocument/2006/relationships" xmlns:p="http://schemas.openxmlformats.org/presentationml/2006/main">
+  <p:cSld>
+    <p:spTree>
+      <p:nvGrpSpPr>
+        <p:cNvPr id="1" name=""/>
+        <p:cNvGrpSpPr/>
+        <p:nvPr/>
+      </p:nvGrpSpPr>
+      <p:grpSpPr>
+        <a:xfrm>
+          <a:off x="0" y="0"/>
+          <a:ext cx="0" cy="0"/>
+          <a:chOff x="0" y="0"/>
+          <a:chExt cx="0" cy="0"/>
+        </a:xfrm>
+      </p:grpSpPr>
+      <p:sp>
+        <p:nvSpPr>
+          <p:cNvPr id="2" name="Title 1">
+            <a:extLst>
+              <a:ext uri="{FF2B5EF4-FFF2-40B4-BE49-F238E27FC236}">
+                <a16:creationId xmlns:a16="http://schemas.microsoft.com/office/drawing/2014/main" id="{CD3F7941-789A-D1D4-07FB-058A1994A5F7}"/>
+              </a:ext>
+            </a:extLst>
+          </p:cNvPr>
+          <p:cNvSpPr>
+            <a:spLocks noGrp="1"/>
+          </p:cNvSpPr>
+          <p:nvPr>
+            <p:ph type="title"/>
+          </p:nvPr>
+        </p:nvSpPr>
+        <p:spPr/>
+        <p:txBody>
+          <a:bodyPr/>
+          <a:lstStyle/>
+          <a:p>
+            <a:r>
+              <a:rPr lang="en-AU" dirty="0"/>
+              <a:t>Onboarding: Past and future?</a:t>
+            </a:r>
+          </a:p>
+        </p:txBody>
+      </p:sp>
+      <p:sp>
+        <p:nvSpPr>
+          <p:cNvPr id="3" name="Content Placeholder 2">
+            <a:extLst>
+              <a:ext uri="{FF2B5EF4-FFF2-40B4-BE49-F238E27FC236}">
+                <a16:creationId xmlns:a16="http://schemas.microsoft.com/office/drawing/2014/main" id="{4F6DDED4-13CE-6445-8833-E8B7E053405C}"/>
+              </a:ext>
+            </a:extLst>
+          </p:cNvPr>
+          <p:cNvSpPr>
+            <a:spLocks noGrp="1"/>
+          </p:cNvSpPr>
+          <p:nvPr>
+            <p:ph idx="1"/>
+          </p:nvPr>
+        </p:nvSpPr>
+        <p:spPr>
+          <a:xfrm>
+            <a:off x="838200" y="1825625"/>
+            <a:ext cx="4728882" cy="4351338"/>
+          </a:xfrm>
+        </p:spPr>
+        <p:txBody>
+          <a:bodyPr/>
+          <a:lstStyle/>
+          <a:p>
+            <a:pPr marL="0" indent="0">
+              <a:buNone/>
+            </a:pPr>
+            <a:r>
+              <a:rPr lang="en-AU" b="1" dirty="0"/>
+              <a:t>How we solve these now</a:t>
+            </a:r>
+          </a:p>
+          <a:p>
+            <a:r>
+              <a:rPr lang="en-AU" dirty="0"/>
+              <a:t>ResetTheWorld.ps1</a:t>
+            </a:r>
+          </a:p>
+          <a:p>
+            <a:r>
+              <a:rPr lang="en-AU" dirty="0"/>
+              <a:t>Detailed Readme</a:t>
+            </a:r>
+          </a:p>
+          <a:p>
+            <a:r>
+              <a:rPr lang="en-AU" dirty="0"/>
+              <a:t>Startup profiles in VS/Rider</a:t>
+            </a:r>
+          </a:p>
+        </p:txBody>
+      </p:sp>
+      <p:sp>
+        <p:nvSpPr>
+          <p:cNvPr id="4" name="Content Placeholder 2">
+            <a:extLst>
+              <a:ext uri="{FF2B5EF4-FFF2-40B4-BE49-F238E27FC236}">
+                <a16:creationId xmlns:a16="http://schemas.microsoft.com/office/drawing/2014/main" id="{D57DF8E3-EBFE-A882-9A5A-A9592599BBEB}"/>
+              </a:ext>
+            </a:extLst>
+          </p:cNvPr>
+          <p:cNvSpPr txBox="1">
+            <a:spLocks/>
+          </p:cNvSpPr>
+          <p:nvPr/>
+        </p:nvSpPr>
+        <p:spPr>
+          <a:xfrm>
+            <a:off x="6624920" y="1825625"/>
+            <a:ext cx="5262280" cy="4351338"/>
+          </a:xfrm>
+          <a:prstGeom prst="rect">
+            <a:avLst/>
+          </a:prstGeom>
+        </p:spPr>
+        <p:txBody>
+          <a:bodyPr vert="horz" lIns="91440" tIns="45720" rIns="91440" bIns="45720" rtlCol="0">
+            <a:normAutofit/>
+          </a:bodyPr>
+          <a:lstStyle>
+            <a:lvl1pPr marL="228600" indent="-228600" algn="l" defTabSz="914400" rtl="0" eaLnBrk="1" latinLnBrk="0" hangingPunct="1">
+              <a:lnSpc>
+                <a:spcPct val="90000"/>
+              </a:lnSpc>
+              <a:spcBef>
+                <a:spcPts val="1000"/>
+              </a:spcBef>
+              <a:buFont typeface="Arial" panose="020B0604020202020204" pitchFamily="34" charset="0"/>
+              <a:buChar char="•"/>
+              <a:defRPr sz="2800" kern="1200">
+                <a:solidFill>
+                  <a:schemeClr val="tx1"/>
+                </a:solidFill>
+                <a:latin typeface="+mn-lt"/>
+                <a:ea typeface="+mn-ea"/>
+                <a:cs typeface="+mn-cs"/>
+              </a:defRPr>
+            </a:lvl1pPr>
+            <a:lvl2pPr marL="685800" indent="-228600" algn="l" defTabSz="914400" rtl="0" eaLnBrk="1" latinLnBrk="0" hangingPunct="1">
+              <a:lnSpc>
+                <a:spcPct val="90000"/>
+              </a:lnSpc>
+              <a:spcBef>
+                <a:spcPts val="500"/>
+              </a:spcBef>
+              <a:buFont typeface="Arial" panose="020B0604020202020204" pitchFamily="34" charset="0"/>
+              <a:buChar char="•"/>
+              <a:defRPr sz="2400" kern="1200">
+                <a:solidFill>
+                  <a:schemeClr val="tx1"/>
+                </a:solidFill>
+                <a:latin typeface="+mn-lt"/>
+                <a:ea typeface="+mn-ea"/>
+                <a:cs typeface="+mn-cs"/>
+              </a:defRPr>
+            </a:lvl2pPr>
+            <a:lvl3pPr marL="1143000" indent="-228600" algn="l" defTabSz="914400" rtl="0" eaLnBrk="1" latinLnBrk="0" hangingPunct="1">
+              <a:lnSpc>
+                <a:spcPct val="90000"/>
+              </a:lnSpc>
+              <a:spcBef>
+                <a:spcPts val="500"/>
+              </a:spcBef>
+              <a:buFont typeface="Arial" panose="020B0604020202020204" pitchFamily="34" charset="0"/>
+              <a:buChar char="•"/>
+              <a:defRPr sz="2000" kern="1200">
+                <a:solidFill>
+                  <a:schemeClr val="tx1"/>
+                </a:solidFill>
+                <a:latin typeface="+mn-lt"/>
+                <a:ea typeface="+mn-ea"/>
+                <a:cs typeface="+mn-cs"/>
+              </a:defRPr>
+            </a:lvl3pPr>
+            <a:lvl4pPr marL="1600200" indent="-228600" algn="l" defTabSz="914400" rtl="0" eaLnBrk="1" latinLnBrk="0" hangingPunct="1">
+              <a:lnSpc>
+                <a:spcPct val="90000"/>
+              </a:lnSpc>
+              <a:spcBef>
+                <a:spcPts val="500"/>
+              </a:spcBef>
+              <a:buFont typeface="Arial" panose="020B0604020202020204" pitchFamily="34" charset="0"/>
+              <a:buChar char="•"/>
+              <a:defRPr sz="1800" kern="1200">
+                <a:solidFill>
+                  <a:schemeClr val="tx1"/>
+                </a:solidFill>
+                <a:latin typeface="+mn-lt"/>
+                <a:ea typeface="+mn-ea"/>
+                <a:cs typeface="+mn-cs"/>
+              </a:defRPr>
+            </a:lvl4pPr>
+            <a:lvl5pPr marL="2057400" indent="-228600" algn="l" defTabSz="914400" rtl="0" eaLnBrk="1" latinLnBrk="0" hangingPunct="1">
+              <a:lnSpc>
+                <a:spcPct val="90000"/>
+              </a:lnSpc>
+              <a:spcBef>
+                <a:spcPts val="500"/>
+              </a:spcBef>
+              <a:buFont typeface="Arial" panose="020B0604020202020204" pitchFamily="34" charset="0"/>
+              <a:buChar char="•"/>
+              <a:defRPr sz="1800" kern="1200">
+                <a:solidFill>
+                  <a:schemeClr val="tx1"/>
+                </a:solidFill>
+                <a:latin typeface="+mn-lt"/>
+                <a:ea typeface="+mn-ea"/>
+                <a:cs typeface="+mn-cs"/>
+              </a:defRPr>
+            </a:lvl5pPr>
+            <a:lvl6pPr marL="2514600" indent="-228600" algn="l" defTabSz="914400" rtl="0" eaLnBrk="1" latinLnBrk="0" hangingPunct="1">
+              <a:lnSpc>
+                <a:spcPct val="90000"/>
+              </a:lnSpc>
+              <a:spcBef>
+                <a:spcPts val="500"/>
+              </a:spcBef>
+              <a:buFont typeface="Arial" panose="020B0604020202020204" pitchFamily="34" charset="0"/>
+              <a:buChar char="•"/>
+              <a:defRPr sz="1800" kern="1200">
+                <a:solidFill>
+                  <a:schemeClr val="tx1"/>
+                </a:solidFill>
+                <a:latin typeface="+mn-lt"/>
+                <a:ea typeface="+mn-ea"/>
+                <a:cs typeface="+mn-cs"/>
+              </a:defRPr>
+            </a:lvl6pPr>
+            <a:lvl7pPr marL="2971800" indent="-228600" algn="l" defTabSz="914400" rtl="0" eaLnBrk="1" latinLnBrk="0" hangingPunct="1">
+              <a:lnSpc>
+                <a:spcPct val="90000"/>
+              </a:lnSpc>
+              <a:spcBef>
+                <a:spcPts val="500"/>
+              </a:spcBef>
+              <a:buFont typeface="Arial" panose="020B0604020202020204" pitchFamily="34" charset="0"/>
+              <a:buChar char="•"/>
+              <a:defRPr sz="1800" kern="1200">
+                <a:solidFill>
+                  <a:schemeClr val="tx1"/>
+                </a:solidFill>
+                <a:latin typeface="+mn-lt"/>
+                <a:ea typeface="+mn-ea"/>
+                <a:cs typeface="+mn-cs"/>
+              </a:defRPr>
+            </a:lvl7pPr>
+            <a:lvl8pPr marL="3429000" indent="-228600" algn="l" defTabSz="914400" rtl="0" eaLnBrk="1" latinLnBrk="0" hangingPunct="1">
+              <a:lnSpc>
+                <a:spcPct val="90000"/>
+              </a:lnSpc>
+              <a:spcBef>
+                <a:spcPts val="500"/>
+              </a:spcBef>
+              <a:buFont typeface="Arial" panose="020B0604020202020204" pitchFamily="34" charset="0"/>
+              <a:buChar char="•"/>
+              <a:defRPr sz="1800" kern="1200">
+                <a:solidFill>
+                  <a:schemeClr val="tx1"/>
+                </a:solidFill>
+                <a:latin typeface="+mn-lt"/>
+                <a:ea typeface="+mn-ea"/>
+                <a:cs typeface="+mn-cs"/>
+              </a:defRPr>
+            </a:lvl8pPr>
+            <a:lvl9pPr marL="3886200" indent="-228600" algn="l" defTabSz="914400" rtl="0" eaLnBrk="1" latinLnBrk="0" hangingPunct="1">
+              <a:lnSpc>
+                <a:spcPct val="90000"/>
+              </a:lnSpc>
+              <a:spcBef>
+                <a:spcPts val="500"/>
+              </a:spcBef>
+              <a:buFont typeface="Arial" panose="020B0604020202020204" pitchFamily="34" charset="0"/>
+              <a:buChar char="•"/>
+              <a:defRPr sz="1800" kern="1200">
+                <a:solidFill>
+                  <a:schemeClr val="tx1"/>
+                </a:solidFill>
+                <a:latin typeface="+mn-lt"/>
+                <a:ea typeface="+mn-ea"/>
+                <a:cs typeface="+mn-cs"/>
+              </a:defRPr>
+            </a:lvl9pPr>
+          </a:lstStyle>
+          <a:p>
+            <a:pPr marL="0" indent="0">
+              <a:buFont typeface="Arial" panose="020B0604020202020204" pitchFamily="34" charset="0"/>
+              <a:buNone/>
+            </a:pPr>
+            <a:r>
+              <a:rPr lang="en-AU" b="1" dirty="0"/>
+              <a:t>How we could be solving them</a:t>
+            </a:r>
+          </a:p>
+          <a:p>
+            <a:r>
+              <a:rPr lang="en-AU" dirty="0"/>
+              <a:t>Aspire ✨</a:t>
+            </a:r>
+          </a:p>
+          <a:p>
+            <a:r>
+              <a:rPr lang="en-AU" dirty="0"/>
+              <a:t>And a good readme </a:t>
+            </a:r>
+            <a:r>
+              <a:rPr lang="en-AU" dirty="0">
+                <a:sym typeface="Wingdings" panose="05000000000000000000" pitchFamily="2" charset="2"/>
+              </a:rPr>
+              <a:t></a:t>
+            </a:r>
+            <a:endParaRPr lang="en-AU" dirty="0"/>
+          </a:p>
+        </p:txBody>
+      </p:sp>
+    </p:spTree>
+    <p:extLst>
+      <p:ext uri="{BB962C8B-B14F-4D97-AF65-F5344CB8AC3E}">
+        <p14:creationId xmlns:p14="http://schemas.microsoft.com/office/powerpoint/2010/main" val="2902774191"/>
       </p:ext>
     </p:extLst>
   </p:cSld>
@@ -6367,70 +8813,16 @@
           <a:p>
             <a:r>
               <a:rPr lang="en-AU" sz="2400" dirty="0"/>
-              <a:t>Running </a:t>
-            </a:r>
-            <a:r>
-              <a:rPr lang="en-AU" sz="2400" dirty="0" err="1"/>
-              <a:t>api</a:t>
-            </a:r>
+              <a:t>Central configuration to override all projects</a:t>
+            </a:r>
+            <a:endParaRPr lang="en-AU" sz="2000" dirty="0"/>
+          </a:p>
+          <a:p>
             <a:r>
               <a:rPr lang="en-AU" sz="2400" dirty="0"/>
-              <a:t> and </a:t>
-            </a:r>
-            <a:r>
-              <a:rPr lang="en-AU" sz="2400" dirty="0" err="1"/>
-              <a:t>ui</a:t>
-            </a:r>
-            <a:r>
-              <a:rPr lang="en-AU" sz="2400" dirty="0"/>
-              <a:t> separately</a:t>
-            </a:r>
-          </a:p>
-          <a:p>
-            <a:pPr lvl="1"/>
-            <a:r>
-              <a:rPr lang="en-AU" sz="2000" dirty="0"/>
-              <a:t>Not really Aspire related, but can streamline</a:t>
-            </a:r>
-          </a:p>
-          <a:p>
-            <a:r>
-              <a:rPr lang="en-AU" sz="2400" dirty="0"/>
-              <a:t>Overriding shared vars like connection strings</a:t>
-            </a:r>
-          </a:p>
-          <a:p>
-            <a:pPr lvl="1"/>
-            <a:r>
-              <a:rPr lang="en-AU" sz="2000" dirty="0"/>
-              <a:t>Configure with user secrets, override in all child apps</a:t>
-            </a:r>
-          </a:p>
-          <a:p>
-            <a:r>
-              <a:rPr lang="en-AU" sz="2400" dirty="0"/>
-              <a:t>How to create/seed database?</a:t>
-            </a:r>
-          </a:p>
-          <a:p>
-            <a:pPr lvl="1"/>
-            <a:r>
-              <a:rPr lang="en-AU" sz="2000" dirty="0"/>
-              <a:t>Make a button!</a:t>
-            </a:r>
-          </a:p>
-          <a:p>
-            <a:r>
-              <a:rPr lang="en-AU" sz="2400" dirty="0"/>
-              <a:t>What projects need to be run when?</a:t>
-            </a:r>
-          </a:p>
-          <a:p>
-            <a:pPr lvl="1"/>
-            <a:r>
-              <a:rPr lang="en-AU" sz="2000" dirty="0"/>
-              <a:t>Grouped projects to run and make one button to run them</a:t>
-            </a:r>
+              <a:t>Define project relations and have a button to run several projects at once</a:t>
+            </a:r>
+            <a:endParaRPr lang="en-AU" sz="2000" dirty="0"/>
           </a:p>
           <a:p>
             <a:r>
@@ -6444,6 +8836,15 @@
               <a:rPr lang="en-AU" sz="2000" dirty="0"/>
               <a:t>Have a picker!</a:t>
             </a:r>
+          </a:p>
+          <a:p>
+            <a:r>
+              <a:rPr lang="en-AU" sz="2400" dirty="0"/>
+              <a:t>Local logging built in</a:t>
+            </a:r>
+          </a:p>
+          <a:p>
+            <a:endParaRPr lang="en-AU" sz="2400" dirty="0"/>
           </a:p>
         </p:txBody>
       </p:sp>
@@ -6647,31 +9048,66 @@
           </a:p>
         </p:txBody>
       </p:sp>
-      <p:sp>
-        <p:nvSpPr>
-          <p:cNvPr id="3" name="Content Placeholder 2">
-            <a:extLst>
-              <a:ext uri="{FF2B5EF4-FFF2-40B4-BE49-F238E27FC236}">
-                <a16:creationId xmlns:a16="http://schemas.microsoft.com/office/drawing/2014/main" id="{1B28BCAE-23B5-BF22-DAC5-2795093A2C12}"/>
-              </a:ext>
-            </a:extLst>
-          </p:cNvPr>
-          <p:cNvSpPr>
-            <a:spLocks noGrp="1"/>
-          </p:cNvSpPr>
-          <p:nvPr>
-            <p:ph idx="1"/>
-          </p:nvPr>
-        </p:nvSpPr>
-        <p:spPr/>
-        <p:txBody>
-          <a:bodyPr/>
-          <a:lstStyle/>
-          <a:p>
-            <a:endParaRPr lang="en-AU" dirty="0"/>
-          </a:p>
-        </p:txBody>
-      </p:sp>
+      <p:pic>
+        <p:nvPicPr>
+          <p:cNvPr id="5" name="Picture 4">
+            <a:extLst>
+              <a:ext uri="{FF2B5EF4-FFF2-40B4-BE49-F238E27FC236}">
+                <a16:creationId xmlns:a16="http://schemas.microsoft.com/office/drawing/2014/main" id="{0867EE4C-9376-34A1-D4EB-35787FB70D40}"/>
+              </a:ext>
+            </a:extLst>
+          </p:cNvPr>
+          <p:cNvPicPr>
+            <a:picLocks noChangeAspect="1"/>
+          </p:cNvPicPr>
+          <p:nvPr/>
+        </p:nvPicPr>
+        <p:blipFill>
+          <a:blip r:embed="rId2"/>
+          <a:stretch>
+            <a:fillRect/>
+          </a:stretch>
+        </p:blipFill>
+        <p:spPr>
+          <a:xfrm>
+            <a:off x="217089" y="1341395"/>
+            <a:ext cx="5244608" cy="4625650"/>
+          </a:xfrm>
+          <a:prstGeom prst="rect">
+            <a:avLst/>
+          </a:prstGeom>
+        </p:spPr>
+      </p:pic>
+      <p:pic>
+        <p:nvPicPr>
+          <p:cNvPr id="4" name="Picture 3">
+            <a:extLst>
+              <a:ext uri="{FF2B5EF4-FFF2-40B4-BE49-F238E27FC236}">
+                <a16:creationId xmlns:a16="http://schemas.microsoft.com/office/drawing/2014/main" id="{0667077F-5FFB-7E95-00E6-B12D15E27348}"/>
+              </a:ext>
+            </a:extLst>
+          </p:cNvPr>
+          <p:cNvPicPr>
+            <a:picLocks noChangeAspect="1"/>
+          </p:cNvPicPr>
+          <p:nvPr/>
+        </p:nvPicPr>
+        <p:blipFill>
+          <a:blip r:embed="rId3"/>
+          <a:stretch>
+            <a:fillRect/>
+          </a:stretch>
+        </p:blipFill>
+        <p:spPr>
+          <a:xfrm>
+            <a:off x="5878912" y="2257746"/>
+            <a:ext cx="6095999" cy="2892209"/>
+          </a:xfrm>
+          <a:prstGeom prst="rect">
+            <a:avLst/>
+          </a:prstGeom>
+        </p:spPr>
+      </p:pic>
     </p:spTree>
     <p:extLst>
       <p:ext uri="{BB962C8B-B14F-4D97-AF65-F5344CB8AC3E}">
